--- a/ganjil-2026-2027/pembelajaran-mesin/PM_A_Pertemuan3_Ganjil2026.pptx
+++ b/ganjil-2026-2027/pembelajaran-mesin/PM_A_Pertemuan3_Ganjil2026.pptx
@@ -34,6 +34,7 @@
     <p:sldId id="282" r:id="rId34"/>
     <p:sldId id="283" r:id="rId35"/>
     <p:sldId id="284" r:id="rId36"/>
+    <p:sldId id="285" r:id="rId37"/>
   </p:sldIdLst>
   <p:sldSz cx="12191695" cy="6858000" type="screen4x3"/>
   <p:notesSz cx="6858000" cy="9144000"/>
@@ -530,7 +531,7 @@
           <a:lstStyle/>
           <a:p>
             <a:r>
-              <a:t>Dua angka yang perlu disebut lisan dengan tegas: exit-ticket P2 NOL posting, dan Tugas 1 baru 2 dari 22 padahal tinggal 9 hari. Jangan menyalahkan - sampaikan sebagai fakta plus tawaran bantuan. Forum P1 menunjukkan mereka MAU posting kalau tahu dinilai; ulangi info itu.</a:t>
+              <a:t>Dua angka yang perlu disebut lisan dengan tegas: exit-ticket P2 NOL posting (dua minggu berturut-turut), dan Tugas 1 baru 6 dari 22 padahal tinggal 6 hari. Jangan menyalahkan - sampaikan sebagai fakta plus tawaran bantuan. Forum P1 menunjukkan mereka MAU posting kalau tahu dinilai; ulangi info itu.</a:t>
             </a:r>
           </a:p>
         </p:txBody>
@@ -600,7 +601,7 @@
           <a:lstStyle/>
           <a:p>
             <a:r>
-              <a:t>Ulangi persis kalimat modul. Ini akan jadi soal exit-ticket dan juga bagian dari rubrik reproducibility 10 poin.</a:t>
+              <a:t>Tekankan selector: kalau kolomnya ditulis manual, fitur turunan yang dibuat nanti tidak akan ikut diproses dan mereka akan bingung kenapa tidak ada efeknya.</a:t>
             </a:r>
           </a:p>
         </p:txBody>
@@ -670,7 +671,7 @@
           <a:lstStyle/>
           <a:p>
             <a:r>
-              <a:t>Bahas FarePerPerson agak lama. Ini contoh terbaik 'feature thinking': Fare mentah membuat keluarga besar tampak kaya. Setelah dibagi jumlah orang, sinyal kelas ekonominya baru benar. Itulah berpikir tentang fitur, bukan sekadar membuat fitur.</a:t>
+              <a:t>Ulangi persis kalimat modul. Ini akan jadi soal exit-ticket dan juga bagian dari rubrik reproducibility 10 poin.</a:t>
             </a:r>
           </a:p>
         </p:txBody>
@@ -740,7 +741,7 @@
           <a:lstStyle/>
           <a:p>
             <a:r>
-              <a:t>Tanya kelas: kenapa AgeBin harus dihitung di fit, tapi FamilySize boleh di transform? Jawaban: AgeBin butuh kuantil (statistik dari data); FamilySize cuma penjumlahan baris itu sendiri. Itu pembeda leakage.</a:t>
+              <a:t>Bahas FarePerPerson agak lama. Ini contoh terbaik 'feature thinking': Fare mentah membuat keluarga besar tampak kaya. Setelah dibagi jumlah orang, sinyal kelas ekonominya baru benar. Itulah berpikir tentang fitur, bukan sekadar membuat fitur.</a:t>
             </a:r>
           </a:p>
         </p:txBody>
@@ -810,7 +811,7 @@
           <a:lstStyle/>
           <a:p>
             <a:r>
-              <a:t>Tunjukkan: kalau FeatureMaker dijalankan manual di luar pipeline, cross_validate akan memberi skor optimistis karena AgeBin sudah 'melihat' seluruh data. Ini jebakan paling halus di modul ini.</a:t>
+              <a:t>Tanya kelas: kenapa AgeBin harus dihitung di fit, tapi FamilySize boleh di transform? Jawaban: AgeBin butuh kuantil (statistik dari data); FamilySize cuma penjumlahan baris itu sendiri. Itu pembeda leakage.</a:t>
             </a:r>
           </a:p>
         </p:txBody>
@@ -880,7 +881,7 @@
           <a:lstStyle/>
           <a:p>
             <a:r>
-              <a:t>Tekankan 'sisanya identik'. Kalau baseline pakai seed lain atau split lain, selisihnya tidak berarti apa-apa. Ini latihan pertama mereka soal kontrol eksperimen - yang akan dipakai terus sampai proyek akhir.</a:t>
+              <a:t>Tunjukkan: kalau FeatureMaker dijalankan manual di luar pipeline, cross_validate akan memberi skor optimistis karena AgeBin sudah 'melihat' seluruh data. Ini jebakan paling halus di modul ini.</a:t>
             </a:r>
           </a:p>
         </p:txBody>
@@ -950,7 +951,7 @@
           <a:lstStyle/>
           <a:p>
             <a:r>
-              <a:t>Pesan sikap ilmiah. Banyak mahasiswa memoles angka supaya 'berhasil'. Katakan terang-terangan: saya lebih menghargai ablation yang jujur daripada angka yang bagus tanpa kontrol.</a:t>
+              <a:t>Tekankan 'sisanya identik'. Kalau baseline pakai seed lain atau split lain, selisihnya tidak berarti apa-apa. Ini latihan pertama mereka soal kontrol eksperimen - yang akan dipakai terus sampai proyek akhir.</a:t>
             </a:r>
           </a:p>
         </p:txBody>
@@ -1020,7 +1021,7 @@
           <a:lstStyle/>
           <a:p>
             <a:r>
-              <a:t>Sebutkan bonus maksimal 5 poin: out-of-fold target encoding, ATAU perbandingan waktu latih &amp; ukuran fitur OHE vs ORD. Bonus untuk yang sudah selesai, bukan pengganti bagian wajib.</a:t>
+              <a:t>Pesan sikap ilmiah. Banyak mahasiswa memoles angka supaya 'berhasil'. Katakan terang-terangan: saya lebih menghargai ablation yang jujur daripada angka yang bagus tanpa kontrol.</a:t>
             </a:r>
           </a:p>
         </p:txBody>
@@ -1090,7 +1091,77 @@
           <a:lstStyle/>
           <a:p>
             <a:r>
-              <a:t>Sebut eksplisit: minggu lalu exit-ticket P2 nol posting. Ingatkan bahwa ini dinilai dan masuk gradebook, persis seperti forum P1 yang 9 orang sudah dapat 80-90. Beri waktu 5 menit di kelas untuk mengisi.</a:t>
+              <a:t>Sebutkan bonus maksimal 5 poin: out-of-fold target encoding, ATAU perbandingan waktu latih &amp; ukuran fitur OHE vs ORD. Bonus untuk yang sudah selesai, bukan pengganti bagian wajib.</a:t>
+            </a:r>
+          </a:p>
+        </p:txBody>
+      </p:sp>
+      <p:sp>
+        <p:nvSpPr>
+          <p:cNvPr id="4" name="Slide Number Placeholder 3"/>
+          <p:cNvSpPr>
+            <a:spLocks noGrp="1"/>
+          </p:cNvSpPr>
+          <p:nvPr>
+            <p:ph type="sldNum" idx="5" sz="quarter"/>
+          </p:nvPr>
+        </p:nvSpPr>
+        <p:spPr/>
+      </p:sp>
+    </p:spTree>
+  </p:cSld>
+  <p:clrMapOvr>
+    <a:masterClrMapping/>
+  </p:clrMapOvr>
+</p:notes>
+</file>
+
+<file path=ppt/notesSlides/notesSlide18.xml><?xml version="1.0" encoding="utf-8"?>
+<p:notes xmlns:a="http://schemas.openxmlformats.org/drawingml/2006/main" xmlns:p="http://schemas.openxmlformats.org/presentationml/2006/main" xmlns:r="http://schemas.openxmlformats.org/officeDocument/2006/relationships">
+  <p:cSld>
+    <p:spTree>
+      <p:nvGrpSpPr>
+        <p:cNvPr id="1" name=""/>
+        <p:cNvGrpSpPr/>
+        <p:nvPr/>
+      </p:nvGrpSpPr>
+      <p:grpSpPr>
+        <a:xfrm>
+          <a:off x="0" y="0"/>
+          <a:ext cx="0" cy="0"/>
+          <a:chOff x="0" y="0"/>
+          <a:chExt cx="0" cy="0"/>
+        </a:xfrm>
+      </p:grpSpPr>
+      <p:sp>
+        <p:nvSpPr>
+          <p:cNvPr id="2" name="Slide Image Placeholder 1"/>
+          <p:cNvSpPr>
+            <a:spLocks noGrp="1"/>
+          </p:cNvSpPr>
+          <p:nvPr>
+            <p:ph type="sldImg" idx="2"/>
+          </p:nvPr>
+        </p:nvSpPr>
+        <p:spPr/>
+      </p:sp>
+      <p:sp>
+        <p:nvSpPr>
+          <p:cNvPr id="3" name="Notes Placeholder 2"/>
+          <p:cNvSpPr>
+            <a:spLocks noGrp="1"/>
+          </p:cNvSpPr>
+          <p:nvPr>
+            <p:ph type="body" idx="3" sz="quarter"/>
+          </p:nvPr>
+        </p:nvSpPr>
+        <p:spPr/>
+        <p:txBody>
+          <a:bodyPr/>
+          <a:lstStyle/>
+          <a:p>
+            <a:r>
+              <a:t>Sebut eksplisit: dua minggu beruntun exit-ticket nol posting (P1 sembilan orang posting saat tahu dinilai). Beri waktu 5 menit DI KELAS untuk mengisi sebelum keluar - jangan dijadikan PR.</a:t>
             </a:r>
           </a:p>
         </p:txBody>
@@ -1230,7 +1301,7 @@
           <a:lstStyle/>
           <a:p>
             <a:r>
-              <a:t>Sambungkan langsung ke LKS P2 Titanic yang sudah mereka kerjakan. Tanya: di notebook P2 kemarin, kolom Sex dan Embarked Anda apakan? Sebagian pasti membuangnya. Itulah yang kita perbaiki hari ini.</a:t>
+              <a:t>Sebut dua hal: (1) Dico dapat 90 di forum DAN di Tugas 1 - konsisten, itu pola yang ingin dilihat; (2) nilai 60-78 di Tugas 1 punya catatan revisi konkret di kolom komentar tugas - tunjukkan CARA melihat komentar itu di layar, karena mereka jarang membukanya. Exit-ticket P2 kolomnya kosong semua karena nol posting - jangan biarkan begitu lagi minggu ini.</a:t>
             </a:r>
           </a:p>
         </p:txBody>
@@ -1300,7 +1371,7 @@
           <a:lstStyle/>
           <a:p>
             <a:r>
-              <a:t>Ingatkan: buka LKS di Colab lalu File &gt; Save a copy in Drive dulu. Kalau langsung diedit, pekerjaannya tidak tersimpan.</a:t>
+              <a:t>Sambungkan langsung ke LKS P2 Titanic yang sudah mereka kerjakan. Tanya: di notebook P2 kemarin, kolom Sex dan Embarked Anda apakan? Sebagian pasti membuangnya. Itulah yang kita perbaiki hari ini.</a:t>
             </a:r>
           </a:p>
         </p:txBody>
@@ -1370,7 +1441,7 @@
           <a:lstStyle/>
           <a:p>
             <a:r>
-              <a:t>Jawaban kuis K1 modul ada di sini: OrdinalEncoder lebih tepat kalau ada urutan alamiah. Tekankan drop='if_binary' - tanpa itu kolom Sex jadi dua kolom yang saling melengkapi sempurna (redundan).</a:t>
+              <a:t>Ingatkan: buka LKS di Colab lalu File &gt; Save a copy in Drive dulu. Kalau langsung diedit, pekerjaannya tidak tersimpan.</a:t>
             </a:r>
           </a:p>
         </p:txBody>
@@ -1440,7 +1511,7 @@
           <a:lstStyle/>
           <a:p>
             <a:r>
-              <a:t>Ini pintu masuk ke konsep leakage. Banyak mahasiswa membersihkan data di awal notebook sebelum split - dan itu sudah salah sejak awal.</a:t>
+              <a:t>Jawaban kuis K1 modul ada di sini: OrdinalEncoder lebih tepat kalau ada urutan alamiah. Tekankan drop='if_binary' - tanpa itu kolom Sex jadi dua kolom yang saling melengkapi sempurna (redundan).</a:t>
             </a:r>
           </a:p>
         </p:txBody>
@@ -1510,7 +1581,7 @@
           <a:lstStyle/>
           <a:p>
             <a:r>
-              <a:t>Jawaban kuis K3: target encoding 'mengintip' target; mitigasinya out-of-fold/cross-fitting atau smoothing. Di modul ini statusnya OPSIONAL - katakan: kalau belum nyaman, lewati saja, jangan dipaksakan.</a:t>
+              <a:t>Ini pintu masuk ke konsep leakage. Banyak mahasiswa membersihkan data di awal notebook sebelum split - dan itu sudah salah sejak awal.</a:t>
             </a:r>
           </a:p>
         </p:txBody>
@@ -1580,7 +1651,7 @@
           <a:lstStyle/>
           <a:p>
             <a:r>
-              <a:t>Jawaban: (1) mengklaim S &lt; C &lt; Q, urutan yang tidak bermakna - dan model linear akan memperlakukan jarak Q-S dua kali jarak C-S. (2) tiga kolom. (3) satu kolom sudah cukup; dua kolom saling redundan sempurna (multikolinearitas), karena itu drop='if_binary'.</a:t>
+              <a:t>Jawaban kuis K3: target encoding 'mengintip' target; mitigasinya out-of-fold/cross-fitting atau smoothing. Di modul ini statusnya OPSIONAL - katakan: kalau belum nyaman, lewati saja, jangan dipaksakan.</a:t>
             </a:r>
           </a:p>
         </p:txBody>
@@ -1650,7 +1721,7 @@
           <a:lstStyle/>
           <a:p>
             <a:r>
-              <a:t>Tekankan selector: kalau kolomnya ditulis manual, fitur turunan yang dibuat nanti tidak akan ikut diproses dan mereka akan bingung kenapa tidak ada efeknya.</a:t>
+              <a:t>Jawaban: (1) mengklaim S &lt; C &lt; Q, urutan yang tidak bermakna - dan model linear akan memperlakukan jarak Q-S dua kali jarak C-S. (2) tiga kolom. (3) satu kolom sudah cukup; dua kolom saling redundan sempurna (multikolinearitas), karena itu drop='if_binary'.</a:t>
             </a:r>
           </a:p>
         </p:txBody>
@@ -4893,6 +4964,217 @@
 </file>
 
 <file path=ppt/slides/slide10.xml><?xml version="1.0" encoding="utf-8"?>
+<p:sld xmlns:a="http://schemas.openxmlformats.org/drawingml/2006/main" xmlns:p="http://schemas.openxmlformats.org/presentationml/2006/main" xmlns:r="http://schemas.openxmlformats.org/officeDocument/2006/relationships">
+  <p:cSld>
+    <p:spTree>
+      <p:nvGrpSpPr>
+        <p:cNvPr id="1" name=""/>
+        <p:cNvGrpSpPr/>
+        <p:nvPr/>
+      </p:nvGrpSpPr>
+      <p:grpSpPr/>
+      <p:sp>
+        <p:nvSpPr>
+          <p:cNvPr id="2" name="Rectangle 1"/>
+          <p:cNvSpPr/>
+          <p:nvPr/>
+        </p:nvSpPr>
+        <p:spPr>
+          <a:xfrm>
+            <a:off x="0" y="0"/>
+            <a:ext cx="12191695" cy="6858000"/>
+          </a:xfrm>
+          <a:prstGeom prst="rect">
+            <a:avLst/>
+          </a:prstGeom>
+          <a:solidFill>
+            <a:srgbClr val="102545"/>
+          </a:solidFill>
+          <a:ln>
+            <a:noFill/>
+          </a:ln>
+          <a:effectLst/>
+        </p:spPr>
+        <p:style>
+          <a:lnRef idx="1">
+            <a:schemeClr val="accent1"/>
+          </a:lnRef>
+          <a:fillRef idx="3">
+            <a:schemeClr val="accent1"/>
+          </a:fillRef>
+          <a:effectRef idx="2">
+            <a:schemeClr val="accent1"/>
+          </a:effectRef>
+          <a:fontRef idx="minor">
+            <a:schemeClr val="lt1"/>
+          </a:fontRef>
+        </p:style>
+        <p:txBody>
+          <a:bodyPr rtlCol="0" anchor="ctr"/>
+          <a:lstStyle/>
+          <a:p>
+            <a:pPr algn="ctr"/>
+          </a:p>
+        </p:txBody>
+      </p:sp>
+      <p:sp>
+        <p:nvSpPr>
+          <p:cNvPr id="3" name="Rectangle 2"/>
+          <p:cNvSpPr/>
+          <p:nvPr/>
+        </p:nvSpPr>
+        <p:spPr>
+          <a:xfrm>
+            <a:off x="1005840" y="2788920"/>
+            <a:ext cx="1463040" cy="91440"/>
+          </a:xfrm>
+          <a:prstGeom prst="rect">
+            <a:avLst/>
+          </a:prstGeom>
+          <a:solidFill>
+            <a:srgbClr val="E6A023"/>
+          </a:solidFill>
+          <a:ln>
+            <a:noFill/>
+          </a:ln>
+          <a:effectLst/>
+        </p:spPr>
+        <p:style>
+          <a:lnRef idx="1">
+            <a:schemeClr val="accent1"/>
+          </a:lnRef>
+          <a:fillRef idx="3">
+            <a:schemeClr val="accent1"/>
+          </a:fillRef>
+          <a:effectRef idx="2">
+            <a:schemeClr val="accent1"/>
+          </a:effectRef>
+          <a:fontRef idx="minor">
+            <a:schemeClr val="lt1"/>
+          </a:fontRef>
+        </p:style>
+        <p:txBody>
+          <a:bodyPr rtlCol="0" anchor="ctr"/>
+          <a:lstStyle/>
+          <a:p>
+            <a:pPr algn="ctr"/>
+          </a:p>
+        </p:txBody>
+      </p:sp>
+      <p:sp>
+        <p:nvSpPr>
+          <p:cNvPr id="4" name="TextBox 3"/>
+          <p:cNvSpPr txBox="1"/>
+          <p:nvPr/>
+        </p:nvSpPr>
+        <p:spPr>
+          <a:xfrm>
+            <a:off x="1005840" y="2011680"/>
+            <a:ext cx="10241280" cy="731520"/>
+          </a:xfrm>
+          <a:prstGeom prst="rect">
+            <a:avLst/>
+          </a:prstGeom>
+          <a:noFill/>
+        </p:spPr>
+        <p:txBody>
+          <a:bodyPr wrap="square">
+            <a:spAutoFit/>
+          </a:bodyPr>
+          <a:lstStyle/>
+          <a:p>
+            <a:pPr>
+              <a:defRPr sz="2000" b="1">
+                <a:solidFill>
+                  <a:srgbClr val="E6A023"/>
+                </a:solidFill>
+              </a:defRPr>
+            </a:pPr>
+            <a:r>
+              <a:t>BAGIAN 1</a:t>
+            </a:r>
+          </a:p>
+        </p:txBody>
+      </p:sp>
+      <p:sp>
+        <p:nvSpPr>
+          <p:cNvPr id="5" name="TextBox 4"/>
+          <p:cNvSpPr txBox="1"/>
+          <p:nvPr/>
+        </p:nvSpPr>
+        <p:spPr>
+          <a:xfrm>
+            <a:off x="1005840" y="3063240"/>
+            <a:ext cx="10241280" cy="1280160"/>
+          </a:xfrm>
+          <a:prstGeom prst="rect">
+            <a:avLst/>
+          </a:prstGeom>
+          <a:noFill/>
+        </p:spPr>
+        <p:txBody>
+          <a:bodyPr wrap="square">
+            <a:spAutoFit/>
+          </a:bodyPr>
+          <a:lstStyle/>
+          <a:p>
+            <a:pPr>
+              <a:defRPr sz="4400" b="1">
+                <a:solidFill>
+                  <a:srgbClr val="FFFFFF"/>
+                </a:solidFill>
+              </a:defRPr>
+            </a:pPr>
+            <a:r>
+              <a:t>Menyandikan kategori</a:t>
+            </a:r>
+          </a:p>
+        </p:txBody>
+      </p:sp>
+      <p:sp>
+        <p:nvSpPr>
+          <p:cNvPr id="6" name="TextBox 5"/>
+          <p:cNvSpPr txBox="1"/>
+          <p:nvPr/>
+        </p:nvSpPr>
+        <p:spPr>
+          <a:xfrm>
+            <a:off x="1005840" y="4297680"/>
+            <a:ext cx="10241280" cy="914400"/>
+          </a:xfrm>
+          <a:prstGeom prst="rect">
+            <a:avLst/>
+          </a:prstGeom>
+          <a:noFill/>
+        </p:spPr>
+        <p:txBody>
+          <a:bodyPr wrap="square">
+            <a:spAutoFit/>
+          </a:bodyPr>
+          <a:lstStyle/>
+          <a:p>
+            <a:pPr>
+              <a:defRPr sz="2200">
+                <a:solidFill>
+                  <a:srgbClr val="C8D4E6"/>
+                </a:solidFill>
+              </a:defRPr>
+            </a:pPr>
+            <a:r>
+              <a:t>One-Hot, Ordinal, dan satu jebakan bernama target encoding</a:t>
+            </a:r>
+          </a:p>
+        </p:txBody>
+      </p:sp>
+    </p:spTree>
+  </p:cSld>
+  <p:clrMapOvr>
+    <a:masterClrMapping/>
+  </p:clrMapOvr>
+</p:sld>
+</file>
+
+<file path=ppt/slides/slide11.xml><?xml version="1.0" encoding="utf-8"?>
 <p:sld xmlns:a="http://schemas.openxmlformats.org/drawingml/2006/main" xmlns:p="http://schemas.openxmlformats.org/presentationml/2006/main" xmlns:r="http://schemas.openxmlformats.org/officeDocument/2006/relationships">
   <p:cSld>
     <p:spTree>
@@ -5518,7 +5800,7 @@
 </p:sld>
 </file>
 
-<file path=ppt/slides/slide11.xml><?xml version="1.0" encoding="utf-8"?>
+<file path=ppt/slides/slide12.xml><?xml version="1.0" encoding="utf-8"?>
 <p:sld xmlns:a="http://schemas.openxmlformats.org/drawingml/2006/main" xmlns:p="http://schemas.openxmlformats.org/presentationml/2006/main" xmlns:r="http://schemas.openxmlformats.org/officeDocument/2006/relationships">
   <p:cSld>
     <p:spTree>
@@ -5874,186 +6156,6 @@
                 </a:solidFill>
               </a:rPr>
               <a:t>, bukan di sel notebook terpisah</a:t>
-            </a:r>
-          </a:p>
-        </p:txBody>
-      </p:sp>
-    </p:spTree>
-  </p:cSld>
-  <p:clrMapOvr>
-    <a:masterClrMapping/>
-  </p:clrMapOvr>
-</p:sld>
-</file>
-
-<file path=ppt/slides/slide12.xml><?xml version="1.0" encoding="utf-8"?>
-<p:sld xmlns:a="http://schemas.openxmlformats.org/drawingml/2006/main" xmlns:p="http://schemas.openxmlformats.org/presentationml/2006/main" xmlns:r="http://schemas.openxmlformats.org/officeDocument/2006/relationships">
-  <p:cSld>
-    <p:spTree>
-      <p:nvGrpSpPr>
-        <p:cNvPr id="1" name=""/>
-        <p:cNvGrpSpPr/>
-        <p:nvPr/>
-      </p:nvGrpSpPr>
-      <p:grpSpPr/>
-      <p:sp>
-        <p:nvSpPr>
-          <p:cNvPr id="2" name="Rectangle 1"/>
-          <p:cNvSpPr/>
-          <p:nvPr/>
-        </p:nvSpPr>
-        <p:spPr>
-          <a:xfrm>
-            <a:off x="0" y="0"/>
-            <a:ext cx="12191695" cy="6858000"/>
-          </a:xfrm>
-          <a:prstGeom prst="rect">
-            <a:avLst/>
-          </a:prstGeom>
-          <a:solidFill>
-            <a:srgbClr val="F5F7FA"/>
-          </a:solidFill>
-          <a:ln>
-            <a:noFill/>
-          </a:ln>
-          <a:effectLst/>
-        </p:spPr>
-        <p:style>
-          <a:lnRef idx="1">
-            <a:schemeClr val="accent1"/>
-          </a:lnRef>
-          <a:fillRef idx="3">
-            <a:schemeClr val="accent1"/>
-          </a:fillRef>
-          <a:effectRef idx="2">
-            <a:schemeClr val="accent1"/>
-          </a:effectRef>
-          <a:fontRef idx="minor">
-            <a:schemeClr val="lt1"/>
-          </a:fontRef>
-        </p:style>
-        <p:txBody>
-          <a:bodyPr rtlCol="0" anchor="ctr"/>
-          <a:lstStyle/>
-          <a:p>
-            <a:pPr algn="ctr"/>
-          </a:p>
-        </p:txBody>
-      </p:sp>
-      <p:sp>
-        <p:nvSpPr>
-          <p:cNvPr id="3" name="Rectangle 2"/>
-          <p:cNvSpPr/>
-          <p:nvPr/>
-        </p:nvSpPr>
-        <p:spPr>
-          <a:xfrm>
-            <a:off x="777240" y="2240280"/>
-            <a:ext cx="128016" cy="2011680"/>
-          </a:xfrm>
-          <a:prstGeom prst="rect">
-            <a:avLst/>
-          </a:prstGeom>
-          <a:solidFill>
-            <a:srgbClr val="E6A023"/>
-          </a:solidFill>
-          <a:ln>
-            <a:noFill/>
-          </a:ln>
-          <a:effectLst/>
-        </p:spPr>
-        <p:style>
-          <a:lnRef idx="1">
-            <a:schemeClr val="accent1"/>
-          </a:lnRef>
-          <a:fillRef idx="3">
-            <a:schemeClr val="accent1"/>
-          </a:fillRef>
-          <a:effectRef idx="2">
-            <a:schemeClr val="accent1"/>
-          </a:effectRef>
-          <a:fontRef idx="minor">
-            <a:schemeClr val="lt1"/>
-          </a:fontRef>
-        </p:style>
-        <p:txBody>
-          <a:bodyPr rtlCol="0" anchor="ctr"/>
-          <a:lstStyle/>
-          <a:p>
-            <a:pPr algn="ctr"/>
-          </a:p>
-        </p:txBody>
-      </p:sp>
-      <p:sp>
-        <p:nvSpPr>
-          <p:cNvPr id="4" name="TextBox 3"/>
-          <p:cNvSpPr txBox="1"/>
-          <p:nvPr/>
-        </p:nvSpPr>
-        <p:spPr>
-          <a:xfrm>
-            <a:off x="1234440" y="2148840"/>
-            <a:ext cx="9966960" cy="2103120"/>
-          </a:xfrm>
-          <a:prstGeom prst="rect">
-            <a:avLst/>
-          </a:prstGeom>
-          <a:noFill/>
-        </p:spPr>
-        <p:txBody>
-          <a:bodyPr wrap="square">
-            <a:spAutoFit/>
-          </a:bodyPr>
-          <a:lstStyle/>
-          <a:p>
-            <a:pPr>
-              <a:defRPr sz="3800" b="1">
-                <a:solidFill>
-                  <a:srgbClr val="B32D2D"/>
-                </a:solidFill>
-              </a:defRPr>
-            </a:pPr>
-            <a:r>
-              <a:t>Target encoding itu kuat.</a:t>
-            </a:r>
-            <a:br/>
-            <a:r>
-              <a:t>Dan paling mudah bikin Anda tertipu.</a:t>
-            </a:r>
-          </a:p>
-        </p:txBody>
-      </p:sp>
-      <p:sp>
-        <p:nvSpPr>
-          <p:cNvPr id="5" name="TextBox 4"/>
-          <p:cNvSpPr txBox="1"/>
-          <p:nvPr/>
-        </p:nvSpPr>
-        <p:spPr>
-          <a:xfrm>
-            <a:off x="1234440" y="4434840"/>
-            <a:ext cx="9966960" cy="1371600"/>
-          </a:xfrm>
-          <a:prstGeom prst="rect">
-            <a:avLst/>
-          </a:prstGeom>
-          <a:noFill/>
-        </p:spPr>
-        <p:txBody>
-          <a:bodyPr wrap="square">
-            <a:spAutoFit/>
-          </a:bodyPr>
-          <a:lstStyle/>
-          <a:p>
-            <a:pPr>
-              <a:defRPr sz="2100">
-                <a:solidFill>
-                  <a:srgbClr val="5A6372"/>
-                </a:solidFill>
-              </a:defRPr>
-            </a:pPr>
-            <a:r>
-              <a:t>Menyandikan kategori ke rata-rata target: sangat efektif untuk kardinalitas tinggi. Tapi Anda sedang memasukkan JAWABAN ke dalam fitur. Tanpa out-of-fold encoding di dalam CV, skor validasi Anda akan indah - dan bohong.</a:t>
             </a:r>
           </a:p>
         </p:txBody>
@@ -6091,7 +6193,7 @@
             <a:avLst/>
           </a:prstGeom>
           <a:solidFill>
-            <a:srgbClr val="FFFFFF"/>
+            <a:srgbClr val="F5F7FA"/>
           </a:solidFill>
           <a:ln>
             <a:noFill/>
@@ -6128,14 +6230,14 @@
         </p:nvSpPr>
         <p:spPr>
           <a:xfrm>
-            <a:off x="0" y="0"/>
-            <a:ext cx="12191695" cy="128016"/>
+            <a:off x="777240" y="2240280"/>
+            <a:ext cx="128016" cy="2011680"/>
           </a:xfrm>
           <a:prstGeom prst="rect">
             <a:avLst/>
           </a:prstGeom>
           <a:solidFill>
-            <a:srgbClr val="102545"/>
+            <a:srgbClr val="E6A023"/>
           </a:solidFill>
           <a:ln>
             <a:noFill/>
@@ -6172,8 +6274,8 @@
         </p:nvSpPr>
         <p:spPr>
           <a:xfrm>
-            <a:off x="777240" y="411480"/>
-            <a:ext cx="10789920" cy="914400"/>
+            <a:off x="1234440" y="2148840"/>
+            <a:ext cx="9966960" cy="2103120"/>
           </a:xfrm>
           <a:prstGeom prst="rect">
             <a:avLst/>
@@ -6187,14 +6289,18 @@
           <a:lstStyle/>
           <a:p>
             <a:pPr>
-              <a:defRPr sz="3400" b="1">
-                <a:solidFill>
-                  <a:srgbClr val="102545"/>
+              <a:defRPr sz="3800" b="1">
+                <a:solidFill>
+                  <a:srgbClr val="B32D2D"/>
                 </a:solidFill>
               </a:defRPr>
             </a:pPr>
             <a:r>
-              <a:t>Uji cepat 1 - dua menit, tebak dulu</a:t>
+              <a:t>Target encoding itu kuat.</a:t>
+            </a:r>
+            <a:br/>
+            <a:r>
+              <a:t>Dan paling mudah bikin Anda tertipu.</a:t>
             </a:r>
           </a:p>
         </p:txBody>
@@ -6207,8 +6313,8 @@
         </p:nvSpPr>
         <p:spPr>
           <a:xfrm>
-            <a:off x="777240" y="1417320"/>
-            <a:ext cx="10789920" cy="4937760"/>
+            <a:off x="1234440" y="4434840"/>
+            <a:ext cx="9966960" cy="1371600"/>
           </a:xfrm>
           <a:prstGeom prst="rect">
             <a:avLst/>
@@ -6222,116 +6328,14 @@
           <a:lstStyle/>
           <a:p>
             <a:pPr>
-              <a:spcBef>
-                <a:spcPts val="1100"/>
-              </a:spcBef>
+              <a:defRPr sz="2100">
+                <a:solidFill>
+                  <a:srgbClr val="5A6372"/>
+                </a:solidFill>
+              </a:defRPr>
             </a:pPr>
             <a:r>
-              <a:rPr sz="2200">
-                <a:solidFill>
-                  <a:srgbClr val="1A1F2B"/>
-                </a:solidFill>
-              </a:rPr>
-              <a:t>•  Pada dataset Titanic, kolom `Embarked` punya 3 nilai (S, C, Q):</a:t>
-            </a:r>
-          </a:p>
-          <a:p>
-            <a:pPr lvl="1">
-              <a:spcBef>
-                <a:spcPts val="300"/>
-              </a:spcBef>
-            </a:pPr>
-            <a:r>
-              <a:rPr sz="1900">
-                <a:solidFill>
-                  <a:srgbClr val="5A6372"/>
-                </a:solidFill>
-              </a:rPr>
-              <a:t>–  Kalau disandikan </a:t>
-            </a:r>
-            <a:r>
-              <a:rPr sz="1900" b="1">
-                <a:solidFill>
-                  <a:srgbClr val="102545"/>
-                </a:solidFill>
-              </a:rPr>
-              <a:t>Ordinal</a:t>
-            </a:r>
-            <a:r>
-              <a:rPr sz="1900">
-                <a:solidFill>
-                  <a:srgbClr val="5A6372"/>
-                </a:solidFill>
-              </a:rPr>
-              <a:t> jadi 0/1/2, apa yang secara tidak sengaja diklaim ke model?</a:t>
-            </a:r>
-          </a:p>
-          <a:p>
-            <a:pPr lvl="1">
-              <a:spcBef>
-                <a:spcPts val="300"/>
-              </a:spcBef>
-            </a:pPr>
-            <a:r>
-              <a:rPr sz="1900">
-                <a:solidFill>
-                  <a:srgbClr val="5A6372"/>
-                </a:solidFill>
-              </a:rPr>
-              <a:t>–  Kalau disandikan </a:t>
-            </a:r>
-            <a:r>
-              <a:rPr sz="1900" b="1">
-                <a:solidFill>
-                  <a:srgbClr val="102545"/>
-                </a:solidFill>
-              </a:rPr>
-              <a:t>One-Hot</a:t>
-            </a:r>
-            <a:r>
-              <a:rPr sz="1900">
-                <a:solidFill>
-                  <a:srgbClr val="5A6372"/>
-                </a:solidFill>
-              </a:rPr>
-              <a:t>, berapa kolom baru yang muncul?</a:t>
-            </a:r>
-          </a:p>
-          <a:p>
-            <a:pPr lvl="1">
-              <a:spcBef>
-                <a:spcPts val="300"/>
-              </a:spcBef>
-            </a:pPr>
-            <a:r>
-              <a:rPr sz="1900">
-                <a:solidFill>
-                  <a:srgbClr val="5A6372"/>
-                </a:solidFill>
-              </a:rPr>
-              <a:t>–  Kolom `Sex` hanya punya 2 nilai. Berapa kolom yang SEHARUSNYA dihasilkan OHE - dan kenapa?</a:t>
-            </a:r>
-          </a:p>
-          <a:p>
-            <a:pPr>
-              <a:spcBef>
-                <a:spcPts val="1100"/>
-              </a:spcBef>
-            </a:pPr>
-          </a:p>
-          <a:p>
-            <a:pPr>
-              <a:spcBef>
-                <a:spcPts val="1100"/>
-              </a:spcBef>
-            </a:pPr>
-            <a:r>
-              <a:rPr sz="2200">
-                <a:solidFill>
-                  <a:srgbClr val="1A1F2B"/>
-                </a:solidFill>
-              </a:rPr>
-              <a:t>•  Diskusikan dengan sebelah. Jawaban ketiga adalah alasan `drop='if_binary'` ada.</a:t>
+              <a:t>Menyandikan kategori ke rata-rata target: sangat efektif untuk kardinalitas tinggi. Tapi Anda sedang memasukkan JAWABAN ke dalam fitur. Tanpa out-of-fold encoding di dalam CV, skor validasi Anda akan indah - dan bohong.</a:t>
             </a:r>
           </a:p>
         </p:txBody>
@@ -6369,6 +6373,50 @@
             <a:avLst/>
           </a:prstGeom>
           <a:solidFill>
+            <a:srgbClr val="FFFFFF"/>
+          </a:solidFill>
+          <a:ln>
+            <a:noFill/>
+          </a:ln>
+          <a:effectLst/>
+        </p:spPr>
+        <p:style>
+          <a:lnRef idx="1">
+            <a:schemeClr val="accent1"/>
+          </a:lnRef>
+          <a:fillRef idx="3">
+            <a:schemeClr val="accent1"/>
+          </a:fillRef>
+          <a:effectRef idx="2">
+            <a:schemeClr val="accent1"/>
+          </a:effectRef>
+          <a:fontRef idx="minor">
+            <a:schemeClr val="lt1"/>
+          </a:fontRef>
+        </p:style>
+        <p:txBody>
+          <a:bodyPr rtlCol="0" anchor="ctr"/>
+          <a:lstStyle/>
+          <a:p>
+            <a:pPr algn="ctr"/>
+          </a:p>
+        </p:txBody>
+      </p:sp>
+      <p:sp>
+        <p:nvSpPr>
+          <p:cNvPr id="3" name="Rectangle 2"/>
+          <p:cNvSpPr/>
+          <p:nvPr/>
+        </p:nvSpPr>
+        <p:spPr>
+          <a:xfrm>
+            <a:off x="0" y="0"/>
+            <a:ext cx="12191695" cy="128016"/>
+          </a:xfrm>
+          <a:prstGeom prst="rect">
+            <a:avLst/>
+          </a:prstGeom>
+          <a:solidFill>
             <a:srgbClr val="102545"/>
           </a:solidFill>
           <a:ln>
@@ -6400,58 +6448,14 @@
       </p:sp>
       <p:sp>
         <p:nvSpPr>
-          <p:cNvPr id="3" name="Rectangle 2"/>
-          <p:cNvSpPr/>
-          <p:nvPr/>
-        </p:nvSpPr>
-        <p:spPr>
-          <a:xfrm>
-            <a:off x="1005840" y="2788920"/>
-            <a:ext cx="1463040" cy="91440"/>
-          </a:xfrm>
-          <a:prstGeom prst="rect">
-            <a:avLst/>
-          </a:prstGeom>
-          <a:solidFill>
-            <a:srgbClr val="E6A023"/>
-          </a:solidFill>
-          <a:ln>
-            <a:noFill/>
-          </a:ln>
-          <a:effectLst/>
-        </p:spPr>
-        <p:style>
-          <a:lnRef idx="1">
-            <a:schemeClr val="accent1"/>
-          </a:lnRef>
-          <a:fillRef idx="3">
-            <a:schemeClr val="accent1"/>
-          </a:fillRef>
-          <a:effectRef idx="2">
-            <a:schemeClr val="accent1"/>
-          </a:effectRef>
-          <a:fontRef idx="minor">
-            <a:schemeClr val="lt1"/>
-          </a:fontRef>
-        </p:style>
-        <p:txBody>
-          <a:bodyPr rtlCol="0" anchor="ctr"/>
-          <a:lstStyle/>
-          <a:p>
-            <a:pPr algn="ctr"/>
-          </a:p>
-        </p:txBody>
-      </p:sp>
-      <p:sp>
-        <p:nvSpPr>
           <p:cNvPr id="4" name="TextBox 3"/>
           <p:cNvSpPr txBox="1"/>
           <p:nvPr/>
         </p:nvSpPr>
         <p:spPr>
           <a:xfrm>
-            <a:off x="1005840" y="2011680"/>
-            <a:ext cx="10241280" cy="731520"/>
+            <a:off x="777240" y="411480"/>
+            <a:ext cx="10789920" cy="914400"/>
           </a:xfrm>
           <a:prstGeom prst="rect">
             <a:avLst/>
@@ -6465,14 +6469,14 @@
           <a:lstStyle/>
           <a:p>
             <a:pPr>
-              <a:defRPr sz="2000" b="1">
-                <a:solidFill>
-                  <a:srgbClr val="E6A023"/>
+              <a:defRPr sz="3400" b="1">
+                <a:solidFill>
+                  <a:srgbClr val="102545"/>
                 </a:solidFill>
               </a:defRPr>
             </a:pPr>
             <a:r>
-              <a:t>BAGIAN 2 - PRAKTIKUM 1</a:t>
+              <a:t>Uji cepat 1 - dua menit, tebak dulu</a:t>
             </a:r>
           </a:p>
         </p:txBody>
@@ -6485,8 +6489,8 @@
         </p:nvSpPr>
         <p:spPr>
           <a:xfrm>
-            <a:off x="1005840" y="3063240"/>
-            <a:ext cx="10241280" cy="1280160"/>
+            <a:off x="777240" y="1417320"/>
+            <a:ext cx="10789920" cy="4937760"/>
           </a:xfrm>
           <a:prstGeom prst="rect">
             <a:avLst/>
@@ -6500,49 +6504,116 @@
           <a:lstStyle/>
           <a:p>
             <a:pPr>
-              <a:defRPr sz="4400" b="1">
-                <a:solidFill>
-                  <a:srgbClr val="FFFFFF"/>
-                </a:solidFill>
-              </a:defRPr>
+              <a:spcBef>
+                <a:spcPts val="1100"/>
+              </a:spcBef>
             </a:pPr>
             <a:r>
-              <a:t>Encoding di dalam Pipeline</a:t>
-            </a:r>
-          </a:p>
-        </p:txBody>
-      </p:sp>
-      <p:sp>
-        <p:nvSpPr>
-          <p:cNvPr id="6" name="TextBox 5"/>
-          <p:cNvSpPr txBox="1"/>
-          <p:nvPr/>
-        </p:nvSpPr>
-        <p:spPr>
-          <a:xfrm>
-            <a:off x="1005840" y="4297680"/>
-            <a:ext cx="10241280" cy="914400"/>
-          </a:xfrm>
-          <a:prstGeom prst="rect">
-            <a:avLst/>
-          </a:prstGeom>
-          <a:noFill/>
-        </p:spPr>
-        <p:txBody>
-          <a:bodyPr wrap="square">
-            <a:spAutoFit/>
-          </a:bodyPr>
-          <a:lstStyle/>
+              <a:rPr sz="2200">
+                <a:solidFill>
+                  <a:srgbClr val="1A1F2B"/>
+                </a:solidFill>
+              </a:rPr>
+              <a:t>•  Pada dataset Titanic, kolom `Embarked` punya 3 nilai (S, C, Q):</a:t>
+            </a:r>
+          </a:p>
+          <a:p>
+            <a:pPr lvl="1">
+              <a:spcBef>
+                <a:spcPts val="300"/>
+              </a:spcBef>
+            </a:pPr>
+            <a:r>
+              <a:rPr sz="1900">
+                <a:solidFill>
+                  <a:srgbClr val="5A6372"/>
+                </a:solidFill>
+              </a:rPr>
+              <a:t>–  Kalau disandikan </a:t>
+            </a:r>
+            <a:r>
+              <a:rPr sz="1900" b="1">
+                <a:solidFill>
+                  <a:srgbClr val="102545"/>
+                </a:solidFill>
+              </a:rPr>
+              <a:t>Ordinal</a:t>
+            </a:r>
+            <a:r>
+              <a:rPr sz="1900">
+                <a:solidFill>
+                  <a:srgbClr val="5A6372"/>
+                </a:solidFill>
+              </a:rPr>
+              <a:t> jadi 0/1/2, apa yang secara tidak sengaja diklaim ke model?</a:t>
+            </a:r>
+          </a:p>
+          <a:p>
+            <a:pPr lvl="1">
+              <a:spcBef>
+                <a:spcPts val="300"/>
+              </a:spcBef>
+            </a:pPr>
+            <a:r>
+              <a:rPr sz="1900">
+                <a:solidFill>
+                  <a:srgbClr val="5A6372"/>
+                </a:solidFill>
+              </a:rPr>
+              <a:t>–  Kalau disandikan </a:t>
+            </a:r>
+            <a:r>
+              <a:rPr sz="1900" b="1">
+                <a:solidFill>
+                  <a:srgbClr val="102545"/>
+                </a:solidFill>
+              </a:rPr>
+              <a:t>One-Hot</a:t>
+            </a:r>
+            <a:r>
+              <a:rPr sz="1900">
+                <a:solidFill>
+                  <a:srgbClr val="5A6372"/>
+                </a:solidFill>
+              </a:rPr>
+              <a:t>, berapa kolom baru yang muncul?</a:t>
+            </a:r>
+          </a:p>
+          <a:p>
+            <a:pPr lvl="1">
+              <a:spcBef>
+                <a:spcPts val="300"/>
+              </a:spcBef>
+            </a:pPr>
+            <a:r>
+              <a:rPr sz="1900">
+                <a:solidFill>
+                  <a:srgbClr val="5A6372"/>
+                </a:solidFill>
+              </a:rPr>
+              <a:t>–  Kolom `Sex` hanya punya 2 nilai. Berapa kolom yang SEHARUSNYA dihasilkan OHE - dan kenapa?</a:t>
+            </a:r>
+          </a:p>
           <a:p>
             <a:pPr>
-              <a:defRPr sz="2200">
-                <a:solidFill>
-                  <a:srgbClr val="C8D4E6"/>
-                </a:solidFill>
-              </a:defRPr>
+              <a:spcBef>
+                <a:spcPts val="1100"/>
+              </a:spcBef>
             </a:pPr>
-            <a:r>
-              <a:t>Modul bagian 5.5 - satu-satunya cara yang aman dari leakage</a:t>
+          </a:p>
+          <a:p>
+            <a:pPr>
+              <a:spcBef>
+                <a:spcPts val="1100"/>
+              </a:spcBef>
+            </a:pPr>
+            <a:r>
+              <a:rPr sz="2200">
+                <a:solidFill>
+                  <a:srgbClr val="1A1F2B"/>
+                </a:solidFill>
+              </a:rPr>
+              <a:t>•  Diskusikan dengan sebelah. Jawaban ketiga adalah alasan `drop='if_binary'` ada.</a:t>
             </a:r>
           </a:p>
         </p:txBody>
@@ -6580,50 +6651,6 @@
             <a:avLst/>
           </a:prstGeom>
           <a:solidFill>
-            <a:srgbClr val="FFFFFF"/>
-          </a:solidFill>
-          <a:ln>
-            <a:noFill/>
-          </a:ln>
-          <a:effectLst/>
-        </p:spPr>
-        <p:style>
-          <a:lnRef idx="1">
-            <a:schemeClr val="accent1"/>
-          </a:lnRef>
-          <a:fillRef idx="3">
-            <a:schemeClr val="accent1"/>
-          </a:fillRef>
-          <a:effectRef idx="2">
-            <a:schemeClr val="accent1"/>
-          </a:effectRef>
-          <a:fontRef idx="minor">
-            <a:schemeClr val="lt1"/>
-          </a:fontRef>
-        </p:style>
-        <p:txBody>
-          <a:bodyPr rtlCol="0" anchor="ctr"/>
-          <a:lstStyle/>
-          <a:p>
-            <a:pPr algn="ctr"/>
-          </a:p>
-        </p:txBody>
-      </p:sp>
-      <p:sp>
-        <p:nvSpPr>
-          <p:cNvPr id="3" name="Rectangle 2"/>
-          <p:cNvSpPr/>
-          <p:nvPr/>
-        </p:nvSpPr>
-        <p:spPr>
-          <a:xfrm>
-            <a:off x="0" y="0"/>
-            <a:ext cx="12191695" cy="128016"/>
-          </a:xfrm>
-          <a:prstGeom prst="rect">
-            <a:avLst/>
-          </a:prstGeom>
-          <a:solidFill>
             <a:srgbClr val="102545"/>
           </a:solidFill>
           <a:ln>
@@ -6655,55 +6682,20 @@
       </p:sp>
       <p:sp>
         <p:nvSpPr>
-          <p:cNvPr id="4" name="TextBox 3"/>
-          <p:cNvSpPr txBox="1"/>
-          <p:nvPr/>
-        </p:nvSpPr>
-        <p:spPr>
-          <a:xfrm>
-            <a:off x="777240" y="411480"/>
-            <a:ext cx="10789920" cy="914400"/>
-          </a:xfrm>
-          <a:prstGeom prst="rect">
-            <a:avLst/>
-          </a:prstGeom>
-          <a:noFill/>
-        </p:spPr>
-        <p:txBody>
-          <a:bodyPr wrap="square">
-            <a:spAutoFit/>
-          </a:bodyPr>
-          <a:lstStyle/>
-          <a:p>
-            <a:pPr>
-              <a:defRPr sz="3400" b="1">
-                <a:solidFill>
-                  <a:srgbClr val="102545"/>
-                </a:solidFill>
-              </a:defRPr>
-            </a:pPr>
-            <a:r>
-              <a:t>ColumnTransformer: numerik dan kategorikal, jalur terpisah</a:t>
-            </a:r>
-          </a:p>
-        </p:txBody>
-      </p:sp>
-      <p:sp>
-        <p:nvSpPr>
-          <p:cNvPr id="5" name="Rectangle 4"/>
+          <p:cNvPr id="3" name="Rectangle 2"/>
           <p:cNvSpPr/>
           <p:nvPr/>
         </p:nvSpPr>
         <p:spPr>
           <a:xfrm>
-            <a:off x="777240" y="1417320"/>
-            <a:ext cx="10652760" cy="4206240"/>
+            <a:off x="1005840" y="2788920"/>
+            <a:ext cx="1463040" cy="91440"/>
           </a:xfrm>
           <a:prstGeom prst="rect">
             <a:avLst/>
           </a:prstGeom>
           <a:solidFill>
-            <a:srgbClr val="141A26"/>
+            <a:srgbClr val="E6A023"/>
           </a:solidFill>
           <a:ln>
             <a:noFill/>
@@ -6734,14 +6726,14 @@
       </p:sp>
       <p:sp>
         <p:nvSpPr>
-          <p:cNvPr id="6" name="TextBox 5"/>
+          <p:cNvPr id="4" name="TextBox 3"/>
           <p:cNvSpPr txBox="1"/>
           <p:nvPr/>
         </p:nvSpPr>
         <p:spPr>
           <a:xfrm>
-            <a:off x="1005840" y="1572768"/>
-            <a:ext cx="10241280" cy="4023359"/>
+            <a:off x="1005840" y="2011680"/>
+            <a:ext cx="10241280" cy="731520"/>
           </a:xfrm>
           <a:prstGeom prst="rect">
             <a:avLst/>
@@ -6755,205 +6747,28 @@
           <a:lstStyle/>
           <a:p>
             <a:pPr>
-              <a:defRPr sz="1500">
-                <a:solidFill>
-                  <a:srgbClr val="D8E2F0"/>
-                </a:solidFill>
-                <a:latin typeface="Consolas"/>
+              <a:defRPr sz="2000" b="1">
+                <a:solidFill>
+                  <a:srgbClr val="E6A023"/>
+                </a:solidFill>
               </a:defRPr>
             </a:pPr>
             <a:r>
-              <a:t>from sklearn.compose import ColumnTransformer, make_column_selector as selector</a:t>
-            </a:r>
-          </a:p>
-          <a:p>
-            <a:pPr>
-              <a:defRPr sz="1500">
-                <a:solidFill>
-                  <a:srgbClr val="D8E2F0"/>
-                </a:solidFill>
-                <a:latin typeface="Consolas"/>
-              </a:defRPr>
-            </a:pPr>
-            <a:r>
-              <a:t>from sklearn.pipeline import Pipeline</a:t>
-            </a:r>
-          </a:p>
-          <a:p>
-            <a:pPr>
-              <a:defRPr sz="1500">
-                <a:solidFill>
-                  <a:srgbClr val="D8E2F0"/>
-                </a:solidFill>
-                <a:latin typeface="Consolas"/>
-              </a:defRPr>
-            </a:pPr>
-            <a:r>
-              <a:t>from sklearn.impute import SimpleImputer</a:t>
-            </a:r>
-          </a:p>
-          <a:p>
-            <a:pPr>
-              <a:defRPr sz="1500">
-                <a:solidFill>
-                  <a:srgbClr val="D8E2F0"/>
-                </a:solidFill>
-                <a:latin typeface="Consolas"/>
-              </a:defRPr>
-            </a:pPr>
-            <a:r>
-              <a:t>from sklearn.preprocessing import OneHotEncoder, StandardScaler</a:t>
-            </a:r>
-          </a:p>
-          <a:p>
-            <a:pPr>
-              <a:defRPr sz="1500">
-                <a:solidFill>
-                  <a:srgbClr val="D8E2F0"/>
-                </a:solidFill>
-                <a:latin typeface="Consolas"/>
-              </a:defRPr>
-            </a:pPr>
-          </a:p>
-          <a:p>
-            <a:pPr>
-              <a:defRPr sz="1500">
-                <a:solidFill>
-                  <a:srgbClr val="D8E2F0"/>
-                </a:solidFill>
-                <a:latin typeface="Consolas"/>
-              </a:defRPr>
-            </a:pPr>
-            <a:r>
-              <a:t>num_sel = selector(dtype_include=['int64', 'float64'])</a:t>
-            </a:r>
-          </a:p>
-          <a:p>
-            <a:pPr>
-              <a:defRPr sz="1500">
-                <a:solidFill>
-                  <a:srgbClr val="D8E2F0"/>
-                </a:solidFill>
-                <a:latin typeface="Consolas"/>
-              </a:defRPr>
-            </a:pPr>
-            <a:r>
-              <a:t>cat_sel = selector(dtype_include=['object', 'category', 'bool'])</a:t>
-            </a:r>
-          </a:p>
-          <a:p>
-            <a:pPr>
-              <a:defRPr sz="1500">
-                <a:solidFill>
-                  <a:srgbClr val="D8E2F0"/>
-                </a:solidFill>
-                <a:latin typeface="Consolas"/>
-              </a:defRPr>
-            </a:pPr>
-          </a:p>
-          <a:p>
-            <a:pPr>
-              <a:defRPr sz="1500">
-                <a:solidFill>
-                  <a:srgbClr val="D8E2F0"/>
-                </a:solidFill>
-                <a:latin typeface="Consolas"/>
-              </a:defRPr>
-            </a:pPr>
-            <a:r>
-              <a:t>prep_ohe = ColumnTransformer([</a:t>
-            </a:r>
-          </a:p>
-          <a:p>
-            <a:pPr>
-              <a:defRPr sz="1500">
-                <a:solidFill>
-                  <a:srgbClr val="D8E2F0"/>
-                </a:solidFill>
-                <a:latin typeface="Consolas"/>
-              </a:defRPr>
-            </a:pPr>
-            <a:r>
-              <a:t>    ('num', Pipeline([('imputer', SimpleImputer(strategy='median')),</a:t>
-            </a:r>
-          </a:p>
-          <a:p>
-            <a:pPr>
-              <a:defRPr sz="1500">
-                <a:solidFill>
-                  <a:srgbClr val="D8E2F0"/>
-                </a:solidFill>
-                <a:latin typeface="Consolas"/>
-              </a:defRPr>
-            </a:pPr>
-            <a:r>
-              <a:t>                      ('scaler',  StandardScaler())]), num_sel),</a:t>
-            </a:r>
-          </a:p>
-          <a:p>
-            <a:pPr>
-              <a:defRPr sz="1500">
-                <a:solidFill>
-                  <a:srgbClr val="D8E2F0"/>
-                </a:solidFill>
-                <a:latin typeface="Consolas"/>
-              </a:defRPr>
-            </a:pPr>
-            <a:r>
-              <a:t>    ('cat', Pipeline([('imputer', SimpleImputer(strategy='most_frequent')),</a:t>
-            </a:r>
-          </a:p>
-          <a:p>
-            <a:pPr>
-              <a:defRPr sz="1500">
-                <a:solidFill>
-                  <a:srgbClr val="D8E2F0"/>
-                </a:solidFill>
-                <a:latin typeface="Consolas"/>
-              </a:defRPr>
-            </a:pPr>
-            <a:r>
-              <a:t>                      ('ohe', OneHotEncoder(handle_unknown='ignore',</a:t>
-            </a:r>
-          </a:p>
-          <a:p>
-            <a:pPr>
-              <a:defRPr sz="1500">
-                <a:solidFill>
-                  <a:srgbClr val="D8E2F0"/>
-                </a:solidFill>
-                <a:latin typeface="Consolas"/>
-              </a:defRPr>
-            </a:pPr>
-            <a:r>
-              <a:t>                                           drop='if_binary'))]), cat_sel),</a:t>
-            </a:r>
-          </a:p>
-          <a:p>
-            <a:pPr>
-              <a:defRPr sz="1500">
-                <a:solidFill>
-                  <a:srgbClr val="D8E2F0"/>
-                </a:solidFill>
-                <a:latin typeface="Consolas"/>
-              </a:defRPr>
-            </a:pPr>
-            <a:r>
-              <a:t>])</a:t>
-            </a:r>
-          </a:p>
-        </p:txBody>
-      </p:sp>
-      <p:sp>
-        <p:nvSpPr>
-          <p:cNvPr id="7" name="TextBox 6"/>
+              <a:t>BAGIAN 2 - PRAKTIKUM 1</a:t>
+            </a:r>
+          </a:p>
+        </p:txBody>
+      </p:sp>
+      <p:sp>
+        <p:nvSpPr>
+          <p:cNvPr id="5" name="TextBox 4"/>
           <p:cNvSpPr txBox="1"/>
           <p:nvPr/>
         </p:nvSpPr>
         <p:spPr>
           <a:xfrm>
-            <a:off x="777240" y="5715000"/>
-            <a:ext cx="10652760" cy="822960"/>
+            <a:off x="1005840" y="3063240"/>
+            <a:ext cx="10241280" cy="1280160"/>
           </a:xfrm>
           <a:prstGeom prst="rect">
             <a:avLst/>
@@ -6967,14 +6782,49 @@
           <a:lstStyle/>
           <a:p>
             <a:pPr>
-              <a:defRPr sz="1900" i="1">
-                <a:solidFill>
-                  <a:srgbClr val="5A6372"/>
+              <a:defRPr sz="4400" b="1">
+                <a:solidFill>
+                  <a:srgbClr val="FFFFFF"/>
                 </a:solidFill>
               </a:defRPr>
             </a:pPr>
             <a:r>
-              <a:t>make_column_selector memilih kolom berdasarkan TIPE - jadi kolom baru hasil feature engineering otomatis ikut terpilih.</a:t>
+              <a:t>Encoding di dalam Pipeline</a:t>
+            </a:r>
+          </a:p>
+        </p:txBody>
+      </p:sp>
+      <p:sp>
+        <p:nvSpPr>
+          <p:cNvPr id="6" name="TextBox 5"/>
+          <p:cNvSpPr txBox="1"/>
+          <p:nvPr/>
+        </p:nvSpPr>
+        <p:spPr>
+          <a:xfrm>
+            <a:off x="1005840" y="4297680"/>
+            <a:ext cx="10241280" cy="914400"/>
+          </a:xfrm>
+          <a:prstGeom prst="rect">
+            <a:avLst/>
+          </a:prstGeom>
+          <a:noFill/>
+        </p:spPr>
+        <p:txBody>
+          <a:bodyPr wrap="square">
+            <a:spAutoFit/>
+          </a:bodyPr>
+          <a:lstStyle/>
+          <a:p>
+            <a:pPr>
+              <a:defRPr sz="2200">
+                <a:solidFill>
+                  <a:srgbClr val="C8D4E6"/>
+                </a:solidFill>
+              </a:defRPr>
+            </a:pPr>
+            <a:r>
+              <a:t>Modul bagian 5.5 - satu-satunya cara yang aman dari leakage</a:t>
             </a:r>
           </a:p>
         </p:txBody>
@@ -7012,7 +6862,7 @@
             <a:avLst/>
           </a:prstGeom>
           <a:solidFill>
-            <a:srgbClr val="F5F7FA"/>
+            <a:srgbClr val="FFFFFF"/>
           </a:solidFill>
           <a:ln>
             <a:noFill/>
@@ -7049,14 +6899,14 @@
         </p:nvSpPr>
         <p:spPr>
           <a:xfrm>
-            <a:off x="777240" y="2240280"/>
-            <a:ext cx="128016" cy="2011680"/>
+            <a:off x="0" y="0"/>
+            <a:ext cx="12191695" cy="128016"/>
           </a:xfrm>
           <a:prstGeom prst="rect">
             <a:avLst/>
           </a:prstGeom>
           <a:solidFill>
-            <a:srgbClr val="E6A023"/>
+            <a:srgbClr val="102545"/>
           </a:solidFill>
           <a:ln>
             <a:noFill/>
@@ -7093,8 +6943,8 @@
         </p:nvSpPr>
         <p:spPr>
           <a:xfrm>
-            <a:off x="1234440" y="2148840"/>
-            <a:ext cx="9966960" cy="2103120"/>
+            <a:off x="777240" y="411480"/>
+            <a:ext cx="10789920" cy="914400"/>
           </a:xfrm>
           <a:prstGeom prst="rect">
             <a:avLst/>
@@ -7108,32 +6958,72 @@
           <a:lstStyle/>
           <a:p>
             <a:pPr>
-              <a:defRPr sz="3800" b="1">
+              <a:defRPr sz="3400" b="1">
                 <a:solidFill>
                   <a:srgbClr val="102545"/>
                 </a:solidFill>
               </a:defRPr>
             </a:pPr>
             <a:r>
-              <a:t>Split dulu. Fit belakangan.</a:t>
-            </a:r>
-            <a:br/>
-            <a:r>
-              <a:t>Selalu.</a:t>
-            </a:r>
-          </a:p>
-        </p:txBody>
-      </p:sp>
-      <p:sp>
-        <p:nvSpPr>
-          <p:cNvPr id="5" name="TextBox 4"/>
+              <a:t>ColumnTransformer: numerik dan kategorikal, jalur terpisah</a:t>
+            </a:r>
+          </a:p>
+        </p:txBody>
+      </p:sp>
+      <p:sp>
+        <p:nvSpPr>
+          <p:cNvPr id="5" name="Rectangle 4"/>
+          <p:cNvSpPr/>
+          <p:nvPr/>
+        </p:nvSpPr>
+        <p:spPr>
+          <a:xfrm>
+            <a:off x="777240" y="1417320"/>
+            <a:ext cx="10652760" cy="4206240"/>
+          </a:xfrm>
+          <a:prstGeom prst="rect">
+            <a:avLst/>
+          </a:prstGeom>
+          <a:solidFill>
+            <a:srgbClr val="141A26"/>
+          </a:solidFill>
+          <a:ln>
+            <a:noFill/>
+          </a:ln>
+          <a:effectLst/>
+        </p:spPr>
+        <p:style>
+          <a:lnRef idx="1">
+            <a:schemeClr val="accent1"/>
+          </a:lnRef>
+          <a:fillRef idx="3">
+            <a:schemeClr val="accent1"/>
+          </a:fillRef>
+          <a:effectRef idx="2">
+            <a:schemeClr val="accent1"/>
+          </a:effectRef>
+          <a:fontRef idx="minor">
+            <a:schemeClr val="lt1"/>
+          </a:fontRef>
+        </p:style>
+        <p:txBody>
+          <a:bodyPr rtlCol="0" anchor="ctr"/>
+          <a:lstStyle/>
+          <a:p>
+            <a:pPr algn="ctr"/>
+          </a:p>
+        </p:txBody>
+      </p:sp>
+      <p:sp>
+        <p:nvSpPr>
+          <p:cNvPr id="6" name="TextBox 5"/>
           <p:cNvSpPr txBox="1"/>
           <p:nvPr/>
         </p:nvSpPr>
         <p:spPr>
           <a:xfrm>
-            <a:off x="1234440" y="4434840"/>
-            <a:ext cx="9966960" cy="1371600"/>
+            <a:off x="1005840" y="1572768"/>
+            <a:ext cx="10241280" cy="4023359"/>
           </a:xfrm>
           <a:prstGeom prst="rect">
             <a:avLst/>
@@ -7147,14 +7037,226 @@
           <a:lstStyle/>
           <a:p>
             <a:pPr>
-              <a:defRPr sz="2100">
-                <a:solidFill>
-                  <a:srgbClr val="5A6372"/>
-                </a:solidFill>
+              <a:defRPr sz="1500">
+                <a:solidFill>
+                  <a:srgbClr val="D8E2F0"/>
+                </a:solidFill>
+                <a:latin typeface="Consolas"/>
               </a:defRPr>
             </a:pPr>
             <a:r>
-              <a:t>Semua impute, scale, dan encode dilakukan SETELAH train_test_split, dan hanya di-fit pada data latih. Jangan pernah fit apa pun pada gabungan train+test. Ini satu kalimat yang memisahkan eksperimen jujur dari angka fiktif.</a:t>
+              <a:t>from sklearn.compose import ColumnTransformer, make_column_selector as selector</a:t>
+            </a:r>
+          </a:p>
+          <a:p>
+            <a:pPr>
+              <a:defRPr sz="1500">
+                <a:solidFill>
+                  <a:srgbClr val="D8E2F0"/>
+                </a:solidFill>
+                <a:latin typeface="Consolas"/>
+              </a:defRPr>
+            </a:pPr>
+            <a:r>
+              <a:t>from sklearn.pipeline import Pipeline</a:t>
+            </a:r>
+          </a:p>
+          <a:p>
+            <a:pPr>
+              <a:defRPr sz="1500">
+                <a:solidFill>
+                  <a:srgbClr val="D8E2F0"/>
+                </a:solidFill>
+                <a:latin typeface="Consolas"/>
+              </a:defRPr>
+            </a:pPr>
+            <a:r>
+              <a:t>from sklearn.impute import SimpleImputer</a:t>
+            </a:r>
+          </a:p>
+          <a:p>
+            <a:pPr>
+              <a:defRPr sz="1500">
+                <a:solidFill>
+                  <a:srgbClr val="D8E2F0"/>
+                </a:solidFill>
+                <a:latin typeface="Consolas"/>
+              </a:defRPr>
+            </a:pPr>
+            <a:r>
+              <a:t>from sklearn.preprocessing import OneHotEncoder, StandardScaler</a:t>
+            </a:r>
+          </a:p>
+          <a:p>
+            <a:pPr>
+              <a:defRPr sz="1500">
+                <a:solidFill>
+                  <a:srgbClr val="D8E2F0"/>
+                </a:solidFill>
+                <a:latin typeface="Consolas"/>
+              </a:defRPr>
+            </a:pPr>
+          </a:p>
+          <a:p>
+            <a:pPr>
+              <a:defRPr sz="1500">
+                <a:solidFill>
+                  <a:srgbClr val="D8E2F0"/>
+                </a:solidFill>
+                <a:latin typeface="Consolas"/>
+              </a:defRPr>
+            </a:pPr>
+            <a:r>
+              <a:t>num_sel = selector(dtype_include=['int64', 'float64'])</a:t>
+            </a:r>
+          </a:p>
+          <a:p>
+            <a:pPr>
+              <a:defRPr sz="1500">
+                <a:solidFill>
+                  <a:srgbClr val="D8E2F0"/>
+                </a:solidFill>
+                <a:latin typeface="Consolas"/>
+              </a:defRPr>
+            </a:pPr>
+            <a:r>
+              <a:t>cat_sel = selector(dtype_include=['object', 'category', 'bool'])</a:t>
+            </a:r>
+          </a:p>
+          <a:p>
+            <a:pPr>
+              <a:defRPr sz="1500">
+                <a:solidFill>
+                  <a:srgbClr val="D8E2F0"/>
+                </a:solidFill>
+                <a:latin typeface="Consolas"/>
+              </a:defRPr>
+            </a:pPr>
+          </a:p>
+          <a:p>
+            <a:pPr>
+              <a:defRPr sz="1500">
+                <a:solidFill>
+                  <a:srgbClr val="D8E2F0"/>
+                </a:solidFill>
+                <a:latin typeface="Consolas"/>
+              </a:defRPr>
+            </a:pPr>
+            <a:r>
+              <a:t>prep_ohe = ColumnTransformer([</a:t>
+            </a:r>
+          </a:p>
+          <a:p>
+            <a:pPr>
+              <a:defRPr sz="1500">
+                <a:solidFill>
+                  <a:srgbClr val="D8E2F0"/>
+                </a:solidFill>
+                <a:latin typeface="Consolas"/>
+              </a:defRPr>
+            </a:pPr>
+            <a:r>
+              <a:t>    ('num', Pipeline([('imputer', SimpleImputer(strategy='median')),</a:t>
+            </a:r>
+          </a:p>
+          <a:p>
+            <a:pPr>
+              <a:defRPr sz="1500">
+                <a:solidFill>
+                  <a:srgbClr val="D8E2F0"/>
+                </a:solidFill>
+                <a:latin typeface="Consolas"/>
+              </a:defRPr>
+            </a:pPr>
+            <a:r>
+              <a:t>                      ('scaler',  StandardScaler())]), num_sel),</a:t>
+            </a:r>
+          </a:p>
+          <a:p>
+            <a:pPr>
+              <a:defRPr sz="1500">
+                <a:solidFill>
+                  <a:srgbClr val="D8E2F0"/>
+                </a:solidFill>
+                <a:latin typeface="Consolas"/>
+              </a:defRPr>
+            </a:pPr>
+            <a:r>
+              <a:t>    ('cat', Pipeline([('imputer', SimpleImputer(strategy='most_frequent')),</a:t>
+            </a:r>
+          </a:p>
+          <a:p>
+            <a:pPr>
+              <a:defRPr sz="1500">
+                <a:solidFill>
+                  <a:srgbClr val="D8E2F0"/>
+                </a:solidFill>
+                <a:latin typeface="Consolas"/>
+              </a:defRPr>
+            </a:pPr>
+            <a:r>
+              <a:t>                      ('ohe', OneHotEncoder(handle_unknown='ignore',</a:t>
+            </a:r>
+          </a:p>
+          <a:p>
+            <a:pPr>
+              <a:defRPr sz="1500">
+                <a:solidFill>
+                  <a:srgbClr val="D8E2F0"/>
+                </a:solidFill>
+                <a:latin typeface="Consolas"/>
+              </a:defRPr>
+            </a:pPr>
+            <a:r>
+              <a:t>                                           drop='if_binary'))]), cat_sel),</a:t>
+            </a:r>
+          </a:p>
+          <a:p>
+            <a:pPr>
+              <a:defRPr sz="1500">
+                <a:solidFill>
+                  <a:srgbClr val="D8E2F0"/>
+                </a:solidFill>
+                <a:latin typeface="Consolas"/>
+              </a:defRPr>
+            </a:pPr>
+            <a:r>
+              <a:t>])</a:t>
+            </a:r>
+          </a:p>
+        </p:txBody>
+      </p:sp>
+      <p:sp>
+        <p:nvSpPr>
+          <p:cNvPr id="7" name="TextBox 6"/>
+          <p:cNvSpPr txBox="1"/>
+          <p:nvPr/>
+        </p:nvSpPr>
+        <p:spPr>
+          <a:xfrm>
+            <a:off x="777240" y="5715000"/>
+            <a:ext cx="10652760" cy="822960"/>
+          </a:xfrm>
+          <a:prstGeom prst="rect">
+            <a:avLst/>
+          </a:prstGeom>
+          <a:noFill/>
+        </p:spPr>
+        <p:txBody>
+          <a:bodyPr wrap="square">
+            <a:spAutoFit/>
+          </a:bodyPr>
+          <a:lstStyle/>
+          <a:p>
+            <a:pPr>
+              <a:defRPr sz="1900" i="1">
+                <a:solidFill>
+                  <a:srgbClr val="5A6372"/>
+                </a:solidFill>
+              </a:defRPr>
+            </a:pPr>
+            <a:r>
+              <a:t>make_column_selector memilih kolom berdasarkan TIPE - jadi kolom baru hasil feature engineering otomatis ikut terpilih.</a:t>
             </a:r>
           </a:p>
         </p:txBody>
@@ -7192,7 +7294,7 @@
             <a:avLst/>
           </a:prstGeom>
           <a:solidFill>
-            <a:srgbClr val="102545"/>
+            <a:srgbClr val="F5F7FA"/>
           </a:solidFill>
           <a:ln>
             <a:noFill/>
@@ -7229,8 +7331,8 @@
         </p:nvSpPr>
         <p:spPr>
           <a:xfrm>
-            <a:off x="1005840" y="2788920"/>
-            <a:ext cx="1463040" cy="91440"/>
+            <a:off x="777240" y="2240280"/>
+            <a:ext cx="128016" cy="2011680"/>
           </a:xfrm>
           <a:prstGeom prst="rect">
             <a:avLst/>
@@ -7273,8 +7375,8 @@
         </p:nvSpPr>
         <p:spPr>
           <a:xfrm>
-            <a:off x="1005840" y="2011680"/>
-            <a:ext cx="10241280" cy="731520"/>
+            <a:off x="1234440" y="2148840"/>
+            <a:ext cx="9966960" cy="2103120"/>
           </a:xfrm>
           <a:prstGeom prst="rect">
             <a:avLst/>
@@ -7288,14 +7390,18 @@
           <a:lstStyle/>
           <a:p>
             <a:pPr>
-              <a:defRPr sz="2000" b="1">
-                <a:solidFill>
-                  <a:srgbClr val="E6A023"/>
+              <a:defRPr sz="3800" b="1">
+                <a:solidFill>
+                  <a:srgbClr val="102545"/>
                 </a:solidFill>
               </a:defRPr>
             </a:pPr>
             <a:r>
-              <a:t>BAGIAN 3 - PRAKTIKUM 2</a:t>
+              <a:t>Split dulu. Fit belakangan.</a:t>
+            </a:r>
+            <a:br/>
+            <a:r>
+              <a:t>Selalu.</a:t>
             </a:r>
           </a:p>
         </p:txBody>
@@ -7308,8 +7414,8 @@
         </p:nvSpPr>
         <p:spPr>
           <a:xfrm>
-            <a:off x="1005840" y="3063240"/>
-            <a:ext cx="10241280" cy="1280160"/>
+            <a:off x="1234440" y="4434840"/>
+            <a:ext cx="9966960" cy="1371600"/>
           </a:xfrm>
           <a:prstGeom prst="rect">
             <a:avLst/>
@@ -7323,49 +7429,14 @@
           <a:lstStyle/>
           <a:p>
             <a:pPr>
-              <a:defRPr sz="4400" b="1">
-                <a:solidFill>
-                  <a:srgbClr val="FFFFFF"/>
+              <a:defRPr sz="2100">
+                <a:solidFill>
+                  <a:srgbClr val="5A6372"/>
                 </a:solidFill>
               </a:defRPr>
             </a:pPr>
             <a:r>
-              <a:t>Feature Thinking</a:t>
-            </a:r>
-          </a:p>
-        </p:txBody>
-      </p:sp>
-      <p:sp>
-        <p:nvSpPr>
-          <p:cNvPr id="6" name="TextBox 5"/>
-          <p:cNvSpPr txBox="1"/>
-          <p:nvPr/>
-        </p:nvSpPr>
-        <p:spPr>
-          <a:xfrm>
-            <a:off x="1005840" y="4297680"/>
-            <a:ext cx="10241280" cy="914400"/>
-          </a:xfrm>
-          <a:prstGeom prst="rect">
-            <a:avLst/>
-          </a:prstGeom>
-          <a:noFill/>
-        </p:spPr>
-        <p:txBody>
-          <a:bodyPr wrap="square">
-            <a:spAutoFit/>
-          </a:bodyPr>
-          <a:lstStyle/>
-          <a:p>
-            <a:pPr>
-              <a:defRPr sz="2200">
-                <a:solidFill>
-                  <a:srgbClr val="C8D4E6"/>
-                </a:solidFill>
-              </a:defRPr>
-            </a:pPr>
-            <a:r>
-              <a:t>Modul bagian 5.4 - bagian yang paling menentukan hasil, dan paling sedikit diajarkan</a:t>
+              <a:t>Semua impute, scale, dan encode dilakukan SETELAH train_test_split, dan hanya di-fit pada data latih. Jangan pernah fit apa pun pada gabungan train+test. Ini satu kalimat yang memisahkan eksperimen jujur dari angka fiktif.</a:t>
             </a:r>
           </a:p>
         </p:txBody>
@@ -7379,6 +7450,217 @@
 </file>
 
 <file path=ppt/slides/slide18.xml><?xml version="1.0" encoding="utf-8"?>
+<p:sld xmlns:a="http://schemas.openxmlformats.org/drawingml/2006/main" xmlns:p="http://schemas.openxmlformats.org/presentationml/2006/main" xmlns:r="http://schemas.openxmlformats.org/officeDocument/2006/relationships">
+  <p:cSld>
+    <p:spTree>
+      <p:nvGrpSpPr>
+        <p:cNvPr id="1" name=""/>
+        <p:cNvGrpSpPr/>
+        <p:nvPr/>
+      </p:nvGrpSpPr>
+      <p:grpSpPr/>
+      <p:sp>
+        <p:nvSpPr>
+          <p:cNvPr id="2" name="Rectangle 1"/>
+          <p:cNvSpPr/>
+          <p:nvPr/>
+        </p:nvSpPr>
+        <p:spPr>
+          <a:xfrm>
+            <a:off x="0" y="0"/>
+            <a:ext cx="12191695" cy="6858000"/>
+          </a:xfrm>
+          <a:prstGeom prst="rect">
+            <a:avLst/>
+          </a:prstGeom>
+          <a:solidFill>
+            <a:srgbClr val="102545"/>
+          </a:solidFill>
+          <a:ln>
+            <a:noFill/>
+          </a:ln>
+          <a:effectLst/>
+        </p:spPr>
+        <p:style>
+          <a:lnRef idx="1">
+            <a:schemeClr val="accent1"/>
+          </a:lnRef>
+          <a:fillRef idx="3">
+            <a:schemeClr val="accent1"/>
+          </a:fillRef>
+          <a:effectRef idx="2">
+            <a:schemeClr val="accent1"/>
+          </a:effectRef>
+          <a:fontRef idx="minor">
+            <a:schemeClr val="lt1"/>
+          </a:fontRef>
+        </p:style>
+        <p:txBody>
+          <a:bodyPr rtlCol="0" anchor="ctr"/>
+          <a:lstStyle/>
+          <a:p>
+            <a:pPr algn="ctr"/>
+          </a:p>
+        </p:txBody>
+      </p:sp>
+      <p:sp>
+        <p:nvSpPr>
+          <p:cNvPr id="3" name="Rectangle 2"/>
+          <p:cNvSpPr/>
+          <p:nvPr/>
+        </p:nvSpPr>
+        <p:spPr>
+          <a:xfrm>
+            <a:off x="1005840" y="2788920"/>
+            <a:ext cx="1463040" cy="91440"/>
+          </a:xfrm>
+          <a:prstGeom prst="rect">
+            <a:avLst/>
+          </a:prstGeom>
+          <a:solidFill>
+            <a:srgbClr val="E6A023"/>
+          </a:solidFill>
+          <a:ln>
+            <a:noFill/>
+          </a:ln>
+          <a:effectLst/>
+        </p:spPr>
+        <p:style>
+          <a:lnRef idx="1">
+            <a:schemeClr val="accent1"/>
+          </a:lnRef>
+          <a:fillRef idx="3">
+            <a:schemeClr val="accent1"/>
+          </a:fillRef>
+          <a:effectRef idx="2">
+            <a:schemeClr val="accent1"/>
+          </a:effectRef>
+          <a:fontRef idx="minor">
+            <a:schemeClr val="lt1"/>
+          </a:fontRef>
+        </p:style>
+        <p:txBody>
+          <a:bodyPr rtlCol="0" anchor="ctr"/>
+          <a:lstStyle/>
+          <a:p>
+            <a:pPr algn="ctr"/>
+          </a:p>
+        </p:txBody>
+      </p:sp>
+      <p:sp>
+        <p:nvSpPr>
+          <p:cNvPr id="4" name="TextBox 3"/>
+          <p:cNvSpPr txBox="1"/>
+          <p:nvPr/>
+        </p:nvSpPr>
+        <p:spPr>
+          <a:xfrm>
+            <a:off x="1005840" y="2011680"/>
+            <a:ext cx="10241280" cy="731520"/>
+          </a:xfrm>
+          <a:prstGeom prst="rect">
+            <a:avLst/>
+          </a:prstGeom>
+          <a:noFill/>
+        </p:spPr>
+        <p:txBody>
+          <a:bodyPr wrap="square">
+            <a:spAutoFit/>
+          </a:bodyPr>
+          <a:lstStyle/>
+          <a:p>
+            <a:pPr>
+              <a:defRPr sz="2000" b="1">
+                <a:solidFill>
+                  <a:srgbClr val="E6A023"/>
+                </a:solidFill>
+              </a:defRPr>
+            </a:pPr>
+            <a:r>
+              <a:t>BAGIAN 3 - PRAKTIKUM 2</a:t>
+            </a:r>
+          </a:p>
+        </p:txBody>
+      </p:sp>
+      <p:sp>
+        <p:nvSpPr>
+          <p:cNvPr id="5" name="TextBox 4"/>
+          <p:cNvSpPr txBox="1"/>
+          <p:nvPr/>
+        </p:nvSpPr>
+        <p:spPr>
+          <a:xfrm>
+            <a:off x="1005840" y="3063240"/>
+            <a:ext cx="10241280" cy="1280160"/>
+          </a:xfrm>
+          <a:prstGeom prst="rect">
+            <a:avLst/>
+          </a:prstGeom>
+          <a:noFill/>
+        </p:spPr>
+        <p:txBody>
+          <a:bodyPr wrap="square">
+            <a:spAutoFit/>
+          </a:bodyPr>
+          <a:lstStyle/>
+          <a:p>
+            <a:pPr>
+              <a:defRPr sz="4400" b="1">
+                <a:solidFill>
+                  <a:srgbClr val="FFFFFF"/>
+                </a:solidFill>
+              </a:defRPr>
+            </a:pPr>
+            <a:r>
+              <a:t>Feature Thinking</a:t>
+            </a:r>
+          </a:p>
+        </p:txBody>
+      </p:sp>
+      <p:sp>
+        <p:nvSpPr>
+          <p:cNvPr id="6" name="TextBox 5"/>
+          <p:cNvSpPr txBox="1"/>
+          <p:nvPr/>
+        </p:nvSpPr>
+        <p:spPr>
+          <a:xfrm>
+            <a:off x="1005840" y="4297680"/>
+            <a:ext cx="10241280" cy="914400"/>
+          </a:xfrm>
+          <a:prstGeom prst="rect">
+            <a:avLst/>
+          </a:prstGeom>
+          <a:noFill/>
+        </p:spPr>
+        <p:txBody>
+          <a:bodyPr wrap="square">
+            <a:spAutoFit/>
+          </a:bodyPr>
+          <a:lstStyle/>
+          <a:p>
+            <a:pPr>
+              <a:defRPr sz="2200">
+                <a:solidFill>
+                  <a:srgbClr val="C8D4E6"/>
+                </a:solidFill>
+              </a:defRPr>
+            </a:pPr>
+            <a:r>
+              <a:t>Modul bagian 5.4 - bagian yang paling menentukan hasil, dan paling sedikit diajarkan</a:t>
+            </a:r>
+          </a:p>
+        </p:txBody>
+      </p:sp>
+    </p:spTree>
+  </p:cSld>
+  <p:clrMapOvr>
+    <a:masterClrMapping/>
+  </p:clrMapOvr>
+</p:sld>
+</file>
+
+<file path=ppt/slides/slide19.xml><?xml version="1.0" encoding="utf-8"?>
 <p:sld xmlns:a="http://schemas.openxmlformats.org/drawingml/2006/main" xmlns:p="http://schemas.openxmlformats.org/presentationml/2006/main" xmlns:r="http://schemas.openxmlformats.org/officeDocument/2006/relationships">
   <p:cSld>
     <p:spTree>
@@ -7936,454 +8218,6 @@
 </p:sld>
 </file>
 
-<file path=ppt/slides/slide19.xml><?xml version="1.0" encoding="utf-8"?>
-<p:sld xmlns:a="http://schemas.openxmlformats.org/drawingml/2006/main" xmlns:p="http://schemas.openxmlformats.org/presentationml/2006/main" xmlns:r="http://schemas.openxmlformats.org/officeDocument/2006/relationships">
-  <p:cSld>
-    <p:spTree>
-      <p:nvGrpSpPr>
-        <p:cNvPr id="1" name=""/>
-        <p:cNvGrpSpPr/>
-        <p:nvPr/>
-      </p:nvGrpSpPr>
-      <p:grpSpPr/>
-      <p:sp>
-        <p:nvSpPr>
-          <p:cNvPr id="2" name="Rectangle 1"/>
-          <p:cNvSpPr/>
-          <p:nvPr/>
-        </p:nvSpPr>
-        <p:spPr>
-          <a:xfrm>
-            <a:off x="0" y="0"/>
-            <a:ext cx="12191695" cy="6858000"/>
-          </a:xfrm>
-          <a:prstGeom prst="rect">
-            <a:avLst/>
-          </a:prstGeom>
-          <a:solidFill>
-            <a:srgbClr val="FFFFFF"/>
-          </a:solidFill>
-          <a:ln>
-            <a:noFill/>
-          </a:ln>
-          <a:effectLst/>
-        </p:spPr>
-        <p:style>
-          <a:lnRef idx="1">
-            <a:schemeClr val="accent1"/>
-          </a:lnRef>
-          <a:fillRef idx="3">
-            <a:schemeClr val="accent1"/>
-          </a:fillRef>
-          <a:effectRef idx="2">
-            <a:schemeClr val="accent1"/>
-          </a:effectRef>
-          <a:fontRef idx="minor">
-            <a:schemeClr val="lt1"/>
-          </a:fontRef>
-        </p:style>
-        <p:txBody>
-          <a:bodyPr rtlCol="0" anchor="ctr"/>
-          <a:lstStyle/>
-          <a:p>
-            <a:pPr algn="ctr"/>
-          </a:p>
-        </p:txBody>
-      </p:sp>
-      <p:sp>
-        <p:nvSpPr>
-          <p:cNvPr id="3" name="Rectangle 2"/>
-          <p:cNvSpPr/>
-          <p:nvPr/>
-        </p:nvSpPr>
-        <p:spPr>
-          <a:xfrm>
-            <a:off x="0" y="0"/>
-            <a:ext cx="12191695" cy="128016"/>
-          </a:xfrm>
-          <a:prstGeom prst="rect">
-            <a:avLst/>
-          </a:prstGeom>
-          <a:solidFill>
-            <a:srgbClr val="102545"/>
-          </a:solidFill>
-          <a:ln>
-            <a:noFill/>
-          </a:ln>
-          <a:effectLst/>
-        </p:spPr>
-        <p:style>
-          <a:lnRef idx="1">
-            <a:schemeClr val="accent1"/>
-          </a:lnRef>
-          <a:fillRef idx="3">
-            <a:schemeClr val="accent1"/>
-          </a:fillRef>
-          <a:effectRef idx="2">
-            <a:schemeClr val="accent1"/>
-          </a:effectRef>
-          <a:fontRef idx="minor">
-            <a:schemeClr val="lt1"/>
-          </a:fontRef>
-        </p:style>
-        <p:txBody>
-          <a:bodyPr rtlCol="0" anchor="ctr"/>
-          <a:lstStyle/>
-          <a:p>
-            <a:pPr algn="ctr"/>
-          </a:p>
-        </p:txBody>
-      </p:sp>
-      <p:sp>
-        <p:nvSpPr>
-          <p:cNvPr id="4" name="TextBox 3"/>
-          <p:cNvSpPr txBox="1"/>
-          <p:nvPr/>
-        </p:nvSpPr>
-        <p:spPr>
-          <a:xfrm>
-            <a:off x="777240" y="411480"/>
-            <a:ext cx="10789920" cy="914400"/>
-          </a:xfrm>
-          <a:prstGeom prst="rect">
-            <a:avLst/>
-          </a:prstGeom>
-          <a:noFill/>
-        </p:spPr>
-        <p:txBody>
-          <a:bodyPr wrap="square">
-            <a:spAutoFit/>
-          </a:bodyPr>
-          <a:lstStyle/>
-          <a:p>
-            <a:pPr>
-              <a:defRPr sz="3400" b="1">
-                <a:solidFill>
-                  <a:srgbClr val="102545"/>
-                </a:solidFill>
-              </a:defRPr>
-            </a:pPr>
-            <a:r>
-              <a:t>FeatureMaker - fitur turunan yang tidak bocor</a:t>
-            </a:r>
-          </a:p>
-        </p:txBody>
-      </p:sp>
-      <p:sp>
-        <p:nvSpPr>
-          <p:cNvPr id="5" name="Rectangle 4"/>
-          <p:cNvSpPr/>
-          <p:nvPr/>
-        </p:nvSpPr>
-        <p:spPr>
-          <a:xfrm>
-            <a:off x="777240" y="1417320"/>
-            <a:ext cx="10652760" cy="4206240"/>
-          </a:xfrm>
-          <a:prstGeom prst="rect">
-            <a:avLst/>
-          </a:prstGeom>
-          <a:solidFill>
-            <a:srgbClr val="141A26"/>
-          </a:solidFill>
-          <a:ln>
-            <a:noFill/>
-          </a:ln>
-          <a:effectLst/>
-        </p:spPr>
-        <p:style>
-          <a:lnRef idx="1">
-            <a:schemeClr val="accent1"/>
-          </a:lnRef>
-          <a:fillRef idx="3">
-            <a:schemeClr val="accent1"/>
-          </a:fillRef>
-          <a:effectRef idx="2">
-            <a:schemeClr val="accent1"/>
-          </a:effectRef>
-          <a:fontRef idx="minor">
-            <a:schemeClr val="lt1"/>
-          </a:fontRef>
-        </p:style>
-        <p:txBody>
-          <a:bodyPr rtlCol="0" anchor="ctr"/>
-          <a:lstStyle/>
-          <a:p>
-            <a:pPr algn="ctr"/>
-          </a:p>
-        </p:txBody>
-      </p:sp>
-      <p:sp>
-        <p:nvSpPr>
-          <p:cNvPr id="6" name="TextBox 5"/>
-          <p:cNvSpPr txBox="1"/>
-          <p:nvPr/>
-        </p:nvSpPr>
-        <p:spPr>
-          <a:xfrm>
-            <a:off x="1005840" y="1572768"/>
-            <a:ext cx="10241280" cy="4023359"/>
-          </a:xfrm>
-          <a:prstGeom prst="rect">
-            <a:avLst/>
-          </a:prstGeom>
-          <a:noFill/>
-        </p:spPr>
-        <p:txBody>
-          <a:bodyPr wrap="square">
-            <a:spAutoFit/>
-          </a:bodyPr>
-          <a:lstStyle/>
-          <a:p>
-            <a:pPr>
-              <a:defRPr sz="1500">
-                <a:solidFill>
-                  <a:srgbClr val="D8E2F0"/>
-                </a:solidFill>
-                <a:latin typeface="Consolas"/>
-              </a:defRPr>
-            </a:pPr>
-            <a:r>
-              <a:t>class FeatureMaker(BaseEstimator, TransformerMixin):</a:t>
-            </a:r>
-          </a:p>
-          <a:p>
-            <a:pPr>
-              <a:defRPr sz="1500">
-                <a:solidFill>
-                  <a:srgbClr val="D8E2F0"/>
-                </a:solidFill>
-                <a:latin typeface="Consolas"/>
-              </a:defRPr>
-            </a:pPr>
-            <a:r>
-              <a:t>    def fit(self, X, y=None):</a:t>
-            </a:r>
-          </a:p>
-          <a:p>
-            <a:pPr>
-              <a:defRPr sz="1500">
-                <a:solidFill>
-                  <a:srgbClr val="D8E2F0"/>
-                </a:solidFill>
-                <a:latin typeface="Consolas"/>
-              </a:defRPr>
-            </a:pPr>
-            <a:r>
-              <a:t>        # ambang kategori langka &amp; batas AgeBin ditentukan DI SINI</a:t>
-            </a:r>
-          </a:p>
-          <a:p>
-            <a:pPr>
-              <a:defRPr sz="1500">
-                <a:solidFill>
-                  <a:srgbClr val="D8E2F0"/>
-                </a:solidFill>
-                <a:latin typeface="Consolas"/>
-              </a:defRPr>
-            </a:pPr>
-            <a:r>
-              <a:t>        # -&gt; artinya dari data LATIH saja</a:t>
-            </a:r>
-          </a:p>
-          <a:p>
-            <a:pPr>
-              <a:defRPr sz="1500">
-                <a:solidFill>
-                  <a:srgbClr val="D8E2F0"/>
-                </a:solidFill>
-                <a:latin typeface="Consolas"/>
-              </a:defRPr>
-            </a:pPr>
-            <a:r>
-              <a:t>        q = np.quantile(X['Age'].dropna(), [0, .25, .5, .75, 1.0])</a:t>
-            </a:r>
-          </a:p>
-          <a:p>
-            <a:pPr>
-              <a:defRPr sz="1500">
-                <a:solidFill>
-                  <a:srgbClr val="D8E2F0"/>
-                </a:solidFill>
-                <a:latin typeface="Consolas"/>
-              </a:defRPr>
-            </a:pPr>
-            <a:r>
-              <a:t>        self._age_bins = np.unique(q)</a:t>
-            </a:r>
-          </a:p>
-          <a:p>
-            <a:pPr>
-              <a:defRPr sz="1500">
-                <a:solidFill>
-                  <a:srgbClr val="D8E2F0"/>
-                </a:solidFill>
-                <a:latin typeface="Consolas"/>
-              </a:defRPr>
-            </a:pPr>
-            <a:r>
-              <a:t>        return self</a:t>
-            </a:r>
-          </a:p>
-          <a:p>
-            <a:pPr>
-              <a:defRPr sz="1500">
-                <a:solidFill>
-                  <a:srgbClr val="D8E2F0"/>
-                </a:solidFill>
-                <a:latin typeface="Consolas"/>
-              </a:defRPr>
-            </a:pPr>
-          </a:p>
-          <a:p>
-            <a:pPr>
-              <a:defRPr sz="1500">
-                <a:solidFill>
-                  <a:srgbClr val="D8E2F0"/>
-                </a:solidFill>
-                <a:latin typeface="Consolas"/>
-              </a:defRPr>
-            </a:pPr>
-            <a:r>
-              <a:t>    def transform(self, X):</a:t>
-            </a:r>
-          </a:p>
-          <a:p>
-            <a:pPr>
-              <a:defRPr sz="1500">
-                <a:solidFill>
-                  <a:srgbClr val="D8E2F0"/>
-                </a:solidFill>
-                <a:latin typeface="Consolas"/>
-              </a:defRPr>
-            </a:pPr>
-            <a:r>
-              <a:t>        X = X.copy()</a:t>
-            </a:r>
-          </a:p>
-          <a:p>
-            <a:pPr>
-              <a:defRPr sz="1500">
-                <a:solidFill>
-                  <a:srgbClr val="D8E2F0"/>
-                </a:solidFill>
-                <a:latin typeface="Consolas"/>
-              </a:defRPr>
-            </a:pPr>
-            <a:r>
-              <a:t>        X['FamilySize']    = X['SibSp'] + X['Parch'] + 1</a:t>
-            </a:r>
-          </a:p>
-          <a:p>
-            <a:pPr>
-              <a:defRPr sz="1500">
-                <a:solidFill>
-                  <a:srgbClr val="D8E2F0"/>
-                </a:solidFill>
-                <a:latin typeface="Consolas"/>
-              </a:defRPr>
-            </a:pPr>
-            <a:r>
-              <a:t>        X['IsAlone']       = (X['FamilySize'] == 1).astype(int)</a:t>
-            </a:r>
-          </a:p>
-          <a:p>
-            <a:pPr>
-              <a:defRPr sz="1500">
-                <a:solidFill>
-                  <a:srgbClr val="D8E2F0"/>
-                </a:solidFill>
-                <a:latin typeface="Consolas"/>
-              </a:defRPr>
-            </a:pPr>
-            <a:r>
-              <a:t>        X['FarePerPerson'] = X['Fare'] / X['FamilySize'].clip(lower=1)</a:t>
-            </a:r>
-          </a:p>
-          <a:p>
-            <a:pPr>
-              <a:defRPr sz="1500">
-                <a:solidFill>
-                  <a:srgbClr val="D8E2F0"/>
-                </a:solidFill>
-                <a:latin typeface="Consolas"/>
-              </a:defRPr>
-            </a:pPr>
-            <a:r>
-              <a:t>        X['AgeBin'] = pd.cut(X['Age'], bins=self._age_bins,</a:t>
-            </a:r>
-          </a:p>
-          <a:p>
-            <a:pPr>
-              <a:defRPr sz="1500">
-                <a:solidFill>
-                  <a:srgbClr val="D8E2F0"/>
-                </a:solidFill>
-                <a:latin typeface="Consolas"/>
-              </a:defRPr>
-            </a:pPr>
-            <a:r>
-              <a:t>                             include_lowest=True).astype(str)</a:t>
-            </a:r>
-          </a:p>
-          <a:p>
-            <a:pPr>
-              <a:defRPr sz="1500">
-                <a:solidFill>
-                  <a:srgbClr val="D8E2F0"/>
-                </a:solidFill>
-                <a:latin typeface="Consolas"/>
-              </a:defRPr>
-            </a:pPr>
-            <a:r>
-              <a:t>        return X</a:t>
-            </a:r>
-          </a:p>
-        </p:txBody>
-      </p:sp>
-      <p:sp>
-        <p:nvSpPr>
-          <p:cNvPr id="7" name="TextBox 6"/>
-          <p:cNvSpPr txBox="1"/>
-          <p:nvPr/>
-        </p:nvSpPr>
-        <p:spPr>
-          <a:xfrm>
-            <a:off x="777240" y="5715000"/>
-            <a:ext cx="10652760" cy="822960"/>
-          </a:xfrm>
-          <a:prstGeom prst="rect">
-            <a:avLst/>
-          </a:prstGeom>
-          <a:noFill/>
-        </p:spPr>
-        <p:txBody>
-          <a:bodyPr wrap="square">
-            <a:spAutoFit/>
-          </a:bodyPr>
-          <a:lstStyle/>
-          <a:p>
-            <a:pPr>
-              <a:defRPr sz="1900" i="1">
-                <a:solidFill>
-                  <a:srgbClr val="5A6372"/>
-                </a:solidFill>
-              </a:defRPr>
-            </a:pPr>
-            <a:r>
-              <a:t>Kunci desainnya: apa pun yang DIPELAJARI dari data masuk fit(); yang sekadar dihitung ulang masuk transform().</a:t>
-            </a:r>
-          </a:p>
-        </p:txBody>
-      </p:sp>
-    </p:spTree>
-  </p:cSld>
-  <p:clrMapOvr>
-    <a:masterClrMapping/>
-  </p:clrMapOvr>
-</p:sld>
-</file>
-
 <file path=ppt/slides/slide2.xml><?xml version="1.0" encoding="utf-8"?>
 <p:sld xmlns:a="http://schemas.openxmlformats.org/drawingml/2006/main" xmlns:p="http://schemas.openxmlformats.org/presentationml/2006/main" xmlns:r="http://schemas.openxmlformats.org/officeDocument/2006/relationships">
   <p:cSld>
@@ -8611,7 +8445,7 @@
                         </a:defRPr>
                       </a:pPr>
                       <a:r>
-                        <a:t>Hasil per 18 September</a:t>
+                        <a:t>Hasil per 21 September pagi</a:t>
                       </a:r>
                     </a:p>
                   </a:txBody>
@@ -8755,7 +8589,7 @@
                         </a:defRPr>
                       </a:pPr>
                       <a:r>
-                        <a:t>Terkumpul 2 dari 22. Tenggat Minggu 27 Sep 23.55 - sisa 9 hari</a:t>
+                        <a:t>Terkumpul 6 dari 22 - keenamnya sudah saya nilai dengan catatan revisi. Tenggat Minggu 27 Sep 23.55, sisa 6 hari</a:t>
                       </a:r>
                     </a:p>
                   </a:txBody>
@@ -9002,7 +8836,7 @@
               </a:defRPr>
             </a:pPr>
             <a:r>
-              <a:t>Merangkai semuanya jadi satu pipeline</a:t>
+              <a:t>FeatureMaker - fitur turunan yang tidak bocor</a:t>
             </a:r>
           </a:p>
         </p:txBody>
@@ -9016,7 +8850,7 @@
         <p:spPr>
           <a:xfrm>
             <a:off x="777240" y="1417320"/>
-            <a:ext cx="10652760" cy="3090672"/>
+            <a:ext cx="10652760" cy="4206240"/>
           </a:xfrm>
           <a:prstGeom prst="rect">
             <a:avLst/>
@@ -9060,7 +8894,7 @@
         <p:spPr>
           <a:xfrm>
             <a:off x="1005840" y="1572768"/>
-            <a:ext cx="10241280" cy="2907791"/>
+            <a:ext cx="10241280" cy="4023359"/>
           </a:xfrm>
           <a:prstGeom prst="rect">
             <a:avLst/>
@@ -9082,7 +8916,7 @@
               </a:defRPr>
             </a:pPr>
             <a:r>
-              <a:t>pipe = Pipeline([</a:t>
+              <a:t>class FeatureMaker(BaseEstimator, TransformerMixin):</a:t>
             </a:r>
           </a:p>
           <a:p>
@@ -9095,7 +8929,7 @@
               </a:defRPr>
             </a:pPr>
             <a:r>
-              <a:t>    ('feat',  FeatureMaker()),      # fitur turunan</a:t>
+              <a:t>    def fit(self, X, y=None):</a:t>
             </a:r>
           </a:p>
           <a:p>
@@ -9108,7 +8942,7 @@
               </a:defRPr>
             </a:pPr>
             <a:r>
-              <a:t>    ('prep',  prep_ohe),            # impute + scale + encode</a:t>
+              <a:t>        # ambang kategori langka &amp; batas AgeBin ditentukan DI SINI</a:t>
             </a:r>
           </a:p>
           <a:p>
@@ -9121,7 +8955,7 @@
               </a:defRPr>
             </a:pPr>
             <a:r>
-              <a:t>    ('model', LogisticRegression(max_iter=1000)),</a:t>
+              <a:t>        # -&gt; artinya dari data LATIH saja</a:t>
             </a:r>
           </a:p>
           <a:p>
@@ -9134,7 +8968,7 @@
               </a:defRPr>
             </a:pPr>
             <a:r>
-              <a:t>])</a:t>
+              <a:t>        q = np.quantile(X['Age'].dropna(), [0, .25, .5, .75, 1.0])</a:t>
             </a:r>
           </a:p>
           <a:p>
@@ -9146,6 +8980,9 @@
                 <a:latin typeface="Consolas"/>
               </a:defRPr>
             </a:pPr>
+            <a:r>
+              <a:t>        self._age_bins = np.unique(q)</a:t>
+            </a:r>
           </a:p>
           <a:p>
             <a:pPr>
@@ -9157,7 +8994,7 @@
               </a:defRPr>
             </a:pPr>
             <a:r>
-              <a:t>cv = StratifiedKFold(n_splits=5, shuffle=True, random_state=42)</a:t>
+              <a:t>        return self</a:t>
             </a:r>
           </a:p>
           <a:p>
@@ -9169,9 +9006,6 @@
                 <a:latin typeface="Consolas"/>
               </a:defRPr>
             </a:pPr>
-            <a:r>
-              <a:t>scores = cross_validate(pipe, Xtr, ytr, cv=cv,</a:t>
-            </a:r>
           </a:p>
           <a:p>
             <a:pPr>
@@ -9183,7 +9017,98 @@
               </a:defRPr>
             </a:pPr>
             <a:r>
-              <a:t>        scoring=['accuracy', 'precision', 'recall', 'f1'])</a:t>
+              <a:t>    def transform(self, X):</a:t>
+            </a:r>
+          </a:p>
+          <a:p>
+            <a:pPr>
+              <a:defRPr sz="1500">
+                <a:solidFill>
+                  <a:srgbClr val="D8E2F0"/>
+                </a:solidFill>
+                <a:latin typeface="Consolas"/>
+              </a:defRPr>
+            </a:pPr>
+            <a:r>
+              <a:t>        X = X.copy()</a:t>
+            </a:r>
+          </a:p>
+          <a:p>
+            <a:pPr>
+              <a:defRPr sz="1500">
+                <a:solidFill>
+                  <a:srgbClr val="D8E2F0"/>
+                </a:solidFill>
+                <a:latin typeface="Consolas"/>
+              </a:defRPr>
+            </a:pPr>
+            <a:r>
+              <a:t>        X['FamilySize']    = X['SibSp'] + X['Parch'] + 1</a:t>
+            </a:r>
+          </a:p>
+          <a:p>
+            <a:pPr>
+              <a:defRPr sz="1500">
+                <a:solidFill>
+                  <a:srgbClr val="D8E2F0"/>
+                </a:solidFill>
+                <a:latin typeface="Consolas"/>
+              </a:defRPr>
+            </a:pPr>
+            <a:r>
+              <a:t>        X['IsAlone']       = (X['FamilySize'] == 1).astype(int)</a:t>
+            </a:r>
+          </a:p>
+          <a:p>
+            <a:pPr>
+              <a:defRPr sz="1500">
+                <a:solidFill>
+                  <a:srgbClr val="D8E2F0"/>
+                </a:solidFill>
+                <a:latin typeface="Consolas"/>
+              </a:defRPr>
+            </a:pPr>
+            <a:r>
+              <a:t>        X['FarePerPerson'] = X['Fare'] / X['FamilySize'].clip(lower=1)</a:t>
+            </a:r>
+          </a:p>
+          <a:p>
+            <a:pPr>
+              <a:defRPr sz="1500">
+                <a:solidFill>
+                  <a:srgbClr val="D8E2F0"/>
+                </a:solidFill>
+                <a:latin typeface="Consolas"/>
+              </a:defRPr>
+            </a:pPr>
+            <a:r>
+              <a:t>        X['AgeBin'] = pd.cut(X['Age'], bins=self._age_bins,</a:t>
+            </a:r>
+          </a:p>
+          <a:p>
+            <a:pPr>
+              <a:defRPr sz="1500">
+                <a:solidFill>
+                  <a:srgbClr val="D8E2F0"/>
+                </a:solidFill>
+                <a:latin typeface="Consolas"/>
+              </a:defRPr>
+            </a:pPr>
+            <a:r>
+              <a:t>                             include_lowest=True).astype(str)</a:t>
+            </a:r>
+          </a:p>
+          <a:p>
+            <a:pPr>
+              <a:defRPr sz="1500">
+                <a:solidFill>
+                  <a:srgbClr val="D8E2F0"/>
+                </a:solidFill>
+                <a:latin typeface="Consolas"/>
+              </a:defRPr>
+            </a:pPr>
+            <a:r>
+              <a:t>        return X</a:t>
             </a:r>
           </a:p>
         </p:txBody>
@@ -9196,7 +9121,7 @@
         </p:nvSpPr>
         <p:spPr>
           <a:xfrm>
-            <a:off x="777240" y="4599431"/>
+            <a:off x="777240" y="5715000"/>
             <a:ext cx="10652760" cy="822960"/>
           </a:xfrm>
           <a:prstGeom prst="rect">
@@ -9218,7 +9143,7 @@
               </a:defRPr>
             </a:pPr>
             <a:r>
-              <a:t>Satu objek, tiga tahap. Seluruhnya di-fit ulang di setiap fold CV - itulah yang membuat skornya jujur.</a:t>
+              <a:t>Kunci desainnya: apa pun yang DIPELAJARI dari data masuk fit(); yang sekadar dihitung ulang masuk transform().</a:t>
             </a:r>
           </a:p>
         </p:txBody>
@@ -9256,6 +9181,363 @@
             <a:avLst/>
           </a:prstGeom>
           <a:solidFill>
+            <a:srgbClr val="FFFFFF"/>
+          </a:solidFill>
+          <a:ln>
+            <a:noFill/>
+          </a:ln>
+          <a:effectLst/>
+        </p:spPr>
+        <p:style>
+          <a:lnRef idx="1">
+            <a:schemeClr val="accent1"/>
+          </a:lnRef>
+          <a:fillRef idx="3">
+            <a:schemeClr val="accent1"/>
+          </a:fillRef>
+          <a:effectRef idx="2">
+            <a:schemeClr val="accent1"/>
+          </a:effectRef>
+          <a:fontRef idx="minor">
+            <a:schemeClr val="lt1"/>
+          </a:fontRef>
+        </p:style>
+        <p:txBody>
+          <a:bodyPr rtlCol="0" anchor="ctr"/>
+          <a:lstStyle/>
+          <a:p>
+            <a:pPr algn="ctr"/>
+          </a:p>
+        </p:txBody>
+      </p:sp>
+      <p:sp>
+        <p:nvSpPr>
+          <p:cNvPr id="3" name="Rectangle 2"/>
+          <p:cNvSpPr/>
+          <p:nvPr/>
+        </p:nvSpPr>
+        <p:spPr>
+          <a:xfrm>
+            <a:off x="0" y="0"/>
+            <a:ext cx="12191695" cy="128016"/>
+          </a:xfrm>
+          <a:prstGeom prst="rect">
+            <a:avLst/>
+          </a:prstGeom>
+          <a:solidFill>
+            <a:srgbClr val="102545"/>
+          </a:solidFill>
+          <a:ln>
+            <a:noFill/>
+          </a:ln>
+          <a:effectLst/>
+        </p:spPr>
+        <p:style>
+          <a:lnRef idx="1">
+            <a:schemeClr val="accent1"/>
+          </a:lnRef>
+          <a:fillRef idx="3">
+            <a:schemeClr val="accent1"/>
+          </a:fillRef>
+          <a:effectRef idx="2">
+            <a:schemeClr val="accent1"/>
+          </a:effectRef>
+          <a:fontRef idx="minor">
+            <a:schemeClr val="lt1"/>
+          </a:fontRef>
+        </p:style>
+        <p:txBody>
+          <a:bodyPr rtlCol="0" anchor="ctr"/>
+          <a:lstStyle/>
+          <a:p>
+            <a:pPr algn="ctr"/>
+          </a:p>
+        </p:txBody>
+      </p:sp>
+      <p:sp>
+        <p:nvSpPr>
+          <p:cNvPr id="4" name="TextBox 3"/>
+          <p:cNvSpPr txBox="1"/>
+          <p:nvPr/>
+        </p:nvSpPr>
+        <p:spPr>
+          <a:xfrm>
+            <a:off x="777240" y="411480"/>
+            <a:ext cx="10789920" cy="914400"/>
+          </a:xfrm>
+          <a:prstGeom prst="rect">
+            <a:avLst/>
+          </a:prstGeom>
+          <a:noFill/>
+        </p:spPr>
+        <p:txBody>
+          <a:bodyPr wrap="square">
+            <a:spAutoFit/>
+          </a:bodyPr>
+          <a:lstStyle/>
+          <a:p>
+            <a:pPr>
+              <a:defRPr sz="3400" b="1">
+                <a:solidFill>
+                  <a:srgbClr val="102545"/>
+                </a:solidFill>
+              </a:defRPr>
+            </a:pPr>
+            <a:r>
+              <a:t>Merangkai semuanya jadi satu pipeline</a:t>
+            </a:r>
+          </a:p>
+        </p:txBody>
+      </p:sp>
+      <p:sp>
+        <p:nvSpPr>
+          <p:cNvPr id="5" name="Rectangle 4"/>
+          <p:cNvSpPr/>
+          <p:nvPr/>
+        </p:nvSpPr>
+        <p:spPr>
+          <a:xfrm>
+            <a:off x="777240" y="1417320"/>
+            <a:ext cx="10652760" cy="3090672"/>
+          </a:xfrm>
+          <a:prstGeom prst="rect">
+            <a:avLst/>
+          </a:prstGeom>
+          <a:solidFill>
+            <a:srgbClr val="141A26"/>
+          </a:solidFill>
+          <a:ln>
+            <a:noFill/>
+          </a:ln>
+          <a:effectLst/>
+        </p:spPr>
+        <p:style>
+          <a:lnRef idx="1">
+            <a:schemeClr val="accent1"/>
+          </a:lnRef>
+          <a:fillRef idx="3">
+            <a:schemeClr val="accent1"/>
+          </a:fillRef>
+          <a:effectRef idx="2">
+            <a:schemeClr val="accent1"/>
+          </a:effectRef>
+          <a:fontRef idx="minor">
+            <a:schemeClr val="lt1"/>
+          </a:fontRef>
+        </p:style>
+        <p:txBody>
+          <a:bodyPr rtlCol="0" anchor="ctr"/>
+          <a:lstStyle/>
+          <a:p>
+            <a:pPr algn="ctr"/>
+          </a:p>
+        </p:txBody>
+      </p:sp>
+      <p:sp>
+        <p:nvSpPr>
+          <p:cNvPr id="6" name="TextBox 5"/>
+          <p:cNvSpPr txBox="1"/>
+          <p:nvPr/>
+        </p:nvSpPr>
+        <p:spPr>
+          <a:xfrm>
+            <a:off x="1005840" y="1572768"/>
+            <a:ext cx="10241280" cy="2907791"/>
+          </a:xfrm>
+          <a:prstGeom prst="rect">
+            <a:avLst/>
+          </a:prstGeom>
+          <a:noFill/>
+        </p:spPr>
+        <p:txBody>
+          <a:bodyPr wrap="square">
+            <a:spAutoFit/>
+          </a:bodyPr>
+          <a:lstStyle/>
+          <a:p>
+            <a:pPr>
+              <a:defRPr sz="1500">
+                <a:solidFill>
+                  <a:srgbClr val="D8E2F0"/>
+                </a:solidFill>
+                <a:latin typeface="Consolas"/>
+              </a:defRPr>
+            </a:pPr>
+            <a:r>
+              <a:t>pipe = Pipeline([</a:t>
+            </a:r>
+          </a:p>
+          <a:p>
+            <a:pPr>
+              <a:defRPr sz="1500">
+                <a:solidFill>
+                  <a:srgbClr val="D8E2F0"/>
+                </a:solidFill>
+                <a:latin typeface="Consolas"/>
+              </a:defRPr>
+            </a:pPr>
+            <a:r>
+              <a:t>    ('feat',  FeatureMaker()),      # fitur turunan</a:t>
+            </a:r>
+          </a:p>
+          <a:p>
+            <a:pPr>
+              <a:defRPr sz="1500">
+                <a:solidFill>
+                  <a:srgbClr val="D8E2F0"/>
+                </a:solidFill>
+                <a:latin typeface="Consolas"/>
+              </a:defRPr>
+            </a:pPr>
+            <a:r>
+              <a:t>    ('prep',  prep_ohe),            # impute + scale + encode</a:t>
+            </a:r>
+          </a:p>
+          <a:p>
+            <a:pPr>
+              <a:defRPr sz="1500">
+                <a:solidFill>
+                  <a:srgbClr val="D8E2F0"/>
+                </a:solidFill>
+                <a:latin typeface="Consolas"/>
+              </a:defRPr>
+            </a:pPr>
+            <a:r>
+              <a:t>    ('model', LogisticRegression(max_iter=1000)),</a:t>
+            </a:r>
+          </a:p>
+          <a:p>
+            <a:pPr>
+              <a:defRPr sz="1500">
+                <a:solidFill>
+                  <a:srgbClr val="D8E2F0"/>
+                </a:solidFill>
+                <a:latin typeface="Consolas"/>
+              </a:defRPr>
+            </a:pPr>
+            <a:r>
+              <a:t>])</a:t>
+            </a:r>
+          </a:p>
+          <a:p>
+            <a:pPr>
+              <a:defRPr sz="1500">
+                <a:solidFill>
+                  <a:srgbClr val="D8E2F0"/>
+                </a:solidFill>
+                <a:latin typeface="Consolas"/>
+              </a:defRPr>
+            </a:pPr>
+          </a:p>
+          <a:p>
+            <a:pPr>
+              <a:defRPr sz="1500">
+                <a:solidFill>
+                  <a:srgbClr val="D8E2F0"/>
+                </a:solidFill>
+                <a:latin typeface="Consolas"/>
+              </a:defRPr>
+            </a:pPr>
+            <a:r>
+              <a:t>cv = StratifiedKFold(n_splits=5, shuffle=True, random_state=42)</a:t>
+            </a:r>
+          </a:p>
+          <a:p>
+            <a:pPr>
+              <a:defRPr sz="1500">
+                <a:solidFill>
+                  <a:srgbClr val="D8E2F0"/>
+                </a:solidFill>
+                <a:latin typeface="Consolas"/>
+              </a:defRPr>
+            </a:pPr>
+            <a:r>
+              <a:t>scores = cross_validate(pipe, Xtr, ytr, cv=cv,</a:t>
+            </a:r>
+          </a:p>
+          <a:p>
+            <a:pPr>
+              <a:defRPr sz="1500">
+                <a:solidFill>
+                  <a:srgbClr val="D8E2F0"/>
+                </a:solidFill>
+                <a:latin typeface="Consolas"/>
+              </a:defRPr>
+            </a:pPr>
+            <a:r>
+              <a:t>        scoring=['accuracy', 'precision', 'recall', 'f1'])</a:t>
+            </a:r>
+          </a:p>
+        </p:txBody>
+      </p:sp>
+      <p:sp>
+        <p:nvSpPr>
+          <p:cNvPr id="7" name="TextBox 6"/>
+          <p:cNvSpPr txBox="1"/>
+          <p:nvPr/>
+        </p:nvSpPr>
+        <p:spPr>
+          <a:xfrm>
+            <a:off x="777240" y="4599431"/>
+            <a:ext cx="10652760" cy="822960"/>
+          </a:xfrm>
+          <a:prstGeom prst="rect">
+            <a:avLst/>
+          </a:prstGeom>
+          <a:noFill/>
+        </p:spPr>
+        <p:txBody>
+          <a:bodyPr wrap="square">
+            <a:spAutoFit/>
+          </a:bodyPr>
+          <a:lstStyle/>
+          <a:p>
+            <a:pPr>
+              <a:defRPr sz="1900" i="1">
+                <a:solidFill>
+                  <a:srgbClr val="5A6372"/>
+                </a:solidFill>
+              </a:defRPr>
+            </a:pPr>
+            <a:r>
+              <a:t>Satu objek, tiga tahap. Seluruhnya di-fit ulang di setiap fold CV - itulah yang membuat skornya jujur.</a:t>
+            </a:r>
+          </a:p>
+        </p:txBody>
+      </p:sp>
+    </p:spTree>
+  </p:cSld>
+  <p:clrMapOvr>
+    <a:masterClrMapping/>
+  </p:clrMapOvr>
+</p:sld>
+</file>
+
+<file path=ppt/slides/slide22.xml><?xml version="1.0" encoding="utf-8"?>
+<p:sld xmlns:a="http://schemas.openxmlformats.org/drawingml/2006/main" xmlns:p="http://schemas.openxmlformats.org/presentationml/2006/main" xmlns:r="http://schemas.openxmlformats.org/officeDocument/2006/relationships">
+  <p:cSld>
+    <p:spTree>
+      <p:nvGrpSpPr>
+        <p:cNvPr id="1" name=""/>
+        <p:cNvGrpSpPr/>
+        <p:nvPr/>
+      </p:nvGrpSpPr>
+      <p:grpSpPr/>
+      <p:sp>
+        <p:nvSpPr>
+          <p:cNvPr id="2" name="Rectangle 1"/>
+          <p:cNvSpPr/>
+          <p:nvPr/>
+        </p:nvSpPr>
+        <p:spPr>
+          <a:xfrm>
+            <a:off x="0" y="0"/>
+            <a:ext cx="12191695" cy="6858000"/>
+          </a:xfrm>
+          <a:prstGeom prst="rect">
+            <a:avLst/>
+          </a:prstGeom>
+          <a:solidFill>
             <a:srgbClr val="102545"/>
           </a:solidFill>
           <a:ln>
@@ -9442,7 +9724,7 @@
 </p:sld>
 </file>
 
-<file path=ppt/slides/slide22.xml><?xml version="1.0" encoding="utf-8"?>
+<file path=ppt/slides/slide23.xml><?xml version="1.0" encoding="utf-8"?>
 <p:sld xmlns:a="http://schemas.openxmlformats.org/drawingml/2006/main" xmlns:p="http://schemas.openxmlformats.org/presentationml/2006/main" xmlns:r="http://schemas.openxmlformats.org/officeDocument/2006/relationships">
   <p:cSld>
     <p:spTree>
@@ -10348,7 +10630,7 @@
 </p:sld>
 </file>
 
-<file path=ppt/slides/slide23.xml><?xml version="1.0" encoding="utf-8"?>
+<file path=ppt/slides/slide24.xml><?xml version="1.0" encoding="utf-8"?>
 <p:sld xmlns:a="http://schemas.openxmlformats.org/drawingml/2006/main" xmlns:p="http://schemas.openxmlformats.org/presentationml/2006/main" xmlns:r="http://schemas.openxmlformats.org/officeDocument/2006/relationships">
   <p:cSld>
     <p:spTree>
@@ -10733,7 +11015,7 @@
 </p:sld>
 </file>
 
-<file path=ppt/slides/slide24.xml><?xml version="1.0" encoding="utf-8"?>
+<file path=ppt/slides/slide25.xml><?xml version="1.0" encoding="utf-8"?>
 <p:sld xmlns:a="http://schemas.openxmlformats.org/drawingml/2006/main" xmlns:p="http://schemas.openxmlformats.org/presentationml/2006/main" xmlns:r="http://schemas.openxmlformats.org/officeDocument/2006/relationships">
   <p:cSld>
     <p:spTree>
@@ -10944,7 +11226,7 @@
 </p:sld>
 </file>
 
-<file path=ppt/slides/slide25.xml><?xml version="1.0" encoding="utf-8"?>
+<file path=ppt/slides/slide26.xml><?xml version="1.0" encoding="utf-8"?>
 <p:sld xmlns:a="http://schemas.openxmlformats.org/drawingml/2006/main" xmlns:p="http://schemas.openxmlformats.org/presentationml/2006/main" xmlns:r="http://schemas.openxmlformats.org/officeDocument/2006/relationships">
   <p:cSld>
     <p:spTree>
@@ -11502,7 +11784,7 @@
 </p:sld>
 </file>
 
-<file path=ppt/slides/slide26.xml><?xml version="1.0" encoding="utf-8"?>
+<file path=ppt/slides/slide27.xml><?xml version="1.0" encoding="utf-8"?>
 <p:sld xmlns:a="http://schemas.openxmlformats.org/drawingml/2006/main" xmlns:p="http://schemas.openxmlformats.org/presentationml/2006/main" xmlns:r="http://schemas.openxmlformats.org/officeDocument/2006/relationships">
   <p:cSld>
     <p:spTree>
@@ -12131,7 +12413,7 @@
 </p:sld>
 </file>
 
-<file path=ppt/slides/slide27.xml><?xml version="1.0" encoding="utf-8"?>
+<file path=ppt/slides/slide28.xml><?xml version="1.0" encoding="utf-8"?>
 <p:sld xmlns:a="http://schemas.openxmlformats.org/drawingml/2006/main" xmlns:p="http://schemas.openxmlformats.org/presentationml/2006/main" xmlns:r="http://schemas.openxmlformats.org/officeDocument/2006/relationships">
   <p:cSld>
     <p:spTree>
@@ -12459,295 +12741,6 @@
                 </a:solidFill>
               </a:rPr>
               <a:t> (evaluasi &amp; metrik)</a:t>
-            </a:r>
-          </a:p>
-        </p:txBody>
-      </p:sp>
-    </p:spTree>
-  </p:cSld>
-  <p:clrMapOvr>
-    <a:masterClrMapping/>
-  </p:clrMapOvr>
-</p:sld>
-</file>
-
-<file path=ppt/slides/slide28.xml><?xml version="1.0" encoding="utf-8"?>
-<p:sld xmlns:a="http://schemas.openxmlformats.org/drawingml/2006/main" xmlns:p="http://schemas.openxmlformats.org/presentationml/2006/main" xmlns:r="http://schemas.openxmlformats.org/officeDocument/2006/relationships">
-  <p:cSld>
-    <p:spTree>
-      <p:nvGrpSpPr>
-        <p:cNvPr id="1" name=""/>
-        <p:cNvGrpSpPr/>
-        <p:nvPr/>
-      </p:nvGrpSpPr>
-      <p:grpSpPr/>
-      <p:sp>
-        <p:nvSpPr>
-          <p:cNvPr id="2" name="Rectangle 1"/>
-          <p:cNvSpPr/>
-          <p:nvPr/>
-        </p:nvSpPr>
-        <p:spPr>
-          <a:xfrm>
-            <a:off x="0" y="0"/>
-            <a:ext cx="12191695" cy="6858000"/>
-          </a:xfrm>
-          <a:prstGeom prst="rect">
-            <a:avLst/>
-          </a:prstGeom>
-          <a:solidFill>
-            <a:srgbClr val="FFFFFF"/>
-          </a:solidFill>
-          <a:ln>
-            <a:noFill/>
-          </a:ln>
-          <a:effectLst/>
-        </p:spPr>
-        <p:style>
-          <a:lnRef idx="1">
-            <a:schemeClr val="accent1"/>
-          </a:lnRef>
-          <a:fillRef idx="3">
-            <a:schemeClr val="accent1"/>
-          </a:fillRef>
-          <a:effectRef idx="2">
-            <a:schemeClr val="accent1"/>
-          </a:effectRef>
-          <a:fontRef idx="minor">
-            <a:schemeClr val="lt1"/>
-          </a:fontRef>
-        </p:style>
-        <p:txBody>
-          <a:bodyPr rtlCol="0" anchor="ctr"/>
-          <a:lstStyle/>
-          <a:p>
-            <a:pPr algn="ctr"/>
-          </a:p>
-        </p:txBody>
-      </p:sp>
-      <p:sp>
-        <p:nvSpPr>
-          <p:cNvPr id="3" name="Rectangle 2"/>
-          <p:cNvSpPr/>
-          <p:nvPr/>
-        </p:nvSpPr>
-        <p:spPr>
-          <a:xfrm>
-            <a:off x="0" y="0"/>
-            <a:ext cx="12191695" cy="128016"/>
-          </a:xfrm>
-          <a:prstGeom prst="rect">
-            <a:avLst/>
-          </a:prstGeom>
-          <a:solidFill>
-            <a:srgbClr val="102545"/>
-          </a:solidFill>
-          <a:ln>
-            <a:noFill/>
-          </a:ln>
-          <a:effectLst/>
-        </p:spPr>
-        <p:style>
-          <a:lnRef idx="1">
-            <a:schemeClr val="accent1"/>
-          </a:lnRef>
-          <a:fillRef idx="3">
-            <a:schemeClr val="accent1"/>
-          </a:fillRef>
-          <a:effectRef idx="2">
-            <a:schemeClr val="accent1"/>
-          </a:effectRef>
-          <a:fontRef idx="minor">
-            <a:schemeClr val="lt1"/>
-          </a:fontRef>
-        </p:style>
-        <p:txBody>
-          <a:bodyPr rtlCol="0" anchor="ctr"/>
-          <a:lstStyle/>
-          <a:p>
-            <a:pPr algn="ctr"/>
-          </a:p>
-        </p:txBody>
-      </p:sp>
-      <p:sp>
-        <p:nvSpPr>
-          <p:cNvPr id="4" name="TextBox 3"/>
-          <p:cNvSpPr txBox="1"/>
-          <p:nvPr/>
-        </p:nvSpPr>
-        <p:spPr>
-          <a:xfrm>
-            <a:off x="777240" y="411480"/>
-            <a:ext cx="10789920" cy="914400"/>
-          </a:xfrm>
-          <a:prstGeom prst="rect">
-            <a:avLst/>
-          </a:prstGeom>
-          <a:noFill/>
-        </p:spPr>
-        <p:txBody>
-          <a:bodyPr wrap="square">
-            <a:spAutoFit/>
-          </a:bodyPr>
-          <a:lstStyle/>
-          <a:p>
-            <a:pPr>
-              <a:defRPr sz="3400" b="1">
-                <a:solidFill>
-                  <a:srgbClr val="102545"/>
-                </a:solidFill>
-              </a:defRPr>
-            </a:pPr>
-            <a:r>
-              <a:t>Pratinjau Pertemuan 4 - Evaluasi &amp; Metrik yang Benar</a:t>
-            </a:r>
-          </a:p>
-        </p:txBody>
-      </p:sp>
-      <p:sp>
-        <p:nvSpPr>
-          <p:cNvPr id="5" name="TextBox 4"/>
-          <p:cNvSpPr txBox="1"/>
-          <p:nvPr/>
-        </p:nvSpPr>
-        <p:spPr>
-          <a:xfrm>
-            <a:off x="777240" y="1234440"/>
-            <a:ext cx="10789920" cy="548640"/>
-          </a:xfrm>
-          <a:prstGeom prst="rect">
-            <a:avLst/>
-          </a:prstGeom>
-          <a:noFill/>
-        </p:spPr>
-        <p:txBody>
-          <a:bodyPr wrap="square">
-            <a:spAutoFit/>
-          </a:bodyPr>
-          <a:lstStyle/>
-          <a:p>
-            <a:pPr>
-              <a:defRPr sz="1900" i="1">
-                <a:solidFill>
-                  <a:srgbClr val="5A6372"/>
-                </a:solidFill>
-              </a:defRPr>
-            </a:pPr>
-            <a:r>
-              <a:t>Tabel ablation yang Anda buat hari ini menjadi bahan mentah Pertemuan 4 - jangan dibuang.</a:t>
-            </a:r>
-          </a:p>
-        </p:txBody>
-      </p:sp>
-      <p:sp>
-        <p:nvSpPr>
-          <p:cNvPr id="6" name="TextBox 5"/>
-          <p:cNvSpPr txBox="1"/>
-          <p:nvPr/>
-        </p:nvSpPr>
-        <p:spPr>
-          <a:xfrm>
-            <a:off x="777240" y="1874519"/>
-            <a:ext cx="10789920" cy="4480560"/>
-          </a:xfrm>
-          <a:prstGeom prst="rect">
-            <a:avLst/>
-          </a:prstGeom>
-          <a:noFill/>
-        </p:spPr>
-        <p:txBody>
-          <a:bodyPr wrap="square">
-            <a:spAutoFit/>
-          </a:bodyPr>
-          <a:lstStyle/>
-          <a:p>
-            <a:pPr>
-              <a:spcBef>
-                <a:spcPts val="1100"/>
-              </a:spcBef>
-            </a:pPr>
-            <a:r>
-              <a:rPr sz="2200">
-                <a:solidFill>
-                  <a:srgbClr val="1A1F2B"/>
-                </a:solidFill>
-              </a:rPr>
-              <a:t>•  Hari ini Anda sudah membandingkan beberapa setting. Pertanyaan berikutnya: </a:t>
-            </a:r>
-            <a:r>
-              <a:rPr sz="2200" b="1">
-                <a:solidFill>
-                  <a:srgbClr val="102545"/>
-                </a:solidFill>
-              </a:rPr>
-              <a:t>bagaimana tahu perbandingan itu adil?</a:t>
-            </a:r>
-          </a:p>
-          <a:p>
-            <a:pPr lvl="1">
-              <a:spcBef>
-                <a:spcPts val="300"/>
-              </a:spcBef>
-            </a:pPr>
-            <a:r>
-              <a:rPr sz="1900">
-                <a:solidFill>
-                  <a:srgbClr val="5A6372"/>
-                </a:solidFill>
-              </a:rPr>
-              <a:t>–  split, cross-validation, dan kenapa satu angka akurasi hampir selalu menipu</a:t>
-            </a:r>
-          </a:p>
-          <a:p>
-            <a:pPr lvl="1">
-              <a:spcBef>
-                <a:spcPts val="300"/>
-              </a:spcBef>
-            </a:pPr>
-            <a:r>
-              <a:rPr sz="1900">
-                <a:solidFill>
-                  <a:srgbClr val="5A6372"/>
-                </a:solidFill>
-              </a:rPr>
-              <a:t>–  metrik untuk kelas tidak seimbang - dan Titanic memang tidak seimbang</a:t>
-            </a:r>
-          </a:p>
-          <a:p>
-            <a:pPr lvl="1">
-              <a:spcBef>
-                <a:spcPts val="300"/>
-              </a:spcBef>
-            </a:pPr>
-            <a:r>
-              <a:rPr sz="1900">
-                <a:solidFill>
-                  <a:srgbClr val="5A6372"/>
-                </a:solidFill>
-              </a:rPr>
-              <a:t>–  data snooping: cara paling umum menipu diri sendiri tanpa sadar</a:t>
-            </a:r>
-          </a:p>
-          <a:p>
-            <a:pPr>
-              <a:spcBef>
-                <a:spcPts val="1100"/>
-              </a:spcBef>
-            </a:pPr>
-          </a:p>
-          <a:p>
-            <a:pPr>
-              <a:spcBef>
-                <a:spcPts val="1100"/>
-              </a:spcBef>
-            </a:pPr>
-            <a:r>
-              <a:rPr sz="2200">
-                <a:solidFill>
-                  <a:srgbClr val="1A1F2B"/>
-                </a:solidFill>
-              </a:rPr>
-              <a:t>•  Bawa tabel ablation Anda minggu depan. Kita akan bongkar mana selisih yang nyata dan mana yang cuma derau.</a:t>
             </a:r>
           </a:p>
         </p:txBody>
@@ -12888,7 +12881,7 @@
               </a:defRPr>
             </a:pPr>
             <a:r>
-              <a:t>Tautan cepat</a:t>
+              <a:t>Pratinjau Pertemuan 4 - Evaluasi &amp; Metrik yang Benar</a:t>
             </a:r>
           </a:p>
         </p:txBody>
@@ -12901,8 +12894,8 @@
         </p:nvSpPr>
         <p:spPr>
           <a:xfrm>
-            <a:off x="777240" y="1188720"/>
-            <a:ext cx="10789920" cy="457200"/>
+            <a:off x="777240" y="1234440"/>
+            <a:ext cx="10789920" cy="548640"/>
           </a:xfrm>
           <a:prstGeom prst="rect">
             <a:avLst/>
@@ -12916,14 +12909,14 @@
           <a:lstStyle/>
           <a:p>
             <a:pPr>
-              <a:defRPr sz="1800" i="1">
+              <a:defRPr sz="1900" i="1">
                 <a:solidFill>
                   <a:srgbClr val="5A6372"/>
                 </a:solidFill>
               </a:defRPr>
             </a:pPr>
             <a:r>
-              <a:t>eBelajar menautkan, Drive menyimpan. Kalau ada tautan yang mati, lapor di forum Diskusi Umum.</a:t>
+              <a:t>Tabel ablation yang Anda buat hari ini menjadi bahan mentah Pertemuan 4 - jangan dibuang.</a:t>
             </a:r>
           </a:p>
         </p:txBody>
@@ -12936,8 +12929,8 @@
         </p:nvSpPr>
         <p:spPr>
           <a:xfrm>
-            <a:off x="777240" y="1783080"/>
-            <a:ext cx="10789920" cy="4617720"/>
+            <a:off x="777240" y="1874519"/>
+            <a:ext cx="10789920" cy="4480560"/>
           </a:xfrm>
           <a:prstGeom prst="rect">
             <a:avLst/>
@@ -12952,127 +12945,91 @@
           <a:p>
             <a:pPr>
               <a:spcBef>
-                <a:spcPts val="1000"/>
+                <a:spcPts val="1100"/>
               </a:spcBef>
             </a:pPr>
             <a:r>
-              <a:rPr sz="2000" b="1">
-                <a:solidFill>
-                  <a:srgbClr val="E6A023"/>
+              <a:rPr sz="2200">
+                <a:solidFill>
+                  <a:srgbClr val="1A1F2B"/>
                 </a:solidFill>
               </a:rPr>
-              <a:t>▸  </a:t>
-            </a:r>
-            <a:r>
-              <a:rPr sz="2000" b="1" u="sng">
-                <a:hlinkClick r:id="rId2"/>
+              <a:t>•  Hari ini Anda sudah membandingkan beberapa setting. Pertanyaan berikutnya: </a:t>
+            </a:r>
+            <a:r>
+              <a:rPr sz="2200" b="1">
+                <a:solidFill>
+                  <a:srgbClr val="102545"/>
+                </a:solidFill>
               </a:rPr>
-              <a:t>Folder Drive Pertemuan 3 (modul, LKS, video)</a:t>
+              <a:t>bagaimana tahu perbandingan itu adil?</a:t>
+            </a:r>
+          </a:p>
+          <a:p>
+            <a:pPr lvl="1">
+              <a:spcBef>
+                <a:spcPts val="300"/>
+              </a:spcBef>
+            </a:pPr>
+            <a:r>
+              <a:rPr sz="1900">
+                <a:solidFill>
+                  <a:srgbClr val="5A6372"/>
+                </a:solidFill>
+              </a:rPr>
+              <a:t>–  split, cross-validation, dan kenapa satu angka akurasi hampir selalu menipu</a:t>
+            </a:r>
+          </a:p>
+          <a:p>
+            <a:pPr lvl="1">
+              <a:spcBef>
+                <a:spcPts val="300"/>
+              </a:spcBef>
+            </a:pPr>
+            <a:r>
+              <a:rPr sz="1900">
+                <a:solidFill>
+                  <a:srgbClr val="5A6372"/>
+                </a:solidFill>
+              </a:rPr>
+              <a:t>–  metrik untuk kelas tidak seimbang - dan Titanic memang tidak seimbang</a:t>
+            </a:r>
+          </a:p>
+          <a:p>
+            <a:pPr lvl="1">
+              <a:spcBef>
+                <a:spcPts val="300"/>
+              </a:spcBef>
+            </a:pPr>
+            <a:r>
+              <a:rPr sz="1900">
+                <a:solidFill>
+                  <a:srgbClr val="5A6372"/>
+                </a:solidFill>
+              </a:rPr>
+              <a:t>–  data snooping: cara paling umum menipu diri sendiri tanpa sadar</a:t>
             </a:r>
           </a:p>
           <a:p>
             <a:pPr>
               <a:spcBef>
-                <a:spcPts val="1000"/>
+                <a:spcPts val="1100"/>
               </a:spcBef>
             </a:pPr>
-            <a:r>
-              <a:rPr sz="2000" b="1">
-                <a:solidFill>
-                  <a:srgbClr val="E6A023"/>
-                </a:solidFill>
-              </a:rPr>
-              <a:t>▸  </a:t>
-            </a:r>
-            <a:r>
-              <a:rPr sz="2000" b="1" u="sng">
-                <a:hlinkClick r:id="rId3"/>
-              </a:rPr>
-              <a:t>Modul Mandiri P3 - Encoding &amp; Feature Thinking</a:t>
-            </a:r>
           </a:p>
           <a:p>
             <a:pPr>
               <a:spcBef>
-                <a:spcPts val="1000"/>
+                <a:spcPts val="1100"/>
               </a:spcBef>
             </a:pPr>
             <a:r>
-              <a:rPr sz="2000" b="1">
-                <a:solidFill>
-                  <a:srgbClr val="E6A023"/>
+              <a:rPr sz="2200">
+                <a:solidFill>
+                  <a:srgbClr val="1A1F2B"/>
                 </a:solidFill>
               </a:rPr>
-              <a:t>▸  </a:t>
-            </a:r>
-            <a:r>
-              <a:rPr sz="2000" b="1" u="sng">
-                <a:hlinkClick r:id="rId4"/>
-              </a:rPr>
-              <a:t>LKS Colab - LKS_P3_Encoding_Feature_Thinking.ipynb</a:t>
-            </a:r>
-          </a:p>
-          <a:p>
-            <a:pPr>
-              <a:spcBef>
-                <a:spcPts val="1000"/>
-              </a:spcBef>
-            </a:pPr>
-            <a:r>
-              <a:rPr sz="2000" b="1">
-                <a:solidFill>
-                  <a:srgbClr val="E6A023"/>
-                </a:solidFill>
-              </a:rPr>
-              <a:t>▸  </a:t>
-            </a:r>
-            <a:r>
-              <a:rPr sz="2000" b="1" u="sng">
-                <a:hlinkClick r:id="rId5"/>
-              </a:rPr>
-              <a:t>Video - Menyelami Encoding &amp; Rekayasa Fitur (anti-leakage)</a:t>
-            </a:r>
-          </a:p>
-          <a:p>
-            <a:pPr>
-              <a:spcBef>
-                <a:spcPts val="1000"/>
-              </a:spcBef>
-            </a:pPr>
-            <a:r>
-              <a:rPr sz="2000" b="1">
-                <a:solidFill>
-                  <a:srgbClr val="E6A023"/>
-                </a:solidFill>
-              </a:rPr>
-              <a:t>▸  </a:t>
-            </a:r>
-            <a:r>
-              <a:rPr sz="2000" b="1" u="sng">
-                <a:hlinkClick r:id="rId6"/>
-              </a:rPr>
-              <a:t>Tugas 1 - tenggat Minggu 27 Sep 23.55</a:t>
-            </a:r>
-          </a:p>
-          <a:p>
-            <a:pPr>
-              <a:spcBef>
-                <a:spcPts val="1000"/>
-              </a:spcBef>
-            </a:pPr>
-            <a:r>
-              <a:rPr sz="2000" b="1">
-                <a:solidFill>
-                  <a:srgbClr val="E6A023"/>
-                </a:solidFill>
-              </a:rPr>
-              <a:t>▸  </a:t>
-            </a:r>
-            <a:r>
-              <a:rPr sz="2000" b="1" u="sng">
-                <a:hlinkClick r:id="rId7"/>
-              </a:rPr>
-              <a:t>Forum Diskusi Umum - tempat bertanya kalau macet</a:t>
+              <a:t>•  Bawa tabel ablation Anda minggu depan. Kita akan bongkar mana selisih yang nyata dan mana yang cuma derau.</a:t>
             </a:r>
           </a:p>
         </p:txBody>
@@ -13213,11 +13170,11 @@
               </a:defRPr>
             </a:pPr>
             <a:r>
-              <a:t>Tugas 1: 2 dari 22.</a:t>
+              <a:t>Tugas 1: 6 dari 22.</a:t>
             </a:r>
             <a:br/>
             <a:r>
-              <a:t>Sembilan hari lagi.</a:t>
+              <a:t>Enam hari lagi.</a:t>
             </a:r>
           </a:p>
         </p:txBody>
@@ -13252,7 +13209,332 @@
               </a:defRPr>
             </a:pPr>
             <a:r>
-              <a:t>Tugas 1 adalah praktek preprocessing - materi P1 dan P2 yang sudah kita kerjakan bersama. Kalau macet di satu langkah, tulis di forum Diskusi Umum hari ini juga; jangan menunggu tanggal 26.</a:t>
+              <a:t>Enam yang sudah mengumpulkan menerima nilai plus catatan revisi di kolom komentar tugas (boleh perbaiki sampai tenggat). Sisanya: Tugas 1 adalah praktek preprocessing - materi P1 dan P2 yang sudah kita kerjakan bersama. Kalau macet di satu langkah, tulis di forum Diskusi Umum hari ini juga; jangan menunggu tanggal 26.</a:t>
+            </a:r>
+          </a:p>
+        </p:txBody>
+      </p:sp>
+    </p:spTree>
+  </p:cSld>
+  <p:clrMapOvr>
+    <a:masterClrMapping/>
+  </p:clrMapOvr>
+</p:sld>
+</file>
+
+<file path=ppt/slides/slide30.xml><?xml version="1.0" encoding="utf-8"?>
+<p:sld xmlns:a="http://schemas.openxmlformats.org/drawingml/2006/main" xmlns:p="http://schemas.openxmlformats.org/presentationml/2006/main" xmlns:r="http://schemas.openxmlformats.org/officeDocument/2006/relationships">
+  <p:cSld>
+    <p:spTree>
+      <p:nvGrpSpPr>
+        <p:cNvPr id="1" name=""/>
+        <p:cNvGrpSpPr/>
+        <p:nvPr/>
+      </p:nvGrpSpPr>
+      <p:grpSpPr/>
+      <p:sp>
+        <p:nvSpPr>
+          <p:cNvPr id="2" name="Rectangle 1"/>
+          <p:cNvSpPr/>
+          <p:nvPr/>
+        </p:nvSpPr>
+        <p:spPr>
+          <a:xfrm>
+            <a:off x="0" y="0"/>
+            <a:ext cx="12191695" cy="6858000"/>
+          </a:xfrm>
+          <a:prstGeom prst="rect">
+            <a:avLst/>
+          </a:prstGeom>
+          <a:solidFill>
+            <a:srgbClr val="FFFFFF"/>
+          </a:solidFill>
+          <a:ln>
+            <a:noFill/>
+          </a:ln>
+          <a:effectLst/>
+        </p:spPr>
+        <p:style>
+          <a:lnRef idx="1">
+            <a:schemeClr val="accent1"/>
+          </a:lnRef>
+          <a:fillRef idx="3">
+            <a:schemeClr val="accent1"/>
+          </a:fillRef>
+          <a:effectRef idx="2">
+            <a:schemeClr val="accent1"/>
+          </a:effectRef>
+          <a:fontRef idx="minor">
+            <a:schemeClr val="lt1"/>
+          </a:fontRef>
+        </p:style>
+        <p:txBody>
+          <a:bodyPr rtlCol="0" anchor="ctr"/>
+          <a:lstStyle/>
+          <a:p>
+            <a:pPr algn="ctr"/>
+          </a:p>
+        </p:txBody>
+      </p:sp>
+      <p:sp>
+        <p:nvSpPr>
+          <p:cNvPr id="3" name="Rectangle 2"/>
+          <p:cNvSpPr/>
+          <p:nvPr/>
+        </p:nvSpPr>
+        <p:spPr>
+          <a:xfrm>
+            <a:off x="0" y="0"/>
+            <a:ext cx="12191695" cy="128016"/>
+          </a:xfrm>
+          <a:prstGeom prst="rect">
+            <a:avLst/>
+          </a:prstGeom>
+          <a:solidFill>
+            <a:srgbClr val="102545"/>
+          </a:solidFill>
+          <a:ln>
+            <a:noFill/>
+          </a:ln>
+          <a:effectLst/>
+        </p:spPr>
+        <p:style>
+          <a:lnRef idx="1">
+            <a:schemeClr val="accent1"/>
+          </a:lnRef>
+          <a:fillRef idx="3">
+            <a:schemeClr val="accent1"/>
+          </a:fillRef>
+          <a:effectRef idx="2">
+            <a:schemeClr val="accent1"/>
+          </a:effectRef>
+          <a:fontRef idx="minor">
+            <a:schemeClr val="lt1"/>
+          </a:fontRef>
+        </p:style>
+        <p:txBody>
+          <a:bodyPr rtlCol="0" anchor="ctr"/>
+          <a:lstStyle/>
+          <a:p>
+            <a:pPr algn="ctr"/>
+          </a:p>
+        </p:txBody>
+      </p:sp>
+      <p:sp>
+        <p:nvSpPr>
+          <p:cNvPr id="4" name="TextBox 3"/>
+          <p:cNvSpPr txBox="1"/>
+          <p:nvPr/>
+        </p:nvSpPr>
+        <p:spPr>
+          <a:xfrm>
+            <a:off x="777240" y="411480"/>
+            <a:ext cx="10789920" cy="914400"/>
+          </a:xfrm>
+          <a:prstGeom prst="rect">
+            <a:avLst/>
+          </a:prstGeom>
+          <a:noFill/>
+        </p:spPr>
+        <p:txBody>
+          <a:bodyPr wrap="square">
+            <a:spAutoFit/>
+          </a:bodyPr>
+          <a:lstStyle/>
+          <a:p>
+            <a:pPr>
+              <a:defRPr sz="3400" b="1">
+                <a:solidFill>
+                  <a:srgbClr val="102545"/>
+                </a:solidFill>
+              </a:defRPr>
+            </a:pPr>
+            <a:r>
+              <a:t>Tautan cepat</a:t>
+            </a:r>
+          </a:p>
+        </p:txBody>
+      </p:sp>
+      <p:sp>
+        <p:nvSpPr>
+          <p:cNvPr id="5" name="TextBox 4"/>
+          <p:cNvSpPr txBox="1"/>
+          <p:nvPr/>
+        </p:nvSpPr>
+        <p:spPr>
+          <a:xfrm>
+            <a:off x="777240" y="1188720"/>
+            <a:ext cx="10789920" cy="457200"/>
+          </a:xfrm>
+          <a:prstGeom prst="rect">
+            <a:avLst/>
+          </a:prstGeom>
+          <a:noFill/>
+        </p:spPr>
+        <p:txBody>
+          <a:bodyPr wrap="square">
+            <a:spAutoFit/>
+          </a:bodyPr>
+          <a:lstStyle/>
+          <a:p>
+            <a:pPr>
+              <a:defRPr sz="1800" i="1">
+                <a:solidFill>
+                  <a:srgbClr val="5A6372"/>
+                </a:solidFill>
+              </a:defRPr>
+            </a:pPr>
+            <a:r>
+              <a:t>eBelajar menautkan, Drive menyimpan. Kalau ada tautan yang mati, lapor di forum Diskusi Umum.</a:t>
+            </a:r>
+          </a:p>
+        </p:txBody>
+      </p:sp>
+      <p:sp>
+        <p:nvSpPr>
+          <p:cNvPr id="6" name="TextBox 5"/>
+          <p:cNvSpPr txBox="1"/>
+          <p:nvPr/>
+        </p:nvSpPr>
+        <p:spPr>
+          <a:xfrm>
+            <a:off x="777240" y="1783080"/>
+            <a:ext cx="10789920" cy="4617720"/>
+          </a:xfrm>
+          <a:prstGeom prst="rect">
+            <a:avLst/>
+          </a:prstGeom>
+          <a:noFill/>
+        </p:spPr>
+        <p:txBody>
+          <a:bodyPr wrap="square">
+            <a:spAutoFit/>
+          </a:bodyPr>
+          <a:lstStyle/>
+          <a:p>
+            <a:pPr>
+              <a:spcBef>
+                <a:spcPts val="1000"/>
+              </a:spcBef>
+            </a:pPr>
+            <a:r>
+              <a:rPr sz="2000" b="1">
+                <a:solidFill>
+                  <a:srgbClr val="E6A023"/>
+                </a:solidFill>
+              </a:rPr>
+              <a:t>▸  </a:t>
+            </a:r>
+            <a:r>
+              <a:rPr sz="2000" b="1" u="sng">
+                <a:hlinkClick r:id="rId2"/>
+              </a:rPr>
+              <a:t>Folder Drive Pertemuan 3 (modul, LKS, video)</a:t>
+            </a:r>
+          </a:p>
+          <a:p>
+            <a:pPr>
+              <a:spcBef>
+                <a:spcPts val="1000"/>
+              </a:spcBef>
+            </a:pPr>
+            <a:r>
+              <a:rPr sz="2000" b="1">
+                <a:solidFill>
+                  <a:srgbClr val="E6A023"/>
+                </a:solidFill>
+              </a:rPr>
+              <a:t>▸  </a:t>
+            </a:r>
+            <a:r>
+              <a:rPr sz="2000" b="1" u="sng">
+                <a:hlinkClick r:id="rId3"/>
+              </a:rPr>
+              <a:t>Modul Mandiri P3 - Encoding &amp; Feature Thinking</a:t>
+            </a:r>
+          </a:p>
+          <a:p>
+            <a:pPr>
+              <a:spcBef>
+                <a:spcPts val="1000"/>
+              </a:spcBef>
+            </a:pPr>
+            <a:r>
+              <a:rPr sz="2000" b="1">
+                <a:solidFill>
+                  <a:srgbClr val="E6A023"/>
+                </a:solidFill>
+              </a:rPr>
+              <a:t>▸  </a:t>
+            </a:r>
+            <a:r>
+              <a:rPr sz="2000" b="1" u="sng">
+                <a:hlinkClick r:id="rId4"/>
+              </a:rPr>
+              <a:t>LKS Colab - LKS_P3_Encoding_Feature_Thinking.ipynb</a:t>
+            </a:r>
+          </a:p>
+          <a:p>
+            <a:pPr>
+              <a:spcBef>
+                <a:spcPts val="1000"/>
+              </a:spcBef>
+            </a:pPr>
+            <a:r>
+              <a:rPr sz="2000" b="1">
+                <a:solidFill>
+                  <a:srgbClr val="E6A023"/>
+                </a:solidFill>
+              </a:rPr>
+              <a:t>▸  </a:t>
+            </a:r>
+            <a:r>
+              <a:rPr sz="2000" b="1" u="sng">
+                <a:hlinkClick r:id="rId5"/>
+              </a:rPr>
+              <a:t>Video - Menyelami Encoding &amp; Rekayasa Fitur (anti-leakage)</a:t>
+            </a:r>
+          </a:p>
+          <a:p>
+            <a:pPr>
+              <a:spcBef>
+                <a:spcPts val="1000"/>
+              </a:spcBef>
+            </a:pPr>
+            <a:r>
+              <a:rPr sz="2000" b="1">
+                <a:solidFill>
+                  <a:srgbClr val="E6A023"/>
+                </a:solidFill>
+              </a:rPr>
+              <a:t>▸  </a:t>
+            </a:r>
+            <a:r>
+              <a:rPr sz="2000" b="1" u="sng">
+                <a:hlinkClick r:id="rId6"/>
+              </a:rPr>
+              <a:t>Tugas 1 - tenggat Minggu 27 Sep 23.55</a:t>
+            </a:r>
+          </a:p>
+          <a:p>
+            <a:pPr>
+              <a:spcBef>
+                <a:spcPts val="1000"/>
+              </a:spcBef>
+            </a:pPr>
+            <a:r>
+              <a:rPr sz="2000" b="1">
+                <a:solidFill>
+                  <a:srgbClr val="E6A023"/>
+                </a:solidFill>
+              </a:rPr>
+              <a:t>▸  </a:t>
+            </a:r>
+            <a:r>
+              <a:rPr sz="2000" b="1" u="sng">
+                <a:hlinkClick r:id="rId7"/>
+              </a:rPr>
+              <a:t>Forum Diskusi Umum - tempat bertanya kalau macet</a:t>
             </a:r>
           </a:p>
         </p:txBody>
@@ -13393,7 +13675,7 @@
               </a:defRPr>
             </a:pPr>
             <a:r>
-              <a:t>Alur 150 menit hari ini</a:t>
+              <a:t>Tabulasi nilai s.d. pagi ini (21 Sep)</a:t>
             </a:r>
           </a:p>
         </p:txBody>
@@ -13406,8 +13688,8 @@
         </p:nvSpPr>
         <p:spPr>
           <a:xfrm>
-            <a:off x="777240" y="1234440"/>
-            <a:ext cx="10789920" cy="548640"/>
+            <a:off x="777240" y="1188720"/>
+            <a:ext cx="10789920" cy="457200"/>
           </a:xfrm>
           <a:prstGeom prst="rect">
             <a:avLst/>
@@ -13421,227 +13703,1080 @@
           <a:lstStyle/>
           <a:p>
             <a:pPr>
-              <a:defRPr sz="1900" i="1">
+              <a:defRPr sz="1800" i="1">
                 <a:solidFill>
                   <a:srgbClr val="5A6372"/>
                 </a:solidFill>
               </a:defRPr>
             </a:pPr>
             <a:r>
-              <a:t>Angka = menit. Modul mandiri versinya 3-4 jam; hari ini kita kerjakan inti yang paling mudah salah kalau dikerjakan sendirian.</a:t>
-            </a:r>
-          </a:p>
-        </p:txBody>
-      </p:sp>
-      <p:sp>
-        <p:nvSpPr>
-          <p:cNvPr id="6" name="TextBox 5"/>
-          <p:cNvSpPr txBox="1"/>
+              <a:t>Sumber: rating forum + grade Tugas 1 di eBelajar, dibaca pagi ini. Perkenalan: Faiz 85 (satu-satunya). Kosong = belum ada aktivitas - semuanya masih bisa dikejar sebelum tenggat 27 Sep.</a:t>
+            </a:r>
+          </a:p>
+        </p:txBody>
+      </p:sp>
+      <p:graphicFrame>
+        <p:nvGraphicFramePr>
+          <p:cNvPr id="6" name="Table 5"/>
+          <p:cNvGraphicFramePr>
+            <a:graphicFrameLocks noGrp="1"/>
+          </p:cNvGraphicFramePr>
           <p:nvPr/>
-        </p:nvSpPr>
-        <p:spPr>
-          <a:xfrm>
-            <a:off x="777240" y="1874519"/>
-            <a:ext cx="10789920" cy="4480560"/>
-          </a:xfrm>
-          <a:prstGeom prst="rect">
-            <a:avLst/>
-          </a:prstGeom>
-          <a:noFill/>
-        </p:spPr>
-        <p:txBody>
-          <a:bodyPr wrap="square">
-            <a:spAutoFit/>
-          </a:bodyPr>
-          <a:lstStyle/>
-          <a:p>
-            <a:pPr>
-              <a:spcBef>
-                <a:spcPts val="1100"/>
-              </a:spcBef>
-            </a:pPr>
-            <a:r>
-              <a:rPr sz="2200">
-                <a:solidFill>
-                  <a:srgbClr val="1A1F2B"/>
-                </a:solidFill>
-              </a:rPr>
-              <a:t>•  </a:t>
-            </a:r>
-            <a:r>
-              <a:rPr sz="2200" b="1">
-                <a:solidFill>
-                  <a:srgbClr val="102545"/>
-                </a:solidFill>
-              </a:rPr>
-              <a:t>Hook</a:t>
-            </a:r>
-            <a:r>
-              <a:rPr sz="2200">
-                <a:solidFill>
-                  <a:srgbClr val="1A1F2B"/>
-                </a:solidFill>
-              </a:rPr>
-              <a:t> - satu kolom kategori, tiga cara menyandikan, tiga hasil berbeda · 10'</a:t>
-            </a:r>
-          </a:p>
-          <a:p>
-            <a:pPr>
-              <a:spcBef>
-                <a:spcPts val="1100"/>
-              </a:spcBef>
-            </a:pPr>
-            <a:r>
-              <a:rPr sz="2200">
-                <a:solidFill>
-                  <a:srgbClr val="1A1F2B"/>
-                </a:solidFill>
-              </a:rPr>
-              <a:t>•  </a:t>
-            </a:r>
-            <a:r>
-              <a:rPr sz="2200" b="1">
-                <a:solidFill>
-                  <a:srgbClr val="102545"/>
-                </a:solidFill>
-              </a:rPr>
-              <a:t>Mini-lecture</a:t>
-            </a:r>
-            <a:r>
-              <a:rPr sz="2200">
-                <a:solidFill>
-                  <a:srgbClr val="1A1F2B"/>
-                </a:solidFill>
-              </a:rPr>
-              <a:t> - One-Hot vs Ordinal, kategori langka, dan bahaya target encoding · 30'</a:t>
-            </a:r>
-          </a:p>
-          <a:p>
-            <a:pPr>
-              <a:spcBef>
-                <a:spcPts val="1100"/>
-              </a:spcBef>
-            </a:pPr>
-            <a:r>
-              <a:rPr sz="2200">
-                <a:solidFill>
-                  <a:srgbClr val="1A1F2B"/>
-                </a:solidFill>
-              </a:rPr>
-              <a:t>•  </a:t>
-            </a:r>
-            <a:r>
-              <a:rPr sz="2200" b="1">
-                <a:solidFill>
-                  <a:srgbClr val="102545"/>
-                </a:solidFill>
-              </a:rPr>
-              <a:t>Praktikum 1</a:t>
-            </a:r>
-            <a:r>
-              <a:rPr sz="2200">
-                <a:solidFill>
-                  <a:srgbClr val="1A1F2B"/>
-                </a:solidFill>
-              </a:rPr>
-              <a:t> - encoding di dalam Pipeline/ColumnTransformer (anti-leakage) · 35'</a:t>
-            </a:r>
-          </a:p>
-          <a:p>
-            <a:pPr>
-              <a:spcBef>
-                <a:spcPts val="1100"/>
-              </a:spcBef>
-            </a:pPr>
-            <a:r>
-              <a:rPr sz="2200">
-                <a:solidFill>
-                  <a:srgbClr val="1A1F2B"/>
-                </a:solidFill>
-              </a:rPr>
-              <a:t>•  </a:t>
-            </a:r>
-            <a:r>
-              <a:rPr sz="2200" b="1">
-                <a:solidFill>
-                  <a:srgbClr val="102545"/>
-                </a:solidFill>
-              </a:rPr>
-              <a:t>Praktikum 2</a:t>
-            </a:r>
-            <a:r>
-              <a:rPr sz="2200">
-                <a:solidFill>
-                  <a:srgbClr val="1A1F2B"/>
-                </a:solidFill>
-              </a:rPr>
-              <a:t> - Feature Thinking: bikin fitur turunan lewat custom transformer · 40'</a:t>
-            </a:r>
-          </a:p>
-          <a:p>
-            <a:pPr>
-              <a:spcBef>
-                <a:spcPts val="1100"/>
-              </a:spcBef>
-            </a:pPr>
-            <a:r>
-              <a:rPr sz="2200">
-                <a:solidFill>
-                  <a:srgbClr val="1A1F2B"/>
-                </a:solidFill>
-              </a:rPr>
-              <a:t>•  </a:t>
-            </a:r>
-            <a:r>
-              <a:rPr sz="2200" b="1">
-                <a:solidFill>
-                  <a:srgbClr val="102545"/>
-                </a:solidFill>
-              </a:rPr>
-              <a:t>Ablation</a:t>
-            </a:r>
-            <a:r>
-              <a:rPr sz="2200">
-                <a:solidFill>
-                  <a:srgbClr val="1A1F2B"/>
-                </a:solidFill>
-              </a:rPr>
-              <a:t> - tanpa fitur baru vs dengan fitur baru, baca tabelnya · 25'</a:t>
-            </a:r>
-          </a:p>
-          <a:p>
-            <a:pPr>
-              <a:spcBef>
-                <a:spcPts val="1100"/>
-              </a:spcBef>
-            </a:pPr>
-            <a:r>
-              <a:rPr sz="2200">
-                <a:solidFill>
-                  <a:srgbClr val="1A1F2B"/>
-                </a:solidFill>
-              </a:rPr>
-              <a:t>•  </a:t>
-            </a:r>
-            <a:r>
-              <a:rPr sz="2200" b="1">
-                <a:solidFill>
-                  <a:srgbClr val="102545"/>
-                </a:solidFill>
-              </a:rPr>
-              <a:t>Rangkuman</a:t>
-            </a:r>
-            <a:r>
-              <a:rPr sz="2200">
-                <a:solidFill>
-                  <a:srgbClr val="1A1F2B"/>
-                </a:solidFill>
-              </a:rPr>
-              <a:t> + penugasan + exit-ticket · 10'</a:t>
-            </a:r>
-          </a:p>
-        </p:txBody>
-      </p:sp>
+        </p:nvGraphicFramePr>
+        <p:xfrm>
+          <a:off x="777240" y="1783080"/>
+          <a:ext cx="10652759" cy="4187952"/>
+        </p:xfrm>
+        <a:graphic>
+          <a:graphicData uri="http://schemas.openxmlformats.org/drawingml/2006/table">
+            <a:tbl>
+              <a:tblPr firstRow="1" bandRow="1">
+                <a:tableStyleId>{5C22544A-7EE6-4342-B048-85BDC9FD1C3A}</a:tableStyleId>
+              </a:tblPr>
+              <a:tblGrid>
+                <a:gridCol w="4083557"/>
+                <a:gridCol w="2130552"/>
+                <a:gridCol w="2130552"/>
+                <a:gridCol w="2308098"/>
+              </a:tblGrid>
+              <a:tr h="380722">
+                <a:tc>
+                  <a:txBody>
+                    <a:bodyPr/>
+                    <a:lstStyle/>
+                    <a:p>
+                      <a:pPr>
+                        <a:defRPr sz="1400" b="1">
+                          <a:solidFill>
+                            <a:srgbClr val="FFFFFF"/>
+                          </a:solidFill>
+                        </a:defRPr>
+                      </a:pPr>
+                      <a:r>
+                        <a:t>Mahasiswa</a:t>
+                      </a:r>
+                    </a:p>
+                  </a:txBody>
+                  <a:tcPr anchor="ctr">
+                    <a:solidFill>
+                      <a:srgbClr val="102545"/>
+                    </a:solidFill>
+                  </a:tcPr>
+                </a:tc>
+                <a:tc>
+                  <a:txBody>
+                    <a:bodyPr/>
+                    <a:lstStyle/>
+                    <a:p>
+                      <a:pPr>
+                        <a:defRPr sz="1400" b="1">
+                          <a:solidFill>
+                            <a:srgbClr val="FFFFFF"/>
+                          </a:solidFill>
+                        </a:defRPr>
+                      </a:pPr>
+                      <a:r>
+                        <a:t>Forum P1</a:t>
+                      </a:r>
+                    </a:p>
+                  </a:txBody>
+                  <a:tcPr anchor="ctr">
+                    <a:solidFill>
+                      <a:srgbClr val="102545"/>
+                    </a:solidFill>
+                  </a:tcPr>
+                </a:tc>
+                <a:tc>
+                  <a:txBody>
+                    <a:bodyPr/>
+                    <a:lstStyle/>
+                    <a:p>
+                      <a:pPr>
+                        <a:defRPr sz="1400" b="1">
+                          <a:solidFill>
+                            <a:srgbClr val="FFFFFF"/>
+                          </a:solidFill>
+                        </a:defRPr>
+                      </a:pPr>
+                      <a:r>
+                        <a:t>Exit P2</a:t>
+                      </a:r>
+                    </a:p>
+                  </a:txBody>
+                  <a:tcPr anchor="ctr">
+                    <a:solidFill>
+                      <a:srgbClr val="102545"/>
+                    </a:solidFill>
+                  </a:tcPr>
+                </a:tc>
+                <a:tc>
+                  <a:txBody>
+                    <a:bodyPr/>
+                    <a:lstStyle/>
+                    <a:p>
+                      <a:pPr>
+                        <a:defRPr sz="1400" b="1">
+                          <a:solidFill>
+                            <a:srgbClr val="FFFFFF"/>
+                          </a:solidFill>
+                        </a:defRPr>
+                      </a:pPr>
+                      <a:r>
+                        <a:t>Tugas 1</a:t>
+                      </a:r>
+                    </a:p>
+                  </a:txBody>
+                  <a:tcPr anchor="ctr">
+                    <a:solidFill>
+                      <a:srgbClr val="102545"/>
+                    </a:solidFill>
+                  </a:tcPr>
+                </a:tc>
+              </a:tr>
+              <a:tr h="380722">
+                <a:tc>
+                  <a:txBody>
+                    <a:bodyPr/>
+                    <a:lstStyle/>
+                    <a:p>
+                      <a:pPr>
+                        <a:defRPr sz="1400" b="0">
+                          <a:solidFill>
+                            <a:srgbClr val="1A1F2B"/>
+                          </a:solidFill>
+                        </a:defRPr>
+                      </a:pPr>
+                      <a:r>
+                        <a:t>Dico Havianto</a:t>
+                      </a:r>
+                    </a:p>
+                  </a:txBody>
+                  <a:tcPr anchor="ctr">
+                    <a:solidFill>
+                      <a:srgbClr val="F5F7FA"/>
+                    </a:solidFill>
+                  </a:tcPr>
+                </a:tc>
+                <a:tc>
+                  <a:txBody>
+                    <a:bodyPr/>
+                    <a:lstStyle/>
+                    <a:p>
+                      <a:pPr>
+                        <a:defRPr sz="1400" b="1">
+                          <a:solidFill>
+                            <a:srgbClr val="102545"/>
+                          </a:solidFill>
+                        </a:defRPr>
+                      </a:pPr>
+                      <a:r>
+                        <a:t>90</a:t>
+                      </a:r>
+                    </a:p>
+                  </a:txBody>
+                  <a:tcPr anchor="ctr">
+                    <a:solidFill>
+                      <a:srgbClr val="F5F7FA"/>
+                    </a:solidFill>
+                  </a:tcPr>
+                </a:tc>
+                <a:tc>
+                  <a:txBody>
+                    <a:bodyPr/>
+                    <a:lstStyle/>
+                    <a:p>
+                      <a:pPr>
+                        <a:defRPr sz="1400" b="0">
+                          <a:solidFill>
+                            <a:srgbClr val="1A1F2B"/>
+                          </a:solidFill>
+                        </a:defRPr>
+                      </a:pPr>
+                      <a:r>
+                        <a:t>-</a:t>
+                      </a:r>
+                    </a:p>
+                  </a:txBody>
+                  <a:tcPr anchor="ctr">
+                    <a:solidFill>
+                      <a:srgbClr val="F5F7FA"/>
+                    </a:solidFill>
+                  </a:tcPr>
+                </a:tc>
+                <a:tc>
+                  <a:txBody>
+                    <a:bodyPr/>
+                    <a:lstStyle/>
+                    <a:p>
+                      <a:pPr>
+                        <a:defRPr sz="1400" b="1">
+                          <a:solidFill>
+                            <a:srgbClr val="102545"/>
+                          </a:solidFill>
+                        </a:defRPr>
+                      </a:pPr>
+                      <a:r>
+                        <a:t>90</a:t>
+                      </a:r>
+                    </a:p>
+                  </a:txBody>
+                  <a:tcPr anchor="ctr">
+                    <a:solidFill>
+                      <a:srgbClr val="F5F7FA"/>
+                    </a:solidFill>
+                  </a:tcPr>
+                </a:tc>
+              </a:tr>
+              <a:tr h="380722">
+                <a:tc>
+                  <a:txBody>
+                    <a:bodyPr/>
+                    <a:lstStyle/>
+                    <a:p>
+                      <a:pPr>
+                        <a:defRPr sz="1400" b="0">
+                          <a:solidFill>
+                            <a:srgbClr val="1A1F2B"/>
+                          </a:solidFill>
+                        </a:defRPr>
+                      </a:pPr>
+                      <a:r>
+                        <a:t>Deswiryawan Saragih</a:t>
+                      </a:r>
+                    </a:p>
+                  </a:txBody>
+                  <a:tcPr anchor="ctr">
+                    <a:solidFill>
+                      <a:srgbClr val="FFFFFF"/>
+                    </a:solidFill>
+                  </a:tcPr>
+                </a:tc>
+                <a:tc>
+                  <a:txBody>
+                    <a:bodyPr/>
+                    <a:lstStyle/>
+                    <a:p>
+                      <a:pPr>
+                        <a:defRPr sz="1400" b="1">
+                          <a:solidFill>
+                            <a:srgbClr val="102545"/>
+                          </a:solidFill>
+                        </a:defRPr>
+                      </a:pPr>
+                      <a:r>
+                        <a:t>88</a:t>
+                      </a:r>
+                    </a:p>
+                  </a:txBody>
+                  <a:tcPr anchor="ctr">
+                    <a:solidFill>
+                      <a:srgbClr val="FFFFFF"/>
+                    </a:solidFill>
+                  </a:tcPr>
+                </a:tc>
+                <a:tc>
+                  <a:txBody>
+                    <a:bodyPr/>
+                    <a:lstStyle/>
+                    <a:p>
+                      <a:pPr>
+                        <a:defRPr sz="1400" b="0">
+                          <a:solidFill>
+                            <a:srgbClr val="1A1F2B"/>
+                          </a:solidFill>
+                        </a:defRPr>
+                      </a:pPr>
+                      <a:r>
+                        <a:t>-</a:t>
+                      </a:r>
+                    </a:p>
+                  </a:txBody>
+                  <a:tcPr anchor="ctr">
+                    <a:solidFill>
+                      <a:srgbClr val="FFFFFF"/>
+                    </a:solidFill>
+                  </a:tcPr>
+                </a:tc>
+                <a:tc>
+                  <a:txBody>
+                    <a:bodyPr/>
+                    <a:lstStyle/>
+                    <a:p>
+                      <a:pPr>
+                        <a:defRPr sz="1400" b="1">
+                          <a:solidFill>
+                            <a:srgbClr val="102545"/>
+                          </a:solidFill>
+                        </a:defRPr>
+                      </a:pPr>
+                      <a:r>
+                        <a:t>78</a:t>
+                      </a:r>
+                    </a:p>
+                  </a:txBody>
+                  <a:tcPr anchor="ctr">
+                    <a:solidFill>
+                      <a:srgbClr val="FFFFFF"/>
+                    </a:solidFill>
+                  </a:tcPr>
+                </a:tc>
+              </a:tr>
+              <a:tr h="380722">
+                <a:tc>
+                  <a:txBody>
+                    <a:bodyPr/>
+                    <a:lstStyle/>
+                    <a:p>
+                      <a:pPr>
+                        <a:defRPr sz="1400" b="0">
+                          <a:solidFill>
+                            <a:srgbClr val="1A1F2B"/>
+                          </a:solidFill>
+                        </a:defRPr>
+                      </a:pPr>
+                      <a:r>
+                        <a:t>Farrel Adhipratama</a:t>
+                      </a:r>
+                    </a:p>
+                  </a:txBody>
+                  <a:tcPr anchor="ctr">
+                    <a:solidFill>
+                      <a:srgbClr val="F5F7FA"/>
+                    </a:solidFill>
+                  </a:tcPr>
+                </a:tc>
+                <a:tc>
+                  <a:txBody>
+                    <a:bodyPr/>
+                    <a:lstStyle/>
+                    <a:p>
+                      <a:pPr>
+                        <a:defRPr sz="1400" b="1">
+                          <a:solidFill>
+                            <a:srgbClr val="102545"/>
+                          </a:solidFill>
+                        </a:defRPr>
+                      </a:pPr>
+                      <a:r>
+                        <a:t>88</a:t>
+                      </a:r>
+                    </a:p>
+                  </a:txBody>
+                  <a:tcPr anchor="ctr">
+                    <a:solidFill>
+                      <a:srgbClr val="F5F7FA"/>
+                    </a:solidFill>
+                  </a:tcPr>
+                </a:tc>
+                <a:tc>
+                  <a:txBody>
+                    <a:bodyPr/>
+                    <a:lstStyle/>
+                    <a:p>
+                      <a:pPr>
+                        <a:defRPr sz="1400" b="0">
+                          <a:solidFill>
+                            <a:srgbClr val="1A1F2B"/>
+                          </a:solidFill>
+                        </a:defRPr>
+                      </a:pPr>
+                      <a:r>
+                        <a:t>-</a:t>
+                      </a:r>
+                    </a:p>
+                  </a:txBody>
+                  <a:tcPr anchor="ctr">
+                    <a:solidFill>
+                      <a:srgbClr val="F5F7FA"/>
+                    </a:solidFill>
+                  </a:tcPr>
+                </a:tc>
+                <a:tc>
+                  <a:txBody>
+                    <a:bodyPr/>
+                    <a:lstStyle/>
+                    <a:p>
+                      <a:pPr>
+                        <a:defRPr sz="1400" b="0">
+                          <a:solidFill>
+                            <a:srgbClr val="1A1F2B"/>
+                          </a:solidFill>
+                        </a:defRPr>
+                      </a:pPr>
+                      <a:r>
+                        <a:t>-</a:t>
+                      </a:r>
+                    </a:p>
+                  </a:txBody>
+                  <a:tcPr anchor="ctr">
+                    <a:solidFill>
+                      <a:srgbClr val="F5F7FA"/>
+                    </a:solidFill>
+                  </a:tcPr>
+                </a:tc>
+              </a:tr>
+              <a:tr h="380722">
+                <a:tc>
+                  <a:txBody>
+                    <a:bodyPr/>
+                    <a:lstStyle/>
+                    <a:p>
+                      <a:pPr>
+                        <a:defRPr sz="1400" b="0">
+                          <a:solidFill>
+                            <a:srgbClr val="1A1F2B"/>
+                          </a:solidFill>
+                        </a:defRPr>
+                      </a:pPr>
+                      <a:r>
+                        <a:t>Adinda Aprilia</a:t>
+                      </a:r>
+                    </a:p>
+                  </a:txBody>
+                  <a:tcPr anchor="ctr">
+                    <a:solidFill>
+                      <a:srgbClr val="FFFFFF"/>
+                    </a:solidFill>
+                  </a:tcPr>
+                </a:tc>
+                <a:tc>
+                  <a:txBody>
+                    <a:bodyPr/>
+                    <a:lstStyle/>
+                    <a:p>
+                      <a:pPr>
+                        <a:defRPr sz="1400" b="1">
+                          <a:solidFill>
+                            <a:srgbClr val="102545"/>
+                          </a:solidFill>
+                        </a:defRPr>
+                      </a:pPr>
+                      <a:r>
+                        <a:t>87</a:t>
+                      </a:r>
+                    </a:p>
+                  </a:txBody>
+                  <a:tcPr anchor="ctr">
+                    <a:solidFill>
+                      <a:srgbClr val="FFFFFF"/>
+                    </a:solidFill>
+                  </a:tcPr>
+                </a:tc>
+                <a:tc>
+                  <a:txBody>
+                    <a:bodyPr/>
+                    <a:lstStyle/>
+                    <a:p>
+                      <a:pPr>
+                        <a:defRPr sz="1400" b="0">
+                          <a:solidFill>
+                            <a:srgbClr val="1A1F2B"/>
+                          </a:solidFill>
+                        </a:defRPr>
+                      </a:pPr>
+                      <a:r>
+                        <a:t>-</a:t>
+                      </a:r>
+                    </a:p>
+                  </a:txBody>
+                  <a:tcPr anchor="ctr">
+                    <a:solidFill>
+                      <a:srgbClr val="FFFFFF"/>
+                    </a:solidFill>
+                  </a:tcPr>
+                </a:tc>
+                <a:tc>
+                  <a:txBody>
+                    <a:bodyPr/>
+                    <a:lstStyle/>
+                    <a:p>
+                      <a:pPr>
+                        <a:defRPr sz="1400" b="0">
+                          <a:solidFill>
+                            <a:srgbClr val="1A1F2B"/>
+                          </a:solidFill>
+                        </a:defRPr>
+                      </a:pPr>
+                      <a:r>
+                        <a:t>-</a:t>
+                      </a:r>
+                    </a:p>
+                  </a:txBody>
+                  <a:tcPr anchor="ctr">
+                    <a:solidFill>
+                      <a:srgbClr val="FFFFFF"/>
+                    </a:solidFill>
+                  </a:tcPr>
+                </a:tc>
+              </a:tr>
+              <a:tr h="380722">
+                <a:tc>
+                  <a:txBody>
+                    <a:bodyPr/>
+                    <a:lstStyle/>
+                    <a:p>
+                      <a:pPr>
+                        <a:defRPr sz="1400" b="0">
+                          <a:solidFill>
+                            <a:srgbClr val="1A1F2B"/>
+                          </a:solidFill>
+                        </a:defRPr>
+                      </a:pPr>
+                      <a:r>
+                        <a:t>Benedictus Kevin</a:t>
+                      </a:r>
+                    </a:p>
+                  </a:txBody>
+                  <a:tcPr anchor="ctr">
+                    <a:solidFill>
+                      <a:srgbClr val="F5F7FA"/>
+                    </a:solidFill>
+                  </a:tcPr>
+                </a:tc>
+                <a:tc>
+                  <a:txBody>
+                    <a:bodyPr/>
+                    <a:lstStyle/>
+                    <a:p>
+                      <a:pPr>
+                        <a:defRPr sz="1400" b="1">
+                          <a:solidFill>
+                            <a:srgbClr val="102545"/>
+                          </a:solidFill>
+                        </a:defRPr>
+                      </a:pPr>
+                      <a:r>
+                        <a:t>85</a:t>
+                      </a:r>
+                    </a:p>
+                  </a:txBody>
+                  <a:tcPr anchor="ctr">
+                    <a:solidFill>
+                      <a:srgbClr val="F5F7FA"/>
+                    </a:solidFill>
+                  </a:tcPr>
+                </a:tc>
+                <a:tc>
+                  <a:txBody>
+                    <a:bodyPr/>
+                    <a:lstStyle/>
+                    <a:p>
+                      <a:pPr>
+                        <a:defRPr sz="1400" b="0">
+                          <a:solidFill>
+                            <a:srgbClr val="1A1F2B"/>
+                          </a:solidFill>
+                        </a:defRPr>
+                      </a:pPr>
+                      <a:r>
+                        <a:t>-</a:t>
+                      </a:r>
+                    </a:p>
+                  </a:txBody>
+                  <a:tcPr anchor="ctr">
+                    <a:solidFill>
+                      <a:srgbClr val="F5F7FA"/>
+                    </a:solidFill>
+                  </a:tcPr>
+                </a:tc>
+                <a:tc>
+                  <a:txBody>
+                    <a:bodyPr/>
+                    <a:lstStyle/>
+                    <a:p>
+                      <a:pPr>
+                        <a:defRPr sz="1400" b="1">
+                          <a:solidFill>
+                            <a:srgbClr val="102545"/>
+                          </a:solidFill>
+                        </a:defRPr>
+                      </a:pPr>
+                      <a:r>
+                        <a:t>60</a:t>
+                      </a:r>
+                    </a:p>
+                  </a:txBody>
+                  <a:tcPr anchor="ctr">
+                    <a:solidFill>
+                      <a:srgbClr val="F5F7FA"/>
+                    </a:solidFill>
+                  </a:tcPr>
+                </a:tc>
+              </a:tr>
+              <a:tr h="380722">
+                <a:tc>
+                  <a:txBody>
+                    <a:bodyPr/>
+                    <a:lstStyle/>
+                    <a:p>
+                      <a:pPr>
+                        <a:defRPr sz="1400" b="0">
+                          <a:solidFill>
+                            <a:srgbClr val="1A1F2B"/>
+                          </a:solidFill>
+                        </a:defRPr>
+                      </a:pPr>
+                      <a:r>
+                        <a:t>Faiz Ramadhan</a:t>
+                      </a:r>
+                    </a:p>
+                  </a:txBody>
+                  <a:tcPr anchor="ctr">
+                    <a:solidFill>
+                      <a:srgbClr val="FFFFFF"/>
+                    </a:solidFill>
+                  </a:tcPr>
+                </a:tc>
+                <a:tc>
+                  <a:txBody>
+                    <a:bodyPr/>
+                    <a:lstStyle/>
+                    <a:p>
+                      <a:pPr>
+                        <a:defRPr sz="1400" b="1">
+                          <a:solidFill>
+                            <a:srgbClr val="102545"/>
+                          </a:solidFill>
+                        </a:defRPr>
+                      </a:pPr>
+                      <a:r>
+                        <a:t>84</a:t>
+                      </a:r>
+                    </a:p>
+                  </a:txBody>
+                  <a:tcPr anchor="ctr">
+                    <a:solidFill>
+                      <a:srgbClr val="FFFFFF"/>
+                    </a:solidFill>
+                  </a:tcPr>
+                </a:tc>
+                <a:tc>
+                  <a:txBody>
+                    <a:bodyPr/>
+                    <a:lstStyle/>
+                    <a:p>
+                      <a:pPr>
+                        <a:defRPr sz="1400" b="0">
+                          <a:solidFill>
+                            <a:srgbClr val="1A1F2B"/>
+                          </a:solidFill>
+                        </a:defRPr>
+                      </a:pPr>
+                      <a:r>
+                        <a:t>-</a:t>
+                      </a:r>
+                    </a:p>
+                  </a:txBody>
+                  <a:tcPr anchor="ctr">
+                    <a:solidFill>
+                      <a:srgbClr val="FFFFFF"/>
+                    </a:solidFill>
+                  </a:tcPr>
+                </a:tc>
+                <a:tc>
+                  <a:txBody>
+                    <a:bodyPr/>
+                    <a:lstStyle/>
+                    <a:p>
+                      <a:pPr>
+                        <a:defRPr sz="1400" b="1">
+                          <a:solidFill>
+                            <a:srgbClr val="102545"/>
+                          </a:solidFill>
+                        </a:defRPr>
+                      </a:pPr>
+                      <a:r>
+                        <a:t>72</a:t>
+                      </a:r>
+                    </a:p>
+                  </a:txBody>
+                  <a:tcPr anchor="ctr">
+                    <a:solidFill>
+                      <a:srgbClr val="FFFFFF"/>
+                    </a:solidFill>
+                  </a:tcPr>
+                </a:tc>
+              </a:tr>
+              <a:tr h="380722">
+                <a:tc>
+                  <a:txBody>
+                    <a:bodyPr/>
+                    <a:lstStyle/>
+                    <a:p>
+                      <a:pPr>
+                        <a:defRPr sz="1400" b="0">
+                          <a:solidFill>
+                            <a:srgbClr val="1A1F2B"/>
+                          </a:solidFill>
+                        </a:defRPr>
+                      </a:pPr>
+                      <a:r>
+                        <a:t>Fattih Kuwaka</a:t>
+                      </a:r>
+                    </a:p>
+                  </a:txBody>
+                  <a:tcPr anchor="ctr">
+                    <a:solidFill>
+                      <a:srgbClr val="F5F7FA"/>
+                    </a:solidFill>
+                  </a:tcPr>
+                </a:tc>
+                <a:tc>
+                  <a:txBody>
+                    <a:bodyPr/>
+                    <a:lstStyle/>
+                    <a:p>
+                      <a:pPr>
+                        <a:defRPr sz="1400" b="1">
+                          <a:solidFill>
+                            <a:srgbClr val="102545"/>
+                          </a:solidFill>
+                        </a:defRPr>
+                      </a:pPr>
+                      <a:r>
+                        <a:t>83</a:t>
+                      </a:r>
+                    </a:p>
+                  </a:txBody>
+                  <a:tcPr anchor="ctr">
+                    <a:solidFill>
+                      <a:srgbClr val="F5F7FA"/>
+                    </a:solidFill>
+                  </a:tcPr>
+                </a:tc>
+                <a:tc>
+                  <a:txBody>
+                    <a:bodyPr/>
+                    <a:lstStyle/>
+                    <a:p>
+                      <a:pPr>
+                        <a:defRPr sz="1400" b="0">
+                          <a:solidFill>
+                            <a:srgbClr val="1A1F2B"/>
+                          </a:solidFill>
+                        </a:defRPr>
+                      </a:pPr>
+                      <a:r>
+                        <a:t>-</a:t>
+                      </a:r>
+                    </a:p>
+                  </a:txBody>
+                  <a:tcPr anchor="ctr">
+                    <a:solidFill>
+                      <a:srgbClr val="F5F7FA"/>
+                    </a:solidFill>
+                  </a:tcPr>
+                </a:tc>
+                <a:tc>
+                  <a:txBody>
+                    <a:bodyPr/>
+                    <a:lstStyle/>
+                    <a:p>
+                      <a:pPr>
+                        <a:defRPr sz="1400" b="0">
+                          <a:solidFill>
+                            <a:srgbClr val="1A1F2B"/>
+                          </a:solidFill>
+                        </a:defRPr>
+                      </a:pPr>
+                      <a:r>
+                        <a:t>-</a:t>
+                      </a:r>
+                    </a:p>
+                  </a:txBody>
+                  <a:tcPr anchor="ctr">
+                    <a:solidFill>
+                      <a:srgbClr val="F5F7FA"/>
+                    </a:solidFill>
+                  </a:tcPr>
+                </a:tc>
+              </a:tr>
+              <a:tr h="380722">
+                <a:tc>
+                  <a:txBody>
+                    <a:bodyPr/>
+                    <a:lstStyle/>
+                    <a:p>
+                      <a:pPr>
+                        <a:defRPr sz="1400" b="0">
+                          <a:solidFill>
+                            <a:srgbClr val="1A1F2B"/>
+                          </a:solidFill>
+                        </a:defRPr>
+                      </a:pPr>
+                      <a:r>
+                        <a:t>Norbertus Bimantya</a:t>
+                      </a:r>
+                    </a:p>
+                  </a:txBody>
+                  <a:tcPr anchor="ctr">
+                    <a:solidFill>
+                      <a:srgbClr val="FFFFFF"/>
+                    </a:solidFill>
+                  </a:tcPr>
+                </a:tc>
+                <a:tc>
+                  <a:txBody>
+                    <a:bodyPr/>
+                    <a:lstStyle/>
+                    <a:p>
+                      <a:pPr>
+                        <a:defRPr sz="1400" b="1">
+                          <a:solidFill>
+                            <a:srgbClr val="102545"/>
+                          </a:solidFill>
+                        </a:defRPr>
+                      </a:pPr>
+                      <a:r>
+                        <a:t>82</a:t>
+                      </a:r>
+                    </a:p>
+                  </a:txBody>
+                  <a:tcPr anchor="ctr">
+                    <a:solidFill>
+                      <a:srgbClr val="FFFFFF"/>
+                    </a:solidFill>
+                  </a:tcPr>
+                </a:tc>
+                <a:tc>
+                  <a:txBody>
+                    <a:bodyPr/>
+                    <a:lstStyle/>
+                    <a:p>
+                      <a:pPr>
+                        <a:defRPr sz="1400" b="0">
+                          <a:solidFill>
+                            <a:srgbClr val="1A1F2B"/>
+                          </a:solidFill>
+                        </a:defRPr>
+                      </a:pPr>
+                      <a:r>
+                        <a:t>-</a:t>
+                      </a:r>
+                    </a:p>
+                  </a:txBody>
+                  <a:tcPr anchor="ctr">
+                    <a:solidFill>
+                      <a:srgbClr val="FFFFFF"/>
+                    </a:solidFill>
+                  </a:tcPr>
+                </a:tc>
+                <a:tc>
+                  <a:txBody>
+                    <a:bodyPr/>
+                    <a:lstStyle/>
+                    <a:p>
+                      <a:pPr>
+                        <a:defRPr sz="1400" b="1">
+                          <a:solidFill>
+                            <a:srgbClr val="102545"/>
+                          </a:solidFill>
+                        </a:defRPr>
+                      </a:pPr>
+                      <a:r>
+                        <a:t>62</a:t>
+                      </a:r>
+                    </a:p>
+                  </a:txBody>
+                  <a:tcPr anchor="ctr">
+                    <a:solidFill>
+                      <a:srgbClr val="FFFFFF"/>
+                    </a:solidFill>
+                  </a:tcPr>
+                </a:tc>
+              </a:tr>
+              <a:tr h="380722">
+                <a:tc>
+                  <a:txBody>
+                    <a:bodyPr/>
+                    <a:lstStyle/>
+                    <a:p>
+                      <a:pPr>
+                        <a:defRPr sz="1400" b="0">
+                          <a:solidFill>
+                            <a:srgbClr val="1A1F2B"/>
+                          </a:solidFill>
+                        </a:defRPr>
+                      </a:pPr>
+                      <a:r>
+                        <a:t>Hendy Utomo</a:t>
+                      </a:r>
+                    </a:p>
+                  </a:txBody>
+                  <a:tcPr anchor="ctr">
+                    <a:solidFill>
+                      <a:srgbClr val="F5F7FA"/>
+                    </a:solidFill>
+                  </a:tcPr>
+                </a:tc>
+                <a:tc>
+                  <a:txBody>
+                    <a:bodyPr/>
+                    <a:lstStyle/>
+                    <a:p>
+                      <a:pPr>
+                        <a:defRPr sz="1400" b="1">
+                          <a:solidFill>
+                            <a:srgbClr val="102545"/>
+                          </a:solidFill>
+                        </a:defRPr>
+                      </a:pPr>
+                      <a:r>
+                        <a:t>80</a:t>
+                      </a:r>
+                    </a:p>
+                  </a:txBody>
+                  <a:tcPr anchor="ctr">
+                    <a:solidFill>
+                      <a:srgbClr val="F5F7FA"/>
+                    </a:solidFill>
+                  </a:tcPr>
+                </a:tc>
+                <a:tc>
+                  <a:txBody>
+                    <a:bodyPr/>
+                    <a:lstStyle/>
+                    <a:p>
+                      <a:pPr>
+                        <a:defRPr sz="1400" b="0">
+                          <a:solidFill>
+                            <a:srgbClr val="1A1F2B"/>
+                          </a:solidFill>
+                        </a:defRPr>
+                      </a:pPr>
+                      <a:r>
+                        <a:t>-</a:t>
+                      </a:r>
+                    </a:p>
+                  </a:txBody>
+                  <a:tcPr anchor="ctr">
+                    <a:solidFill>
+                      <a:srgbClr val="F5F7FA"/>
+                    </a:solidFill>
+                  </a:tcPr>
+                </a:tc>
+                <a:tc>
+                  <a:txBody>
+                    <a:bodyPr/>
+                    <a:lstStyle/>
+                    <a:p>
+                      <a:pPr>
+                        <a:defRPr sz="1400" b="0">
+                          <a:solidFill>
+                            <a:srgbClr val="1A1F2B"/>
+                          </a:solidFill>
+                        </a:defRPr>
+                      </a:pPr>
+                      <a:r>
+                        <a:t>-</a:t>
+                      </a:r>
+                    </a:p>
+                  </a:txBody>
+                  <a:tcPr anchor="ctr">
+                    <a:solidFill>
+                      <a:srgbClr val="F5F7FA"/>
+                    </a:solidFill>
+                  </a:tcPr>
+                </a:tc>
+              </a:tr>
+              <a:tr h="380732">
+                <a:tc>
+                  <a:txBody>
+                    <a:bodyPr/>
+                    <a:lstStyle/>
+                    <a:p>
+                      <a:pPr>
+                        <a:defRPr sz="1400" b="0">
+                          <a:solidFill>
+                            <a:srgbClr val="1A1F2B"/>
+                          </a:solidFill>
+                        </a:defRPr>
+                      </a:pPr>
+                      <a:r>
+                        <a:t>Much. Nashrulloh</a:t>
+                      </a:r>
+                    </a:p>
+                  </a:txBody>
+                  <a:tcPr anchor="ctr">
+                    <a:solidFill>
+                      <a:srgbClr val="FFFFFF"/>
+                    </a:solidFill>
+                  </a:tcPr>
+                </a:tc>
+                <a:tc>
+                  <a:txBody>
+                    <a:bodyPr/>
+                    <a:lstStyle/>
+                    <a:p>
+                      <a:pPr>
+                        <a:defRPr sz="1400" b="0">
+                          <a:solidFill>
+                            <a:srgbClr val="1A1F2B"/>
+                          </a:solidFill>
+                        </a:defRPr>
+                      </a:pPr>
+                      <a:r>
+                        <a:t>-</a:t>
+                      </a:r>
+                    </a:p>
+                  </a:txBody>
+                  <a:tcPr anchor="ctr">
+                    <a:solidFill>
+                      <a:srgbClr val="FFFFFF"/>
+                    </a:solidFill>
+                  </a:tcPr>
+                </a:tc>
+                <a:tc>
+                  <a:txBody>
+                    <a:bodyPr/>
+                    <a:lstStyle/>
+                    <a:p>
+                      <a:pPr>
+                        <a:defRPr sz="1400" b="0">
+                          <a:solidFill>
+                            <a:srgbClr val="1A1F2B"/>
+                          </a:solidFill>
+                        </a:defRPr>
+                      </a:pPr>
+                      <a:r>
+                        <a:t>-</a:t>
+                      </a:r>
+                    </a:p>
+                  </a:txBody>
+                  <a:tcPr anchor="ctr">
+                    <a:solidFill>
+                      <a:srgbClr val="FFFFFF"/>
+                    </a:solidFill>
+                  </a:tcPr>
+                </a:tc>
+                <a:tc>
+                  <a:txBody>
+                    <a:bodyPr/>
+                    <a:lstStyle/>
+                    <a:p>
+                      <a:pPr>
+                        <a:defRPr sz="1400" b="1">
+                          <a:solidFill>
+                            <a:srgbClr val="102545"/>
+                          </a:solidFill>
+                        </a:defRPr>
+                      </a:pPr>
+                      <a:r>
+                        <a:t>80</a:t>
+                      </a:r>
+                    </a:p>
+                  </a:txBody>
+                  <a:tcPr anchor="ctr">
+                    <a:solidFill>
+                      <a:srgbClr val="FFFFFF"/>
+                    </a:solidFill>
+                  </a:tcPr>
+                </a:tc>
+              </a:tr>
+            </a:tbl>
+          </a:graphicData>
+        </a:graphic>
+      </p:graphicFrame>
     </p:spTree>
   </p:cSld>
   <p:clrMapOvr>
@@ -13675,6 +14810,50 @@
             <a:avLst/>
           </a:prstGeom>
           <a:solidFill>
+            <a:srgbClr val="FFFFFF"/>
+          </a:solidFill>
+          <a:ln>
+            <a:noFill/>
+          </a:ln>
+          <a:effectLst/>
+        </p:spPr>
+        <p:style>
+          <a:lnRef idx="1">
+            <a:schemeClr val="accent1"/>
+          </a:lnRef>
+          <a:fillRef idx="3">
+            <a:schemeClr val="accent1"/>
+          </a:fillRef>
+          <a:effectRef idx="2">
+            <a:schemeClr val="accent1"/>
+          </a:effectRef>
+          <a:fontRef idx="minor">
+            <a:schemeClr val="lt1"/>
+          </a:fontRef>
+        </p:style>
+        <p:txBody>
+          <a:bodyPr rtlCol="0" anchor="ctr"/>
+          <a:lstStyle/>
+          <a:p>
+            <a:pPr algn="ctr"/>
+          </a:p>
+        </p:txBody>
+      </p:sp>
+      <p:sp>
+        <p:nvSpPr>
+          <p:cNvPr id="3" name="Rectangle 2"/>
+          <p:cNvSpPr/>
+          <p:nvPr/>
+        </p:nvSpPr>
+        <p:spPr>
+          <a:xfrm>
+            <a:off x="0" y="0"/>
+            <a:ext cx="12191695" cy="128016"/>
+          </a:xfrm>
+          <a:prstGeom prst="rect">
+            <a:avLst/>
+          </a:prstGeom>
+          <a:solidFill>
             <a:srgbClr val="102545"/>
           </a:solidFill>
           <a:ln>
@@ -13706,58 +14885,14 @@
       </p:sp>
       <p:sp>
         <p:nvSpPr>
-          <p:cNvPr id="3" name="Rectangle 2"/>
-          <p:cNvSpPr/>
-          <p:nvPr/>
-        </p:nvSpPr>
-        <p:spPr>
-          <a:xfrm>
-            <a:off x="1005840" y="2788920"/>
-            <a:ext cx="1463040" cy="91440"/>
-          </a:xfrm>
-          <a:prstGeom prst="rect">
-            <a:avLst/>
-          </a:prstGeom>
-          <a:solidFill>
-            <a:srgbClr val="E6A023"/>
-          </a:solidFill>
-          <a:ln>
-            <a:noFill/>
-          </a:ln>
-          <a:effectLst/>
-        </p:spPr>
-        <p:style>
-          <a:lnRef idx="1">
-            <a:schemeClr val="accent1"/>
-          </a:lnRef>
-          <a:fillRef idx="3">
-            <a:schemeClr val="accent1"/>
-          </a:fillRef>
-          <a:effectRef idx="2">
-            <a:schemeClr val="accent1"/>
-          </a:effectRef>
-          <a:fontRef idx="minor">
-            <a:schemeClr val="lt1"/>
-          </a:fontRef>
-        </p:style>
-        <p:txBody>
-          <a:bodyPr rtlCol="0" anchor="ctr"/>
-          <a:lstStyle/>
-          <a:p>
-            <a:pPr algn="ctr"/>
-          </a:p>
-        </p:txBody>
-      </p:sp>
-      <p:sp>
-        <p:nvSpPr>
           <p:cNvPr id="4" name="TextBox 3"/>
           <p:cNvSpPr txBox="1"/>
           <p:nvPr/>
         </p:nvSpPr>
         <p:spPr>
           <a:xfrm>
-            <a:off x="1005840" y="2011680"/>
-            <a:ext cx="10241280" cy="731520"/>
+            <a:off x="777240" y="411480"/>
+            <a:ext cx="10789920" cy="914400"/>
           </a:xfrm>
           <a:prstGeom prst="rect">
             <a:avLst/>
@@ -13771,14 +14906,14 @@
           <a:lstStyle/>
           <a:p>
             <a:pPr>
-              <a:defRPr sz="2000" b="1">
-                <a:solidFill>
-                  <a:srgbClr val="E6A023"/>
+              <a:defRPr sz="3400" b="1">
+                <a:solidFill>
+                  <a:srgbClr val="102545"/>
                 </a:solidFill>
               </a:defRPr>
             </a:pPr>
             <a:r>
-              <a:t>HOOK</a:t>
+              <a:t>Alur 150 menit hari ini</a:t>
             </a:r>
           </a:p>
         </p:txBody>
@@ -13791,8 +14926,8 @@
         </p:nvSpPr>
         <p:spPr>
           <a:xfrm>
-            <a:off x="1005840" y="3063240"/>
-            <a:ext cx="10241280" cy="1965960"/>
+            <a:off x="777240" y="1234440"/>
+            <a:ext cx="10789920" cy="548640"/>
           </a:xfrm>
           <a:prstGeom prst="rect">
             <a:avLst/>
@@ -13806,18 +14941,14 @@
           <a:lstStyle/>
           <a:p>
             <a:pPr>
-              <a:defRPr sz="4400" b="1">
-                <a:solidFill>
-                  <a:srgbClr val="FFFFFF"/>
+              <a:defRPr sz="1900" i="1">
+                <a:solidFill>
+                  <a:srgbClr val="5A6372"/>
                 </a:solidFill>
               </a:defRPr>
             </a:pPr>
             <a:r>
-              <a:t>Bahasa rahasia</a:t>
-            </a:r>
-            <a:br/>
-            <a:r>
-              <a:t>data</a:t>
+              <a:t>Angka = menit. Modul mandiri versinya 3-4 jam; hari ini kita kerjakan inti yang paling mudah salah kalau dikerjakan sendirian.</a:t>
             </a:r>
           </a:p>
         </p:txBody>
@@ -13830,8 +14961,8 @@
         </p:nvSpPr>
         <p:spPr>
           <a:xfrm>
-            <a:off x="1005840" y="4956048"/>
-            <a:ext cx="10241280" cy="914400"/>
+            <a:off x="777240" y="1874519"/>
+            <a:ext cx="10789920" cy="4480560"/>
           </a:xfrm>
           <a:prstGeom prst="rect">
             <a:avLst/>
@@ -13845,14 +14976,188 @@
           <a:lstStyle/>
           <a:p>
             <a:pPr>
-              <a:defRPr sz="2200">
-                <a:solidFill>
-                  <a:srgbClr val="C8D4E6"/>
-                </a:solidFill>
-              </a:defRPr>
+              <a:spcBef>
+                <a:spcPts val="1100"/>
+              </a:spcBef>
             </a:pPr>
             <a:r>
-              <a:t>Judul video pembuka di Drive - dan pertanyaan yang belum terjawab sejak Pertemuan 2</a:t>
+              <a:rPr sz="2200">
+                <a:solidFill>
+                  <a:srgbClr val="1A1F2B"/>
+                </a:solidFill>
+              </a:rPr>
+              <a:t>•  </a:t>
+            </a:r>
+            <a:r>
+              <a:rPr sz="2200" b="1">
+                <a:solidFill>
+                  <a:srgbClr val="102545"/>
+                </a:solidFill>
+              </a:rPr>
+              <a:t>Hook</a:t>
+            </a:r>
+            <a:r>
+              <a:rPr sz="2200">
+                <a:solidFill>
+                  <a:srgbClr val="1A1F2B"/>
+                </a:solidFill>
+              </a:rPr>
+              <a:t> - satu kolom kategori, tiga cara menyandikan, tiga hasil berbeda · 10'</a:t>
+            </a:r>
+          </a:p>
+          <a:p>
+            <a:pPr>
+              <a:spcBef>
+                <a:spcPts val="1100"/>
+              </a:spcBef>
+            </a:pPr>
+            <a:r>
+              <a:rPr sz="2200">
+                <a:solidFill>
+                  <a:srgbClr val="1A1F2B"/>
+                </a:solidFill>
+              </a:rPr>
+              <a:t>•  </a:t>
+            </a:r>
+            <a:r>
+              <a:rPr sz="2200" b="1">
+                <a:solidFill>
+                  <a:srgbClr val="102545"/>
+                </a:solidFill>
+              </a:rPr>
+              <a:t>Mini-lecture</a:t>
+            </a:r>
+            <a:r>
+              <a:rPr sz="2200">
+                <a:solidFill>
+                  <a:srgbClr val="1A1F2B"/>
+                </a:solidFill>
+              </a:rPr>
+              <a:t> - One-Hot vs Ordinal, kategori langka, dan bahaya target encoding · 30'</a:t>
+            </a:r>
+          </a:p>
+          <a:p>
+            <a:pPr>
+              <a:spcBef>
+                <a:spcPts val="1100"/>
+              </a:spcBef>
+            </a:pPr>
+            <a:r>
+              <a:rPr sz="2200">
+                <a:solidFill>
+                  <a:srgbClr val="1A1F2B"/>
+                </a:solidFill>
+              </a:rPr>
+              <a:t>•  </a:t>
+            </a:r>
+            <a:r>
+              <a:rPr sz="2200" b="1">
+                <a:solidFill>
+                  <a:srgbClr val="102545"/>
+                </a:solidFill>
+              </a:rPr>
+              <a:t>Praktikum 1</a:t>
+            </a:r>
+            <a:r>
+              <a:rPr sz="2200">
+                <a:solidFill>
+                  <a:srgbClr val="1A1F2B"/>
+                </a:solidFill>
+              </a:rPr>
+              <a:t> - encoding di dalam Pipeline/ColumnTransformer (anti-leakage) · 35'</a:t>
+            </a:r>
+          </a:p>
+          <a:p>
+            <a:pPr>
+              <a:spcBef>
+                <a:spcPts val="1100"/>
+              </a:spcBef>
+            </a:pPr>
+            <a:r>
+              <a:rPr sz="2200">
+                <a:solidFill>
+                  <a:srgbClr val="1A1F2B"/>
+                </a:solidFill>
+              </a:rPr>
+              <a:t>•  </a:t>
+            </a:r>
+            <a:r>
+              <a:rPr sz="2200" b="1">
+                <a:solidFill>
+                  <a:srgbClr val="102545"/>
+                </a:solidFill>
+              </a:rPr>
+              <a:t>Praktikum 2</a:t>
+            </a:r>
+            <a:r>
+              <a:rPr sz="2200">
+                <a:solidFill>
+                  <a:srgbClr val="1A1F2B"/>
+                </a:solidFill>
+              </a:rPr>
+              <a:t> - Feature Thinking: bikin fitur turunan lewat custom transformer · 40'</a:t>
+            </a:r>
+          </a:p>
+          <a:p>
+            <a:pPr>
+              <a:spcBef>
+                <a:spcPts val="1100"/>
+              </a:spcBef>
+            </a:pPr>
+            <a:r>
+              <a:rPr sz="2200">
+                <a:solidFill>
+                  <a:srgbClr val="1A1F2B"/>
+                </a:solidFill>
+              </a:rPr>
+              <a:t>•  </a:t>
+            </a:r>
+            <a:r>
+              <a:rPr sz="2200" b="1">
+                <a:solidFill>
+                  <a:srgbClr val="102545"/>
+                </a:solidFill>
+              </a:rPr>
+              <a:t>Ablation</a:t>
+            </a:r>
+            <a:r>
+              <a:rPr sz="2200">
+                <a:solidFill>
+                  <a:srgbClr val="1A1F2B"/>
+                </a:solidFill>
+              </a:rPr>
+              <a:t> - tanpa fitur baru vs dengan fitur baru, baca tabelnya · 25'</a:t>
+            </a:r>
+          </a:p>
+          <a:p>
+            <a:pPr>
+              <a:spcBef>
+                <a:spcPts val="1100"/>
+              </a:spcBef>
+            </a:pPr>
+            <a:r>
+              <a:rPr sz="2200">
+                <a:solidFill>
+                  <a:srgbClr val="1A1F2B"/>
+                </a:solidFill>
+              </a:rPr>
+              <a:t>•  </a:t>
+            </a:r>
+            <a:r>
+              <a:rPr sz="2200" b="1">
+                <a:solidFill>
+                  <a:srgbClr val="102545"/>
+                </a:solidFill>
+              </a:rPr>
+              <a:t>Rangkuman</a:t>
+            </a:r>
+            <a:r>
+              <a:rPr sz="2200">
+                <a:solidFill>
+                  <a:srgbClr val="1A1F2B"/>
+                </a:solidFill>
+              </a:rPr>
+              <a:t> + penugasan + exit-ticket · 10'</a:t>
             </a:r>
           </a:p>
         </p:txBody>
@@ -13890,7 +15195,7 @@
             <a:avLst/>
           </a:prstGeom>
           <a:solidFill>
-            <a:srgbClr val="F5F7FA"/>
+            <a:srgbClr val="102545"/>
           </a:solidFill>
           <a:ln>
             <a:noFill/>
@@ -13927,8 +15232,8 @@
         </p:nvSpPr>
         <p:spPr>
           <a:xfrm>
-            <a:off x="777240" y="2240280"/>
-            <a:ext cx="128016" cy="2011680"/>
+            <a:off x="1005840" y="2788920"/>
+            <a:ext cx="1463040" cy="91440"/>
           </a:xfrm>
           <a:prstGeom prst="rect">
             <a:avLst/>
@@ -13971,8 +15276,8 @@
         </p:nvSpPr>
         <p:spPr>
           <a:xfrm>
-            <a:off x="1234440" y="2148840"/>
-            <a:ext cx="9966960" cy="2103120"/>
+            <a:off x="1005840" y="2011680"/>
+            <a:ext cx="10241280" cy="731520"/>
           </a:xfrm>
           <a:prstGeom prst="rect">
             <a:avLst/>
@@ -13986,18 +15291,14 @@
           <a:lstStyle/>
           <a:p>
             <a:pPr>
-              <a:defRPr sz="3800" b="1">
-                <a:solidFill>
-                  <a:srgbClr val="102545"/>
+              <a:defRPr sz="2000" b="1">
+                <a:solidFill>
+                  <a:srgbClr val="E6A023"/>
                 </a:solidFill>
               </a:defRPr>
             </a:pPr>
             <a:r>
-              <a:t>Model tidak bisa membaca</a:t>
-            </a:r>
-            <a:br/>
-            <a:r>
-              <a:t>"male", "female", "Cherbourg".</a:t>
+              <a:t>HOOK</a:t>
             </a:r>
           </a:p>
         </p:txBody>
@@ -14010,8 +15311,8 @@
         </p:nvSpPr>
         <p:spPr>
           <a:xfrm>
-            <a:off x="1234440" y="4434840"/>
-            <a:ext cx="9966960" cy="1371600"/>
+            <a:off x="1005840" y="3063240"/>
+            <a:ext cx="10241280" cy="1965960"/>
           </a:xfrm>
           <a:prstGeom prst="rect">
             <a:avLst/>
@@ -14025,14 +15326,53 @@
           <a:lstStyle/>
           <a:p>
             <a:pPr>
-              <a:defRPr sz="2100">
-                <a:solidFill>
-                  <a:srgbClr val="5A6372"/>
+              <a:defRPr sz="4400" b="1">
+                <a:solidFill>
+                  <a:srgbClr val="FFFFFF"/>
                 </a:solidFill>
               </a:defRPr>
             </a:pPr>
             <a:r>
-              <a:t>Di Pertemuan 2 kita sudah rapikan nilai hilang dan skala. Tapi seluruh kolom kategori masih kita hindari. Hari ini kita hadapi - dan kita akan lihat bahwa CARA menyandikannya mengubah performa model, kadang lebih besar daripada mengganti modelnya.</a:t>
+              <a:t>Bahasa rahasia</a:t>
+            </a:r>
+            <a:br/>
+            <a:r>
+              <a:t>data</a:t>
+            </a:r>
+          </a:p>
+        </p:txBody>
+      </p:sp>
+      <p:sp>
+        <p:nvSpPr>
+          <p:cNvPr id="6" name="TextBox 5"/>
+          <p:cNvSpPr txBox="1"/>
+          <p:nvPr/>
+        </p:nvSpPr>
+        <p:spPr>
+          <a:xfrm>
+            <a:off x="1005840" y="4956048"/>
+            <a:ext cx="10241280" cy="914400"/>
+          </a:xfrm>
+          <a:prstGeom prst="rect">
+            <a:avLst/>
+          </a:prstGeom>
+          <a:noFill/>
+        </p:spPr>
+        <p:txBody>
+          <a:bodyPr wrap="square">
+            <a:spAutoFit/>
+          </a:bodyPr>
+          <a:lstStyle/>
+          <a:p>
+            <a:pPr>
+              <a:defRPr sz="2200">
+                <a:solidFill>
+                  <a:srgbClr val="C8D4E6"/>
+                </a:solidFill>
+              </a:defRPr>
+            </a:pPr>
+            <a:r>
+              <a:t>Judul video pembuka di Drive - dan pertanyaan yang belum terjawab sejak Pertemuan 2</a:t>
             </a:r>
           </a:p>
         </p:txBody>
@@ -14070,7 +15410,7 @@
             <a:avLst/>
           </a:prstGeom>
           <a:solidFill>
-            <a:srgbClr val="FFFFFF"/>
+            <a:srgbClr val="F5F7FA"/>
           </a:solidFill>
           <a:ln>
             <a:noFill/>
@@ -14107,14 +15447,14 @@
         </p:nvSpPr>
         <p:spPr>
           <a:xfrm>
-            <a:off x="0" y="0"/>
-            <a:ext cx="12191695" cy="128016"/>
+            <a:off x="777240" y="2240280"/>
+            <a:ext cx="128016" cy="2011680"/>
           </a:xfrm>
           <a:prstGeom prst="rect">
             <a:avLst/>
           </a:prstGeom>
           <a:solidFill>
-            <a:srgbClr val="102545"/>
+            <a:srgbClr val="E6A023"/>
           </a:solidFill>
           <a:ln>
             <a:noFill/>
@@ -14151,8 +15491,8 @@
         </p:nvSpPr>
         <p:spPr>
           <a:xfrm>
-            <a:off x="777240" y="411480"/>
-            <a:ext cx="10789920" cy="914400"/>
+            <a:off x="1234440" y="2148840"/>
+            <a:ext cx="9966960" cy="2103120"/>
           </a:xfrm>
           <a:prstGeom prst="rect">
             <a:avLst/>
@@ -14166,14 +15506,18 @@
           <a:lstStyle/>
           <a:p>
             <a:pPr>
-              <a:defRPr sz="3400" b="1">
+              <a:defRPr sz="3800" b="1">
                 <a:solidFill>
                   <a:srgbClr val="102545"/>
                 </a:solidFill>
               </a:defRPr>
             </a:pPr>
             <a:r>
-              <a:t>Capaian pertemuan ini (5 tujuan modul mandiri P3)</a:t>
+              <a:t>Model tidak bisa membaca</a:t>
+            </a:r>
+            <a:br/>
+            <a:r>
+              <a:t>"male", "female", "Cherbourg".</a:t>
             </a:r>
           </a:p>
         </p:txBody>
@@ -14186,8 +15530,8 @@
         </p:nvSpPr>
         <p:spPr>
           <a:xfrm>
-            <a:off x="777240" y="1234440"/>
-            <a:ext cx="10789920" cy="548640"/>
+            <a:off x="1234440" y="4434840"/>
+            <a:ext cx="9966960" cy="1371600"/>
           </a:xfrm>
           <a:prstGeom prst="rect">
             <a:avLst/>
@@ -14201,200 +15545,14 @@
           <a:lstStyle/>
           <a:p>
             <a:pPr>
-              <a:defRPr sz="1900" i="1">
+              <a:defRPr sz="2100">
                 <a:solidFill>
                   <a:srgbClr val="5A6372"/>
                 </a:solidFill>
               </a:defRPr>
             </a:pPr>
             <a:r>
-              <a:t>Kelimanya dinilai di rubrik 100 poin: encoding 25 · feature engineering 25 · evaluasi &amp; ablation 25 · analisis 15 · reproducibility 10.</a:t>
-            </a:r>
-          </a:p>
-        </p:txBody>
-      </p:sp>
-      <p:sp>
-        <p:nvSpPr>
-          <p:cNvPr id="6" name="TextBox 5"/>
-          <p:cNvSpPr txBox="1"/>
-          <p:nvPr/>
-        </p:nvSpPr>
-        <p:spPr>
-          <a:xfrm>
-            <a:off x="777240" y="1874519"/>
-            <a:ext cx="10789920" cy="4480560"/>
-          </a:xfrm>
-          <a:prstGeom prst="rect">
-            <a:avLst/>
-          </a:prstGeom>
-          <a:noFill/>
-        </p:spPr>
-        <p:txBody>
-          <a:bodyPr wrap="square">
-            <a:spAutoFit/>
-          </a:bodyPr>
-          <a:lstStyle/>
-          <a:p>
-            <a:pPr>
-              <a:spcBef>
-                <a:spcPts val="1100"/>
-              </a:spcBef>
-            </a:pPr>
-            <a:r>
-              <a:rPr sz="2000">
-                <a:solidFill>
-                  <a:srgbClr val="1A1F2B"/>
-                </a:solidFill>
-              </a:rPr>
-              <a:t>•  Menjelaskan tujuan dan perbedaan </a:t>
-            </a:r>
-            <a:r>
-              <a:rPr sz="2000" b="1">
-                <a:solidFill>
-                  <a:srgbClr val="102545"/>
-                </a:solidFill>
-              </a:rPr>
-              <a:t>One-Hot vs Ordinal Encoding</a:t>
-            </a:r>
-            <a:r>
-              <a:rPr sz="2000">
-                <a:solidFill>
-                  <a:srgbClr val="1A1F2B"/>
-                </a:solidFill>
-              </a:rPr>
-              <a:t>, serta risiko </a:t>
-            </a:r>
-            <a:r>
-              <a:rPr sz="2000" b="1">
-                <a:solidFill>
-                  <a:srgbClr val="102545"/>
-                </a:solidFill>
-              </a:rPr>
-              <a:t>target encoding</a:t>
-            </a:r>
-          </a:p>
-          <a:p>
-            <a:pPr>
-              <a:spcBef>
-                <a:spcPts val="1100"/>
-              </a:spcBef>
-            </a:pPr>
-            <a:r>
-              <a:rPr sz="2000">
-                <a:solidFill>
-                  <a:srgbClr val="1A1F2B"/>
-                </a:solidFill>
-              </a:rPr>
-              <a:t>•  Melakukan encoding kategorikal </a:t>
-            </a:r>
-            <a:r>
-              <a:rPr sz="2000" b="1">
-                <a:solidFill>
-                  <a:srgbClr val="102545"/>
-                </a:solidFill>
-              </a:rPr>
-              <a:t>di dalam Pipeline/ColumnTransformer</a:t>
-            </a:r>
-            <a:r>
-              <a:rPr sz="2000">
-                <a:solidFill>
-                  <a:srgbClr val="1A1F2B"/>
-                </a:solidFill>
-              </a:rPr>
-              <a:t> untuk mencegah data leakage</a:t>
-            </a:r>
-          </a:p>
-          <a:p>
-            <a:pPr>
-              <a:spcBef>
-                <a:spcPts val="1100"/>
-              </a:spcBef>
-            </a:pPr>
-            <a:r>
-              <a:rPr sz="2000">
-                <a:solidFill>
-                  <a:srgbClr val="1A1F2B"/>
-                </a:solidFill>
-              </a:rPr>
-              <a:t>•  Merancang </a:t>
-            </a:r>
-            <a:r>
-              <a:rPr sz="2000" b="1">
-                <a:solidFill>
-                  <a:srgbClr val="102545"/>
-                </a:solidFill>
-              </a:rPr>
-              <a:t>&gt;=2 fitur turunan</a:t>
-            </a:r>
-            <a:r>
-              <a:rPr sz="2000">
-                <a:solidFill>
-                  <a:srgbClr val="1A1F2B"/>
-                </a:solidFill>
-              </a:rPr>
-              <a:t> (FamilySize, FarePerPerson, AgeBin, IsAlone, interaksi) dan menjelaskan rasionalnya</a:t>
-            </a:r>
-          </a:p>
-          <a:p>
-            <a:pPr>
-              <a:spcBef>
-                <a:spcPts val="1100"/>
-              </a:spcBef>
-            </a:pPr>
-            <a:r>
-              <a:rPr sz="2000">
-                <a:solidFill>
-                  <a:srgbClr val="1A1F2B"/>
-                </a:solidFill>
-              </a:rPr>
-              <a:t>•  Mengevaluasi dampak encoding dan fitur turunan pada </a:t>
-            </a:r>
-            <a:r>
-              <a:rPr sz="2000" b="1">
-                <a:solidFill>
-                  <a:srgbClr val="102545"/>
-                </a:solidFill>
-              </a:rPr>
-              <a:t>model linear (LogReg) vs tree-based (DT/RF)</a:t>
-            </a:r>
-          </a:p>
-          <a:p>
-            <a:pPr>
-              <a:spcBef>
-                <a:spcPts val="1100"/>
-              </a:spcBef>
-            </a:pPr>
-            <a:r>
-              <a:rPr sz="2000">
-                <a:solidFill>
-                  <a:srgbClr val="1A1F2B"/>
-                </a:solidFill>
-              </a:rPr>
-              <a:t>•  Menyusun </a:t>
-            </a:r>
-            <a:r>
-              <a:rPr sz="2000" b="1">
-                <a:solidFill>
-                  <a:srgbClr val="102545"/>
-                </a:solidFill>
-              </a:rPr>
-              <a:t>ablation study</a:t>
-            </a:r>
-            <a:r>
-              <a:rPr sz="2000">
-                <a:solidFill>
-                  <a:srgbClr val="1A1F2B"/>
-                </a:solidFill>
-              </a:rPr>
-              <a:t> dan mini-report 1 halaman: </a:t>
-            </a:r>
-            <a:r>
-              <a:rPr sz="2000" i="1">
-                <a:solidFill>
-                  <a:srgbClr val="1A1F2B"/>
-                </a:solidFill>
-              </a:rPr>
-              <a:t>"Tiga Fitur Baru Terbaik"</a:t>
+              <a:t>Di Pertemuan 2 kita sudah rapikan nilai hilang dan skala. Tapi seluruh kolom kategori masih kita hindari. Hari ini kita hadapi - dan kita akan lihat bahwa CARA menyandikannya mengubah performa model, kadang lebih besar daripada mengganti modelnya.</a:t>
             </a:r>
           </a:p>
         </p:txBody>
@@ -14535,7 +15693,7 @@
               </a:defRPr>
             </a:pPr>
             <a:r>
-              <a:t>Bahan belajar mandiri di Drive - pertemuan 3</a:t>
+              <a:t>Capaian pertemuan ini (5 tujuan modul mandiri P3)</a:t>
             </a:r>
           </a:p>
         </p:txBody>
@@ -14570,7 +15728,7 @@
               </a:defRPr>
             </a:pPr>
             <a:r>
-              <a:t>Tautan lengkap ada di slide terakhir. eBelajar hanya menautkan - satu salinan tunggal di Drive.</a:t>
+              <a:t>Kelimanya dinilai di rubrik 100 poin: encoding 25 · feature engineering 25 · evaluasi &amp; ablation 25 · analisis 15 · reproducibility 10.</a:t>
             </a:r>
           </a:p>
         </p:txBody>
@@ -14603,44 +15761,36 @@
               </a:spcBef>
             </a:pPr>
             <a:r>
-              <a:rPr sz="2200">
+              <a:rPr sz="2000">
                 <a:solidFill>
                   <a:srgbClr val="1A1F2B"/>
                 </a:solidFill>
               </a:rPr>
-              <a:t>•  </a:t>
-            </a:r>
-            <a:r>
-              <a:rPr sz="2200" b="1">
+              <a:t>•  Menjelaskan tujuan dan perbedaan </a:t>
+            </a:r>
+            <a:r>
+              <a:rPr sz="2000" b="1">
                 <a:solidFill>
                   <a:srgbClr val="102545"/>
                 </a:solidFill>
               </a:rPr>
-              <a:t>Modul Mandiri P3 (PDF)</a:t>
-            </a:r>
-            <a:r>
-              <a:rPr sz="2200">
+              <a:t>One-Hot vs Ordinal Encoding</a:t>
+            </a:r>
+            <a:r>
+              <a:rPr sz="2000">
                 <a:solidFill>
                   <a:srgbClr val="1A1F2B"/>
                 </a:solidFill>
               </a:rPr>
-              <a:t> - </a:t>
-            </a:r>
-            <a:r>
-              <a:rPr sz="2200" i="1">
-                <a:solidFill>
-                  <a:srgbClr val="1A1F2B"/>
+              <a:t>, serta risiko </a:t>
+            </a:r>
+            <a:r>
+              <a:rPr sz="2000" b="1">
+                <a:solidFill>
+                  <a:srgbClr val="102545"/>
                 </a:solidFill>
               </a:rPr>
-              <a:t>Encoding &amp; Feature Thinking</a:t>
-            </a:r>
-            <a:r>
-              <a:rPr sz="2200">
-                <a:solidFill>
-                  <a:srgbClr val="1A1F2B"/>
-                </a:solidFill>
-              </a:rPr>
-              <a:t>, estimasi 3-4 jam</a:t>
+              <a:t>target encoding</a:t>
             </a:r>
           </a:p>
           <a:p>
@@ -14650,28 +15800,28 @@
               </a:spcBef>
             </a:pPr>
             <a:r>
-              <a:rPr sz="2200">
+              <a:rPr sz="2000">
                 <a:solidFill>
                   <a:srgbClr val="1A1F2B"/>
                 </a:solidFill>
               </a:rPr>
-              <a:t>•  </a:t>
-            </a:r>
-            <a:r>
-              <a:rPr sz="2200" b="1">
+              <a:t>•  Melakukan encoding kategorikal </a:t>
+            </a:r>
+            <a:r>
+              <a:rPr sz="2000" b="1">
                 <a:solidFill>
                   <a:srgbClr val="102545"/>
                 </a:solidFill>
               </a:rPr>
-              <a:t>LKS Colab</a:t>
-            </a:r>
-            <a:r>
-              <a:rPr sz="2200">
+              <a:t>di dalam Pipeline/ColumnTransformer</a:t>
+            </a:r>
+            <a:r>
+              <a:rPr sz="2000">
                 <a:solidFill>
                   <a:srgbClr val="1A1F2B"/>
                 </a:solidFill>
               </a:rPr>
-              <a:t> - `LKS_P3_Encoding_Feature_Thinking.ipynb`</a:t>
+              <a:t> untuk mencegah data leakage</a:t>
             </a:r>
           </a:p>
           <a:p>
@@ -14681,20 +15831,28 @@
               </a:spcBef>
             </a:pPr>
             <a:r>
-              <a:rPr sz="2200">
+              <a:rPr sz="2000">
                 <a:solidFill>
                   <a:srgbClr val="1A1F2B"/>
                 </a:solidFill>
               </a:rPr>
-              <a:t>•  Video </a:t>
-            </a:r>
-            <a:r>
-              <a:rPr sz="2200" b="1">
+              <a:t>•  Merancang </a:t>
+            </a:r>
+            <a:r>
+              <a:rPr sz="2000" b="1">
                 <a:solidFill>
                   <a:srgbClr val="102545"/>
                 </a:solidFill>
               </a:rPr>
-              <a:t>Menyelami Encoding &amp; Rekayasa Fitur: Kunci Pipeline Anti-Leakage</a:t>
+              <a:t>&gt;=2 fitur turunan</a:t>
+            </a:r>
+            <a:r>
+              <a:rPr sz="2000">
+                <a:solidFill>
+                  <a:srgbClr val="1A1F2B"/>
+                </a:solidFill>
+              </a:rPr>
+              <a:t> (FamilySize, FarePerPerson, AgeBin, IsAlone, interaksi) dan menjelaskan rasionalnya</a:t>
             </a:r>
           </a:p>
           <a:p>
@@ -14704,20 +15862,20 @@
               </a:spcBef>
             </a:pPr>
             <a:r>
-              <a:rPr sz="2200">
+              <a:rPr sz="2000">
                 <a:solidFill>
                   <a:srgbClr val="1A1F2B"/>
                 </a:solidFill>
               </a:rPr>
-              <a:t>•  Video </a:t>
-            </a:r>
-            <a:r>
-              <a:rPr sz="2200" b="1">
+              <a:t>•  Mengevaluasi dampak encoding dan fitur turunan pada </a:t>
+            </a:r>
+            <a:r>
+              <a:rPr sz="2000" b="1">
                 <a:solidFill>
                   <a:srgbClr val="102545"/>
                 </a:solidFill>
               </a:rPr>
-              <a:t>Bahasa Rahasia Data</a:t>
+              <a:t>model linear (LogReg) vs tree-based (DT/RF)</a:t>
             </a:r>
           </a:p>
           <a:p>
@@ -14726,36 +15884,37 @@
                 <a:spcPts val="1100"/>
               </a:spcBef>
             </a:pPr>
-          </a:p>
-          <a:p>
-            <a:pPr>
-              <a:spcBef>
-                <a:spcPts val="1100"/>
-              </a:spcBef>
-            </a:pPr>
-            <a:r>
-              <a:rPr sz="2200">
+            <a:r>
+              <a:rPr sz="2000">
                 <a:solidFill>
                   <a:srgbClr val="1A1F2B"/>
                 </a:solidFill>
               </a:rPr>
-              <a:t>•  Dataset tetap </a:t>
-            </a:r>
-            <a:r>
-              <a:rPr sz="2200" b="1">
+              <a:t>•  Menyusun </a:t>
+            </a:r>
+            <a:r>
+              <a:rPr sz="2000" b="1">
                 <a:solidFill>
                   <a:srgbClr val="102545"/>
                 </a:solidFill>
               </a:rPr>
-              <a:t>Titanic</a:t>
-            </a:r>
-            <a:r>
-              <a:rPr sz="2200">
+              <a:t>ablation study</a:t>
+            </a:r>
+            <a:r>
+              <a:rPr sz="2000">
                 <a:solidFill>
                   <a:srgbClr val="1A1F2B"/>
                 </a:solidFill>
               </a:rPr>
-              <a:t> - sengaja sama sejak P2 supaya perbandingan antar pertemuan adil. Alternatif kalau ingin kategori berkardinalitas tinggi: UCI Adult.</a:t>
+              <a:t> dan mini-report 1 halaman: </a:t>
+            </a:r>
+            <a:r>
+              <a:rPr sz="2000" i="1">
+                <a:solidFill>
+                  <a:srgbClr val="1A1F2B"/>
+                </a:solidFill>
+              </a:rPr>
+              <a:t>"Tiga Fitur Baru Terbaik"</a:t>
             </a:r>
           </a:p>
         </p:txBody>
@@ -14793,6 +15952,50 @@
             <a:avLst/>
           </a:prstGeom>
           <a:solidFill>
+            <a:srgbClr val="FFFFFF"/>
+          </a:solidFill>
+          <a:ln>
+            <a:noFill/>
+          </a:ln>
+          <a:effectLst/>
+        </p:spPr>
+        <p:style>
+          <a:lnRef idx="1">
+            <a:schemeClr val="accent1"/>
+          </a:lnRef>
+          <a:fillRef idx="3">
+            <a:schemeClr val="accent1"/>
+          </a:fillRef>
+          <a:effectRef idx="2">
+            <a:schemeClr val="accent1"/>
+          </a:effectRef>
+          <a:fontRef idx="minor">
+            <a:schemeClr val="lt1"/>
+          </a:fontRef>
+        </p:style>
+        <p:txBody>
+          <a:bodyPr rtlCol="0" anchor="ctr"/>
+          <a:lstStyle/>
+          <a:p>
+            <a:pPr algn="ctr"/>
+          </a:p>
+        </p:txBody>
+      </p:sp>
+      <p:sp>
+        <p:nvSpPr>
+          <p:cNvPr id="3" name="Rectangle 2"/>
+          <p:cNvSpPr/>
+          <p:nvPr/>
+        </p:nvSpPr>
+        <p:spPr>
+          <a:xfrm>
+            <a:off x="0" y="0"/>
+            <a:ext cx="12191695" cy="128016"/>
+          </a:xfrm>
+          <a:prstGeom prst="rect">
+            <a:avLst/>
+          </a:prstGeom>
+          <a:solidFill>
             <a:srgbClr val="102545"/>
           </a:solidFill>
           <a:ln>
@@ -14824,58 +16027,14 @@
       </p:sp>
       <p:sp>
         <p:nvSpPr>
-          <p:cNvPr id="3" name="Rectangle 2"/>
-          <p:cNvSpPr/>
-          <p:nvPr/>
-        </p:nvSpPr>
-        <p:spPr>
-          <a:xfrm>
-            <a:off x="1005840" y="2788920"/>
-            <a:ext cx="1463040" cy="91440"/>
-          </a:xfrm>
-          <a:prstGeom prst="rect">
-            <a:avLst/>
-          </a:prstGeom>
-          <a:solidFill>
-            <a:srgbClr val="E6A023"/>
-          </a:solidFill>
-          <a:ln>
-            <a:noFill/>
-          </a:ln>
-          <a:effectLst/>
-        </p:spPr>
-        <p:style>
-          <a:lnRef idx="1">
-            <a:schemeClr val="accent1"/>
-          </a:lnRef>
-          <a:fillRef idx="3">
-            <a:schemeClr val="accent1"/>
-          </a:fillRef>
-          <a:effectRef idx="2">
-            <a:schemeClr val="accent1"/>
-          </a:effectRef>
-          <a:fontRef idx="minor">
-            <a:schemeClr val="lt1"/>
-          </a:fontRef>
-        </p:style>
-        <p:txBody>
-          <a:bodyPr rtlCol="0" anchor="ctr"/>
-          <a:lstStyle/>
-          <a:p>
-            <a:pPr algn="ctr"/>
-          </a:p>
-        </p:txBody>
-      </p:sp>
-      <p:sp>
-        <p:nvSpPr>
           <p:cNvPr id="4" name="TextBox 3"/>
           <p:cNvSpPr txBox="1"/>
           <p:nvPr/>
         </p:nvSpPr>
         <p:spPr>
           <a:xfrm>
-            <a:off x="1005840" y="2011680"/>
-            <a:ext cx="10241280" cy="731520"/>
+            <a:off x="777240" y="411480"/>
+            <a:ext cx="10789920" cy="914400"/>
           </a:xfrm>
           <a:prstGeom prst="rect">
             <a:avLst/>
@@ -14889,14 +16048,14 @@
           <a:lstStyle/>
           <a:p>
             <a:pPr>
-              <a:defRPr sz="2000" b="1">
-                <a:solidFill>
-                  <a:srgbClr val="E6A023"/>
+              <a:defRPr sz="3400" b="1">
+                <a:solidFill>
+                  <a:srgbClr val="102545"/>
                 </a:solidFill>
               </a:defRPr>
             </a:pPr>
             <a:r>
-              <a:t>BAGIAN 1</a:t>
+              <a:t>Bahan belajar mandiri di Drive - pertemuan 3</a:t>
             </a:r>
           </a:p>
         </p:txBody>
@@ -14909,8 +16068,8 @@
         </p:nvSpPr>
         <p:spPr>
           <a:xfrm>
-            <a:off x="1005840" y="3063240"/>
-            <a:ext cx="10241280" cy="1280160"/>
+            <a:off x="777240" y="1234440"/>
+            <a:ext cx="10789920" cy="548640"/>
           </a:xfrm>
           <a:prstGeom prst="rect">
             <a:avLst/>
@@ -14924,14 +16083,14 @@
           <a:lstStyle/>
           <a:p>
             <a:pPr>
-              <a:defRPr sz="4400" b="1">
-                <a:solidFill>
-                  <a:srgbClr val="FFFFFF"/>
+              <a:defRPr sz="1900" i="1">
+                <a:solidFill>
+                  <a:srgbClr val="5A6372"/>
                 </a:solidFill>
               </a:defRPr>
             </a:pPr>
             <a:r>
-              <a:t>Menyandikan kategori</a:t>
+              <a:t>Tautan lengkap ada di slide terakhir. eBelajar hanya menautkan - satu salinan tunggal di Drive.</a:t>
             </a:r>
           </a:p>
         </p:txBody>
@@ -14944,8 +16103,8 @@
         </p:nvSpPr>
         <p:spPr>
           <a:xfrm>
-            <a:off x="1005840" y="4297680"/>
-            <a:ext cx="10241280" cy="914400"/>
+            <a:off x="777240" y="1874519"/>
+            <a:ext cx="10789920" cy="4480560"/>
           </a:xfrm>
           <a:prstGeom prst="rect">
             <a:avLst/>
@@ -14959,14 +16118,164 @@
           <a:lstStyle/>
           <a:p>
             <a:pPr>
-              <a:defRPr sz="2200">
-                <a:solidFill>
-                  <a:srgbClr val="C8D4E6"/>
-                </a:solidFill>
-              </a:defRPr>
+              <a:spcBef>
+                <a:spcPts val="1100"/>
+              </a:spcBef>
             </a:pPr>
             <a:r>
-              <a:t>One-Hot, Ordinal, dan satu jebakan bernama target encoding</a:t>
+              <a:rPr sz="2200">
+                <a:solidFill>
+                  <a:srgbClr val="1A1F2B"/>
+                </a:solidFill>
+              </a:rPr>
+              <a:t>•  </a:t>
+            </a:r>
+            <a:r>
+              <a:rPr sz="2200" b="1">
+                <a:solidFill>
+                  <a:srgbClr val="102545"/>
+                </a:solidFill>
+              </a:rPr>
+              <a:t>Modul Mandiri P3 (PDF)</a:t>
+            </a:r>
+            <a:r>
+              <a:rPr sz="2200">
+                <a:solidFill>
+                  <a:srgbClr val="1A1F2B"/>
+                </a:solidFill>
+              </a:rPr>
+              <a:t> - </a:t>
+            </a:r>
+            <a:r>
+              <a:rPr sz="2200" i="1">
+                <a:solidFill>
+                  <a:srgbClr val="1A1F2B"/>
+                </a:solidFill>
+              </a:rPr>
+              <a:t>Encoding &amp; Feature Thinking</a:t>
+            </a:r>
+            <a:r>
+              <a:rPr sz="2200">
+                <a:solidFill>
+                  <a:srgbClr val="1A1F2B"/>
+                </a:solidFill>
+              </a:rPr>
+              <a:t>, estimasi 3-4 jam</a:t>
+            </a:r>
+          </a:p>
+          <a:p>
+            <a:pPr>
+              <a:spcBef>
+                <a:spcPts val="1100"/>
+              </a:spcBef>
+            </a:pPr>
+            <a:r>
+              <a:rPr sz="2200">
+                <a:solidFill>
+                  <a:srgbClr val="1A1F2B"/>
+                </a:solidFill>
+              </a:rPr>
+              <a:t>•  </a:t>
+            </a:r>
+            <a:r>
+              <a:rPr sz="2200" b="1">
+                <a:solidFill>
+                  <a:srgbClr val="102545"/>
+                </a:solidFill>
+              </a:rPr>
+              <a:t>LKS Colab</a:t>
+            </a:r>
+            <a:r>
+              <a:rPr sz="2200">
+                <a:solidFill>
+                  <a:srgbClr val="1A1F2B"/>
+                </a:solidFill>
+              </a:rPr>
+              <a:t> - `LKS_P3_Encoding_Feature_Thinking.ipynb`</a:t>
+            </a:r>
+          </a:p>
+          <a:p>
+            <a:pPr>
+              <a:spcBef>
+                <a:spcPts val="1100"/>
+              </a:spcBef>
+            </a:pPr>
+            <a:r>
+              <a:rPr sz="2200">
+                <a:solidFill>
+                  <a:srgbClr val="1A1F2B"/>
+                </a:solidFill>
+              </a:rPr>
+              <a:t>•  Video </a:t>
+            </a:r>
+            <a:r>
+              <a:rPr sz="2200" b="1">
+                <a:solidFill>
+                  <a:srgbClr val="102545"/>
+                </a:solidFill>
+              </a:rPr>
+              <a:t>Menyelami Encoding &amp; Rekayasa Fitur: Kunci Pipeline Anti-Leakage</a:t>
+            </a:r>
+          </a:p>
+          <a:p>
+            <a:pPr>
+              <a:spcBef>
+                <a:spcPts val="1100"/>
+              </a:spcBef>
+            </a:pPr>
+            <a:r>
+              <a:rPr sz="2200">
+                <a:solidFill>
+                  <a:srgbClr val="1A1F2B"/>
+                </a:solidFill>
+              </a:rPr>
+              <a:t>•  Video </a:t>
+            </a:r>
+            <a:r>
+              <a:rPr sz="2200" b="1">
+                <a:solidFill>
+                  <a:srgbClr val="102545"/>
+                </a:solidFill>
+              </a:rPr>
+              <a:t>Bahasa Rahasia Data</a:t>
+            </a:r>
+          </a:p>
+          <a:p>
+            <a:pPr>
+              <a:spcBef>
+                <a:spcPts val="1100"/>
+              </a:spcBef>
+            </a:pPr>
+          </a:p>
+          <a:p>
+            <a:pPr>
+              <a:spcBef>
+                <a:spcPts val="1100"/>
+              </a:spcBef>
+            </a:pPr>
+            <a:r>
+              <a:rPr sz="2200">
+                <a:solidFill>
+                  <a:srgbClr val="1A1F2B"/>
+                </a:solidFill>
+              </a:rPr>
+              <a:t>•  Dataset tetap </a:t>
+            </a:r>
+            <a:r>
+              <a:rPr sz="2200" b="1">
+                <a:solidFill>
+                  <a:srgbClr val="102545"/>
+                </a:solidFill>
+              </a:rPr>
+              <a:t>Titanic</a:t>
+            </a:r>
+            <a:r>
+              <a:rPr sz="2200">
+                <a:solidFill>
+                  <a:srgbClr val="1A1F2B"/>
+                </a:solidFill>
+              </a:rPr>
+              <a:t> - sengaja sama sejak P2 supaya perbandingan antar pertemuan adil. Alternatif kalau ingin kategori berkardinalitas tinggi: UCI Adult.</a:t>
             </a:r>
           </a:p>
         </p:txBody>
